--- a/MonadChat-pitch.pptx
+++ b/MonadChat-pitch.pptx
@@ -684,7 +684,7 @@
           <a:p>
             <a:r>
               <a:rPr lang="en-US" dirty="0"/>
-              <a:t>So why has nobody shipped this? Because on old chains it was impossible. Twelve seconds to confirm a message kills the conversation. Dollars of gas eat the word many times over. And a paid room with no spam control gets flooded by bots. Every message as a payment was an obvious idea no one could ship.</a:t>
+              <a:t>So why has nobody shipped this? Because on old chains it was impossible. Twelve seconds to confirm a message kills the conversation. Fifteen to thirty TPS for the whole planet — one busy stream’s chat outruns the entire chain. Dollars of gas eat the word many times over. And bots flood a paid room with no spam control. Every message as a payment was an obvious idea no one could ship.</a:t>
             </a:r>
             <a:endParaRPr lang="en-US" dirty="0"/>
           </a:p>
@@ -2260,24 +2260,24 @@
         </p:nvSpPr>
         <p:spPr>
           <a:xfrm>
-            <a:off x="548640" y="1463040"/>
-            <a:ext cx="4480560" cy="822960"/>
-          </a:xfrm>
-          <a:prstGeom prst="rect">
-            <a:avLst/>
-          </a:prstGeom>
-          <a:noFill/>
-          <a:ln/>
-        </p:spPr>
-        <p:txBody>
-          <a:bodyPr wrap="square" lIns="0" tIns="0" rIns="0" bIns="0" rtlCol="0" anchor="ctr"/>
-          <a:lstStyle/>
-          <a:p>
-            <a:pPr indent="0" marL="0">
-              <a:buNone/>
-            </a:pPr>
-            <a:r>
-              <a:rPr lang="en-US" sz="4400" dirty="0">
+            <a:off x="548640" y="1371600"/>
+            <a:ext cx="4480560" cy="731520"/>
+          </a:xfrm>
+          <a:prstGeom prst="rect">
+            <a:avLst/>
+          </a:prstGeom>
+          <a:noFill/>
+          <a:ln/>
+        </p:spPr>
+        <p:txBody>
+          <a:bodyPr wrap="square" lIns="0" tIns="0" rIns="0" bIns="0" rtlCol="0" anchor="ctr"/>
+          <a:lstStyle/>
+          <a:p>
+            <a:pPr indent="0" marL="0">
+              <a:buNone/>
+            </a:pPr>
+            <a:r>
+              <a:rPr lang="en-US" sz="4000" dirty="0">
                 <a:solidFill>
                   <a:srgbClr val="1A1712"/>
                 </a:solidFill>
@@ -2287,7 +2287,7 @@
               </a:rPr>
               <a:t>12+ seconds</a:t>
             </a:r>
-            <a:endParaRPr lang="en-US" sz="4400" dirty="0"/>
+            <a:endParaRPr lang="en-US" sz="4000" dirty="0"/>
           </a:p>
         </p:txBody>
       </p:sp>
@@ -2299,8 +2299,8 @@
         </p:nvSpPr>
         <p:spPr>
           <a:xfrm>
-            <a:off x="5303520" y="1572768"/>
-            <a:ext cx="6309360" cy="822960"/>
+            <a:off x="5303520" y="1463040"/>
+            <a:ext cx="6309360" cy="731520"/>
           </a:xfrm>
           <a:prstGeom prst="rect">
             <a:avLst/>
@@ -2314,12 +2314,12 @@
           <a:p>
             <a:pPr indent="0" marL="0">
               <a:lnSpc>
-                <a:spcPts val="2500"/>
+                <a:spcPts val="2400"/>
               </a:lnSpc>
               <a:buNone/>
             </a:pPr>
             <a:r>
-              <a:rPr lang="en-US" sz="1900" dirty="0">
+              <a:rPr lang="en-US" sz="1800" dirty="0">
                 <a:solidFill>
                   <a:srgbClr val="71685A"/>
                 </a:solidFill>
@@ -2329,7 +2329,7 @@
               </a:rPr>
               <a:t>to confirm a message — the conversation is dead on arrival</a:t>
             </a:r>
-            <a:endParaRPr lang="en-US" sz="1900" dirty="0"/>
+            <a:endParaRPr lang="en-US" sz="1800" dirty="0"/>
           </a:p>
         </p:txBody>
       </p:sp>
@@ -2341,24 +2341,24 @@
         </p:nvSpPr>
         <p:spPr>
           <a:xfrm>
-            <a:off x="548640" y="2788920"/>
-            <a:ext cx="4480560" cy="822960"/>
-          </a:xfrm>
-          <a:prstGeom prst="rect">
-            <a:avLst/>
-          </a:prstGeom>
-          <a:noFill/>
-          <a:ln/>
-        </p:spPr>
-        <p:txBody>
-          <a:bodyPr wrap="square" lIns="0" tIns="0" rIns="0" bIns="0" rtlCol="0" anchor="ctr"/>
-          <a:lstStyle/>
-          <a:p>
-            <a:pPr indent="0" marL="0">
-              <a:buNone/>
-            </a:pPr>
-            <a:r>
-              <a:rPr lang="en-US" sz="4400" dirty="0">
+            <a:off x="548640" y="2404872"/>
+            <a:ext cx="4480560" cy="731520"/>
+          </a:xfrm>
+          <a:prstGeom prst="rect">
+            <a:avLst/>
+          </a:prstGeom>
+          <a:noFill/>
+          <a:ln/>
+        </p:spPr>
+        <p:txBody>
+          <a:bodyPr wrap="square" lIns="0" tIns="0" rIns="0" bIns="0" rtlCol="0" anchor="ctr"/>
+          <a:lstStyle/>
+          <a:p>
+            <a:pPr indent="0" marL="0">
+              <a:buNone/>
+            </a:pPr>
+            <a:r>
+              <a:rPr lang="en-US" sz="4000" dirty="0">
                 <a:solidFill>
                   <a:srgbClr val="1A1712"/>
                 </a:solidFill>
@@ -2366,9 +2366,9 @@
                 <a:ea typeface="Alsina" pitchFamily="34" charset="-122"/>
                 <a:cs typeface="Alsina" pitchFamily="34" charset="-120"/>
               </a:rPr>
-              <a:t>$1–5 of gas</a:t>
-            </a:r>
-            <a:endParaRPr lang="en-US" sz="4400" dirty="0"/>
+              <a:t>15–30 TPS</a:t>
+            </a:r>
+            <a:endParaRPr lang="en-US" sz="4000" dirty="0"/>
           </a:p>
         </p:txBody>
       </p:sp>
@@ -2380,8 +2380,8 @@
         </p:nvSpPr>
         <p:spPr>
           <a:xfrm>
-            <a:off x="5303520" y="2898648"/>
-            <a:ext cx="6309360" cy="822960"/>
+            <a:off x="5303520" y="2496312"/>
+            <a:ext cx="6309360" cy="731520"/>
           </a:xfrm>
           <a:prstGeom prst="rect">
             <a:avLst/>
@@ -2395,12 +2395,12 @@
           <a:p>
             <a:pPr indent="0" marL="0">
               <a:lnSpc>
-                <a:spcPts val="2500"/>
+                <a:spcPts val="2400"/>
               </a:lnSpc>
               <a:buNone/>
             </a:pPr>
             <a:r>
-              <a:rPr lang="en-US" sz="1900" dirty="0">
+              <a:rPr lang="en-US" sz="1800" dirty="0">
                 <a:solidFill>
                   <a:srgbClr val="71685A"/>
                 </a:solidFill>
@@ -2408,9 +2408,9 @@
                 <a:ea typeface="Georgia" pitchFamily="34" charset="-122"/>
                 <a:cs typeface="Georgia" pitchFamily="34" charset="-120"/>
               </a:rPr>
-              <a:t>per message — the fee eats the word many times over</a:t>
-            </a:r>
-            <a:endParaRPr lang="en-US" sz="1900" dirty="0"/>
+              <a:t>for the whole world — one busy stream’s chat outruns the entire chain</a:t>
+            </a:r>
+            <a:endParaRPr lang="en-US" sz="1800" dirty="0"/>
           </a:p>
         </p:txBody>
       </p:sp>
@@ -2422,24 +2422,24 @@
         </p:nvSpPr>
         <p:spPr>
           <a:xfrm>
-            <a:off x="548640" y="4114800"/>
-            <a:ext cx="4480560" cy="822960"/>
-          </a:xfrm>
-          <a:prstGeom prst="rect">
-            <a:avLst/>
-          </a:prstGeom>
-          <a:noFill/>
-          <a:ln/>
-        </p:spPr>
-        <p:txBody>
-          <a:bodyPr wrap="square" lIns="0" tIns="0" rIns="0" bIns="0" rtlCol="0" anchor="ctr"/>
-          <a:lstStyle/>
-          <a:p>
-            <a:pPr indent="0" marL="0">
-              <a:buNone/>
-            </a:pPr>
-            <a:r>
-              <a:rPr lang="en-US" sz="4400" dirty="0">
+            <a:off x="548640" y="3438144"/>
+            <a:ext cx="4480560" cy="731520"/>
+          </a:xfrm>
+          <a:prstGeom prst="rect">
+            <a:avLst/>
+          </a:prstGeom>
+          <a:noFill/>
+          <a:ln/>
+        </p:spPr>
+        <p:txBody>
+          <a:bodyPr wrap="square" lIns="0" tIns="0" rIns="0" bIns="0" rtlCol="0" anchor="ctr"/>
+          <a:lstStyle/>
+          <a:p>
+            <a:pPr indent="0" marL="0">
+              <a:buNone/>
+            </a:pPr>
+            <a:r>
+              <a:rPr lang="en-US" sz="4000" dirty="0">
                 <a:solidFill>
                   <a:srgbClr val="1A1712"/>
                 </a:solidFill>
@@ -2447,9 +2447,9 @@
                 <a:ea typeface="Alsina" pitchFamily="34" charset="-122"/>
                 <a:cs typeface="Alsina" pitchFamily="34" charset="-120"/>
               </a:rPr>
-              <a:t>zero spam control</a:t>
-            </a:r>
-            <a:endParaRPr lang="en-US" sz="4400" dirty="0"/>
+              <a:t>$1–5 of gas</a:t>
+            </a:r>
+            <a:endParaRPr lang="en-US" sz="4000" dirty="0"/>
           </a:p>
         </p:txBody>
       </p:sp>
@@ -2461,8 +2461,8 @@
         </p:nvSpPr>
         <p:spPr>
           <a:xfrm>
-            <a:off x="5303520" y="4224528"/>
-            <a:ext cx="6309360" cy="822960"/>
+            <a:off x="5303520" y="3529584"/>
+            <a:ext cx="6309360" cy="731520"/>
           </a:xfrm>
           <a:prstGeom prst="rect">
             <a:avLst/>
@@ -2476,12 +2476,12 @@
           <a:p>
             <a:pPr indent="0" marL="0">
               <a:lnSpc>
-                <a:spcPts val="2500"/>
+                <a:spcPts val="2400"/>
               </a:lnSpc>
               <a:buNone/>
             </a:pPr>
             <a:r>
-              <a:rPr lang="en-US" sz="1900" dirty="0">
+              <a:rPr lang="en-US" sz="1800" dirty="0">
                 <a:solidFill>
                   <a:srgbClr val="71685A"/>
                 </a:solidFill>
@@ -2489,15 +2489,96 @@
                 <a:ea typeface="Georgia" pitchFamily="34" charset="-122"/>
                 <a:cs typeface="Georgia" pitchFamily="34" charset="-120"/>
               </a:rPr>
+              <a:t>per message — the fee eats the word many times over</a:t>
+            </a:r>
+            <a:endParaRPr lang="en-US" sz="1800" dirty="0"/>
+          </a:p>
+        </p:txBody>
+      </p:sp>
+      <p:sp>
+        <p:nvSpPr>
+          <p:cNvPr id="11" name="Text 9"/>
+          <p:cNvSpPr txBox="1"/>
+          <p:nvPr/>
+        </p:nvSpPr>
+        <p:spPr>
+          <a:xfrm>
+            <a:off x="548640" y="4471416"/>
+            <a:ext cx="4480560" cy="731520"/>
+          </a:xfrm>
+          <a:prstGeom prst="rect">
+            <a:avLst/>
+          </a:prstGeom>
+          <a:noFill/>
+          <a:ln/>
+        </p:spPr>
+        <p:txBody>
+          <a:bodyPr wrap="square" lIns="0" tIns="0" rIns="0" bIns="0" rtlCol="0" anchor="ctr"/>
+          <a:lstStyle/>
+          <a:p>
+            <a:pPr indent="0" marL="0">
+              <a:buNone/>
+            </a:pPr>
+            <a:r>
+              <a:rPr lang="en-US" sz="4000" dirty="0">
+                <a:solidFill>
+                  <a:srgbClr val="1A1712"/>
+                </a:solidFill>
+                <a:latin typeface="Alsina" pitchFamily="34" charset="0"/>
+                <a:ea typeface="Alsina" pitchFamily="34" charset="-122"/>
+                <a:cs typeface="Alsina" pitchFamily="34" charset="-120"/>
+              </a:rPr>
+              <a:t>zero spam control</a:t>
+            </a:r>
+            <a:endParaRPr lang="en-US" sz="4000" dirty="0"/>
+          </a:p>
+        </p:txBody>
+      </p:sp>
+      <p:sp>
+        <p:nvSpPr>
+          <p:cNvPr id="12" name="Text 10"/>
+          <p:cNvSpPr txBox="1"/>
+          <p:nvPr/>
+        </p:nvSpPr>
+        <p:spPr>
+          <a:xfrm>
+            <a:off x="5303520" y="4562856"/>
+            <a:ext cx="6309360" cy="731520"/>
+          </a:xfrm>
+          <a:prstGeom prst="rect">
+            <a:avLst/>
+          </a:prstGeom>
+          <a:noFill/>
+          <a:ln/>
+        </p:spPr>
+        <p:txBody>
+          <a:bodyPr wrap="square" lIns="0" tIns="0" rIns="0" bIns="0" rtlCol="0" anchor="ctr"/>
+          <a:lstStyle/>
+          <a:p>
+            <a:pPr indent="0" marL="0">
+              <a:lnSpc>
+                <a:spcPts val="2400"/>
+              </a:lnSpc>
+              <a:buNone/>
+            </a:pPr>
+            <a:r>
+              <a:rPr lang="en-US" sz="1800" dirty="0">
+                <a:solidFill>
+                  <a:srgbClr val="71685A"/>
+                </a:solidFill>
+                <a:latin typeface="Georgia" pitchFamily="34" charset="0"/>
+                <a:ea typeface="Georgia" pitchFamily="34" charset="-122"/>
+                <a:cs typeface="Georgia" pitchFamily="34" charset="-120"/>
+              </a:rPr>
               <a:t>bots flood a paid room faster than any server can ban them</a:t>
             </a:r>
-            <a:endParaRPr lang="en-US" sz="1900" dirty="0"/>
-          </a:p>
-        </p:txBody>
-      </p:sp>
-      <p:sp>
-        <p:nvSpPr>
-          <p:cNvPr id="11" name="Shape 9"/>
+            <a:endParaRPr lang="en-US" sz="1800" dirty="0"/>
+          </a:p>
+        </p:txBody>
+      </p:sp>
+      <p:sp>
+        <p:nvSpPr>
+          <p:cNvPr id="13" name="Shape 11"/>
           <p:cNvSpPr/>
           <p:nvPr/>
         </p:nvSpPr>
@@ -2520,7 +2601,7 @@
       </p:sp>
       <p:sp>
         <p:nvSpPr>
-          <p:cNvPr id="12" name="Text 10"/>
+          <p:cNvPr id="14" name="Text 12"/>
           <p:cNvSpPr txBox="1"/>
           <p:nvPr/>
         </p:nvSpPr>

--- a/MonadChat-pitch.pptx
+++ b/MonadChat-pitch.pptx
@@ -1411,50 +1411,30 @@
       </p:grpSpPr>
       <p:sp>
         <p:nvSpPr>
-          <p:cNvPr id="2" name="Shape 0"/>
-          <p:cNvSpPr/>
-          <p:nvPr/>
-        </p:nvSpPr>
-        <p:spPr>
-          <a:xfrm>
-            <a:off x="566928" y="673913"/>
-            <a:ext cx="261518" cy="261518"/>
-          </a:xfrm>
-          <a:prstGeom prst="rect">
-            <a:avLst/>
-          </a:prstGeom>
-          <a:solidFill>
-            <a:srgbClr val="BF3A1E"/>
-          </a:solidFill>
-          <a:ln/>
-        </p:spPr>
-      </p:sp>
-      <p:sp>
-        <p:nvSpPr>
-          <p:cNvPr id="3" name="Text 1"/>
-          <p:cNvSpPr txBox="1"/>
-          <p:nvPr/>
-        </p:nvSpPr>
-        <p:spPr>
-          <a:xfrm>
-            <a:off x="938174" y="376733"/>
-            <a:ext cx="3657600" cy="570586"/>
-          </a:xfrm>
-          <a:prstGeom prst="rect">
-            <a:avLst/>
-          </a:prstGeom>
-          <a:noFill/>
-          <a:ln/>
-        </p:spPr>
-        <p:txBody>
-          <a:bodyPr wrap="square" lIns="0" tIns="0" rIns="0" bIns="0" rtlCol="0" anchor="ctr"/>
-          <a:lstStyle/>
-          <a:p>
-            <a:pPr indent="0" marL="0">
-              <a:buNone/>
-            </a:pPr>
-            <a:r>
-              <a:rPr lang="en-US" sz="2600" dirty="0">
+          <p:cNvPr id="2" name="Text 0"/>
+          <p:cNvSpPr txBox="1"/>
+          <p:nvPr/>
+        </p:nvSpPr>
+        <p:spPr>
+          <a:xfrm>
+            <a:off x="640080" y="566928"/>
+            <a:ext cx="3657600" cy="548640"/>
+          </a:xfrm>
+          <a:prstGeom prst="rect">
+            <a:avLst/>
+          </a:prstGeom>
+          <a:noFill/>
+          <a:ln/>
+        </p:spPr>
+        <p:txBody>
+          <a:bodyPr wrap="square" lIns="0" tIns="0" rIns="0" bIns="0" rtlCol="0" anchor="ctr"/>
+          <a:lstStyle/>
+          <a:p>
+            <a:pPr indent="0" marL="0">
+              <a:buNone/>
+            </a:pPr>
+            <a:r>
+              <a:rPr lang="en-US" sz="2400" dirty="0">
                 <a:solidFill>
                   <a:srgbClr val="1A1712"/>
                 </a:solidFill>
@@ -1464,19 +1444,19 @@
               </a:rPr>
               <a:t>MonadChat</a:t>
             </a:r>
-            <a:endParaRPr lang="en-US" sz="2600" dirty="0"/>
-          </a:p>
-        </p:txBody>
-      </p:sp>
-      <p:sp>
-        <p:nvSpPr>
-          <p:cNvPr id="4" name="Text 2"/>
-          <p:cNvSpPr txBox="1"/>
-          <p:nvPr/>
-        </p:nvSpPr>
-        <p:spPr>
-          <a:xfrm>
-            <a:off x="502920" y="1371600"/>
+            <a:endParaRPr lang="en-US" sz="2400" dirty="0"/>
+          </a:p>
+        </p:txBody>
+      </p:sp>
+      <p:sp>
+        <p:nvSpPr>
+          <p:cNvPr id="3" name="Text 1"/>
+          <p:cNvSpPr txBox="1"/>
+          <p:nvPr/>
+        </p:nvSpPr>
+        <p:spPr>
+          <a:xfrm>
+            <a:off x="594360" y="1554480"/>
             <a:ext cx="11155680" cy="2743200"/>
           </a:xfrm>
           <a:prstGeom prst="rect">
@@ -1547,13 +1527,13 @@
       </p:sp>
       <p:sp>
         <p:nvSpPr>
-          <p:cNvPr id="5" name="Text 3"/>
-          <p:cNvSpPr txBox="1"/>
-          <p:nvPr/>
-        </p:nvSpPr>
-        <p:spPr>
-          <a:xfrm>
-            <a:off x="548640" y="4251960"/>
+          <p:cNvPr id="4" name="Text 2"/>
+          <p:cNvSpPr txBox="1"/>
+          <p:nvPr/>
+        </p:nvSpPr>
+        <p:spPr>
+          <a:xfrm>
+            <a:off x="640080" y="4480560"/>
             <a:ext cx="10515600" cy="548640"/>
           </a:xfrm>
           <a:prstGeom prst="rect">
@@ -1570,7 +1550,7 @@
               <a:buNone/>
             </a:pPr>
             <a:r>
-              <a:rPr lang="en-US" sz="2200" b="1" dirty="0">
+              <a:rPr lang="en-US" sz="2100" b="1" dirty="0">
                 <a:solidFill>
                   <a:srgbClr val="1A1712"/>
                 </a:solidFill>
@@ -1584,7 +1564,7 @@
               <a:buNone/>
             </a:pPr>
             <a:r>
-              <a:rPr lang="en-US" sz="2200" dirty="0">
+              <a:rPr lang="en-US" sz="2100" dirty="0">
                 <a:solidFill>
                   <a:srgbClr val="1A1712"/>
                 </a:solidFill>
@@ -1594,42 +1574,19 @@
               </a:rPr>
               <a:t>Streamers keep 100%, paid the same second.</a:t>
             </a:r>
-            <a:endParaRPr lang="en-US" sz="2200" dirty="0"/>
-          </a:p>
-        </p:txBody>
-      </p:sp>
-      <p:sp>
-        <p:nvSpPr>
-          <p:cNvPr id="6" name="Shape 4"/>
-          <p:cNvSpPr/>
-          <p:nvPr/>
-        </p:nvSpPr>
-        <p:spPr>
-          <a:xfrm>
-            <a:off x="548640" y="5806440"/>
-            <a:ext cx="11091672" cy="0"/>
-          </a:xfrm>
-          <a:prstGeom prst="line">
-            <a:avLst/>
-          </a:prstGeom>
-          <a:noFill/>
-          <a:ln w="17780">
-            <a:solidFill>
-              <a:srgbClr val="1A1712"/>
-            </a:solidFill>
-            <a:prstDash val="solid"/>
-          </a:ln>
-        </p:spPr>
-      </p:sp>
-      <p:sp>
-        <p:nvSpPr>
-          <p:cNvPr id="7" name="Text 5"/>
-          <p:cNvSpPr txBox="1"/>
-          <p:nvPr/>
-        </p:nvSpPr>
-        <p:spPr>
-          <a:xfrm>
-            <a:off x="548640" y="5943600"/>
+            <a:endParaRPr lang="en-US" sz="2100" dirty="0"/>
+          </a:p>
+        </p:txBody>
+      </p:sp>
+      <p:sp>
+        <p:nvSpPr>
+          <p:cNvPr id="5" name="Text 3"/>
+          <p:cNvSpPr txBox="1"/>
+          <p:nvPr/>
+        </p:nvSpPr>
+        <p:spPr>
+          <a:xfrm>
+            <a:off x="640080" y="6035040"/>
             <a:ext cx="5486400" cy="365760"/>
           </a:xfrm>
           <a:prstGeom prst="rect">
@@ -1646,9 +1603,9 @@
               <a:buNone/>
             </a:pPr>
             <a:r>
-              <a:rPr lang="en-US" sz="1300" spc="300" kern="0" dirty="0">
-                <a:solidFill>
-                  <a:srgbClr val="71685A"/>
+              <a:rPr lang="en-US" sz="1200" spc="300" kern="0" dirty="0">
+                <a:solidFill>
+                  <a:srgbClr val="8A8274"/>
                 </a:solidFill>
                 <a:latin typeface="Courier New" pitchFamily="34" charset="0"/>
                 <a:ea typeface="Courier New" pitchFamily="34" charset="-122"/>
@@ -1656,19 +1613,19 @@
               </a:rPr>
               <a:t>MONAD BLITZ · AMSTERDAM · 2026</a:t>
             </a:r>
-            <a:endParaRPr lang="en-US" sz="1300" dirty="0"/>
-          </a:p>
-        </p:txBody>
-      </p:sp>
-      <p:sp>
-        <p:nvSpPr>
-          <p:cNvPr id="8" name="Text 6"/>
-          <p:cNvSpPr txBox="1"/>
-          <p:nvPr/>
-        </p:nvSpPr>
-        <p:spPr>
-          <a:xfrm>
-            <a:off x="6583680" y="5943600"/>
+            <a:endParaRPr lang="en-US" sz="1200" dirty="0"/>
+          </a:p>
+        </p:txBody>
+      </p:sp>
+      <p:sp>
+        <p:nvSpPr>
+          <p:cNvPr id="6" name="Text 4"/>
+          <p:cNvSpPr txBox="1"/>
+          <p:nvPr/>
+        </p:nvSpPr>
+        <p:spPr>
+          <a:xfrm>
+            <a:off x="6492240" y="6035040"/>
             <a:ext cx="5029200" cy="365760"/>
           </a:xfrm>
           <a:prstGeom prst="rect">
@@ -1685,7 +1642,7 @@
               <a:buNone/>
             </a:pPr>
             <a:r>
-              <a:rPr lang="en-US" sz="1500" b="1" dirty="0">
+              <a:rPr lang="en-US" sz="1400" b="1" dirty="0">
                 <a:solidFill>
                   <a:srgbClr val="BF3A1E"/>
                 </a:solidFill>
@@ -1695,7 +1652,7 @@
               </a:rPr>
               <a:t>monadchat-rvfc1.vercel.app</a:t>
             </a:r>
-            <a:endParaRPr lang="en-US" sz="1500" dirty="0"/>
+            <a:endParaRPr lang="en-US" sz="1400" dirty="0"/>
           </a:p>
         </p:txBody>
       </p:sp>
@@ -1739,26 +1696,26 @@
         </p:nvSpPr>
         <p:spPr>
           <a:xfrm>
-            <a:off x="548640" y="411480"/>
-            <a:ext cx="10424160" cy="502920"/>
-          </a:xfrm>
-          <a:prstGeom prst="rect">
-            <a:avLst/>
-          </a:prstGeom>
-          <a:noFill/>
-          <a:ln/>
-        </p:spPr>
-        <p:txBody>
-          <a:bodyPr wrap="square" lIns="0" tIns="0" rIns="0" bIns="0" rtlCol="0" anchor="ctr"/>
-          <a:lstStyle/>
-          <a:p>
-            <a:pPr indent="0" marL="0">
-              <a:buNone/>
-            </a:pPr>
-            <a:r>
-              <a:rPr lang="en-US" sz="1600" b="1" spc="300" kern="0" dirty="0">
-                <a:solidFill>
-                  <a:srgbClr val="1A1712"/>
+            <a:off x="640080" y="457200"/>
+            <a:ext cx="10058400" cy="365760"/>
+          </a:xfrm>
+          <a:prstGeom prst="rect">
+            <a:avLst/>
+          </a:prstGeom>
+          <a:noFill/>
+          <a:ln/>
+        </p:spPr>
+        <p:txBody>
+          <a:bodyPr wrap="square" lIns="0" tIns="0" rIns="0" bIns="0" rtlCol="0" anchor="ctr"/>
+          <a:lstStyle/>
+          <a:p>
+            <a:pPr indent="0" marL="0">
+              <a:buNone/>
+            </a:pPr>
+            <a:r>
+              <a:rPr lang="en-US" sz="1200" b="1" spc="300" kern="0" dirty="0">
+                <a:solidFill>
+                  <a:srgbClr val="8A8274"/>
                 </a:solidFill>
                 <a:latin typeface="Courier New" pitchFamily="34" charset="0"/>
                 <a:ea typeface="Courier New" pitchFamily="34" charset="-122"/>
@@ -1766,7 +1723,7 @@
               </a:rPr>
               <a:t>STREAMERS WANT TO GET PAID FOR CHAT</a:t>
             </a:r>
-            <a:endParaRPr lang="en-US" sz="1600" dirty="0"/>
+            <a:endParaRPr lang="en-US" sz="1200" dirty="0"/>
           </a:p>
         </p:txBody>
       </p:sp>
@@ -1778,8 +1735,8 @@
         </p:nvSpPr>
         <p:spPr>
           <a:xfrm>
-            <a:off x="11137392" y="411480"/>
-            <a:ext cx="502920" cy="502920"/>
+            <a:off x="11045952" y="457200"/>
+            <a:ext cx="502920" cy="365760"/>
           </a:xfrm>
           <a:prstGeom prst="rect">
             <a:avLst/>
@@ -1795,9 +1752,9 @@
               <a:buNone/>
             </a:pPr>
             <a:r>
-              <a:rPr lang="en-US" sz="1600" dirty="0">
-                <a:solidFill>
-                  <a:srgbClr val="71685A"/>
+              <a:rPr lang="en-US" sz="1200" dirty="0">
+                <a:solidFill>
+                  <a:srgbClr val="8A8274"/>
                 </a:solidFill>
                 <a:latin typeface="Courier New" pitchFamily="34" charset="0"/>
                 <a:ea typeface="Courier New" pitchFamily="34" charset="-122"/>
@@ -1805,43 +1762,20 @@
               </a:rPr>
               <a:t>02</a:t>
             </a:r>
-            <a:endParaRPr lang="en-US" sz="1600" dirty="0"/>
-          </a:p>
-        </p:txBody>
-      </p:sp>
-      <p:sp>
-        <p:nvSpPr>
-          <p:cNvPr id="4" name="Shape 2"/>
-          <p:cNvSpPr/>
-          <p:nvPr/>
-        </p:nvSpPr>
-        <p:spPr>
-          <a:xfrm>
-            <a:off x="548640" y="960120"/>
-            <a:ext cx="11091672" cy="0"/>
-          </a:xfrm>
-          <a:prstGeom prst="line">
-            <a:avLst/>
-          </a:prstGeom>
-          <a:noFill/>
-          <a:ln w="15240">
-            <a:solidFill>
-              <a:srgbClr val="1A1712"/>
-            </a:solidFill>
-            <a:prstDash val="solid"/>
-          </a:ln>
-        </p:spPr>
-      </p:sp>
-      <p:sp>
-        <p:nvSpPr>
-          <p:cNvPr id="5" name="Text 3"/>
-          <p:cNvSpPr txBox="1"/>
-          <p:nvPr/>
-        </p:nvSpPr>
-        <p:spPr>
-          <a:xfrm>
-            <a:off x="548640" y="1371600"/>
-            <a:ext cx="11064240" cy="1188720"/>
+            <a:endParaRPr lang="en-US" sz="1200" dirty="0"/>
+          </a:p>
+        </p:txBody>
+      </p:sp>
+      <p:sp>
+        <p:nvSpPr>
+          <p:cNvPr id="4" name="Text 2"/>
+          <p:cNvSpPr txBox="1"/>
+          <p:nvPr/>
+        </p:nvSpPr>
+        <p:spPr>
+          <a:xfrm>
+            <a:off x="640080" y="1280160"/>
+            <a:ext cx="10972800" cy="1188720"/>
           </a:xfrm>
           <a:prstGeom prst="rect">
             <a:avLst/>
@@ -1855,12 +1789,12 @@
           <a:p>
             <a:pPr indent="0" marL="0">
               <a:lnSpc>
-                <a:spcPts val="3600"/>
+                <a:spcPts val="3500"/>
               </a:lnSpc>
               <a:buNone/>
             </a:pPr>
             <a:r>
-              <a:rPr lang="en-US" sz="2800" dirty="0">
+              <a:rPr lang="en-US" sz="2700" dirty="0">
                 <a:solidFill>
                   <a:srgbClr val="1A1712"/>
                 </a:solidFill>
@@ -1870,17 +1804,17 @@
               </a:rPr>
               <a:t>Chat is the most engaged part of every stream —</a:t>
             </a:r>
-            <a:endParaRPr lang="en-US" sz="2800" dirty="0"/>
+            <a:endParaRPr lang="en-US" sz="2700" dirty="0"/>
           </a:p>
           <a:p>
             <a:pPr indent="0" marL="0">
               <a:lnSpc>
-                <a:spcPts val="3600"/>
+                <a:spcPts val="3500"/>
               </a:lnSpc>
               <a:buNone/>
             </a:pPr>
             <a:r>
-              <a:rPr lang="en-US" sz="2800" dirty="0">
+              <a:rPr lang="en-US" sz="2700" dirty="0">
                 <a:solidFill>
                   <a:srgbClr val="1A1712"/>
                 </a:solidFill>
@@ -1890,20 +1824,20 @@
               </a:rPr>
               <a:t>and it pays the streamer nothing.</a:t>
             </a:r>
-            <a:endParaRPr lang="en-US" sz="2800" dirty="0"/>
-          </a:p>
-        </p:txBody>
-      </p:sp>
-      <p:sp>
-        <p:nvSpPr>
-          <p:cNvPr id="6" name="Text 4"/>
-          <p:cNvSpPr txBox="1"/>
-          <p:nvPr/>
-        </p:nvSpPr>
-        <p:spPr>
-          <a:xfrm>
-            <a:off x="548640" y="2788920"/>
-            <a:ext cx="11064240" cy="914400"/>
+            <a:endParaRPr lang="en-US" sz="2700" dirty="0"/>
+          </a:p>
+        </p:txBody>
+      </p:sp>
+      <p:sp>
+        <p:nvSpPr>
+          <p:cNvPr id="5" name="Text 3"/>
+          <p:cNvSpPr txBox="1"/>
+          <p:nvPr/>
+        </p:nvSpPr>
+        <p:spPr>
+          <a:xfrm>
+            <a:off x="640080" y="2743200"/>
+            <a:ext cx="10972800" cy="914400"/>
           </a:xfrm>
           <a:prstGeom prst="rect">
             <a:avLst/>
@@ -1917,14 +1851,14 @@
           <a:p>
             <a:pPr indent="0" marL="0">
               <a:lnSpc>
-                <a:spcPts val="2700"/>
+                <a:spcPts val="2600"/>
               </a:lnSpc>
               <a:buNone/>
             </a:pPr>
             <a:r>
-              <a:rPr lang="en-US" sz="1900" dirty="0">
-                <a:solidFill>
-                  <a:srgbClr val="1A1712"/>
+              <a:rPr lang="en-US" sz="1800" dirty="0">
+                <a:solidFill>
+                  <a:srgbClr val="8A8274"/>
                 </a:solidFill>
                 <a:latin typeface="Georgia" pitchFamily="34" charset="0"/>
                 <a:ea typeface="Georgia" pitchFamily="34" charset="-122"/>
@@ -1932,19 +1866,19 @@
               </a:rPr>
               <a:t>Fans already pay to be seen — Superchat is a billion-dollar behavior.</a:t>
             </a:r>
-            <a:endParaRPr lang="en-US" sz="1900" dirty="0"/>
+            <a:endParaRPr lang="en-US" sz="1800" dirty="0"/>
           </a:p>
           <a:p>
             <a:pPr indent="0" marL="0">
               <a:lnSpc>
-                <a:spcPts val="2700"/>
+                <a:spcPts val="2600"/>
               </a:lnSpc>
               <a:buNone/>
             </a:pPr>
             <a:r>
-              <a:rPr lang="en-US" sz="1900" dirty="0">
-                <a:solidFill>
-                  <a:srgbClr val="1A1712"/>
+              <a:rPr lang="en-US" sz="1800" dirty="0">
+                <a:solidFill>
+                  <a:srgbClr val="8A8274"/>
                 </a:solidFill>
                 <a:latin typeface="Georgia" pitchFamily="34" charset="0"/>
                 <a:ea typeface="Georgia" pitchFamily="34" charset="-122"/>
@@ -1952,19 +1886,19 @@
               </a:rPr>
               <a:t>But the platform stands between every fan and every streamer:</a:t>
             </a:r>
-            <a:endParaRPr lang="en-US" sz="1900" dirty="0"/>
-          </a:p>
-        </p:txBody>
-      </p:sp>
-      <p:sp>
-        <p:nvSpPr>
-          <p:cNvPr id="7" name="Text 5"/>
-          <p:cNvSpPr txBox="1"/>
-          <p:nvPr/>
-        </p:nvSpPr>
-        <p:spPr>
-          <a:xfrm>
-            <a:off x="502920" y="3794760"/>
+            <a:endParaRPr lang="en-US" sz="1800" dirty="0"/>
+          </a:p>
+        </p:txBody>
+      </p:sp>
+      <p:sp>
+        <p:nvSpPr>
+          <p:cNvPr id="6" name="Text 4"/>
+          <p:cNvSpPr txBox="1"/>
+          <p:nvPr/>
+        </p:nvSpPr>
+        <p:spPr>
+          <a:xfrm>
+            <a:off x="594360" y="3749040"/>
             <a:ext cx="4937760" cy="1371600"/>
           </a:xfrm>
           <a:prstGeom prst="rect">
@@ -1983,7 +1917,7 @@
             <a:r>
               <a:rPr lang="en-US" sz="9200" dirty="0">
                 <a:solidFill>
-                  <a:srgbClr val="BF3A1E"/>
+                  <a:srgbClr val="1A1712"/>
                 </a:solidFill>
                 <a:latin typeface="Alsina" pitchFamily="34" charset="0"/>
                 <a:ea typeface="Alsina" pitchFamily="34" charset="-122"/>
@@ -1997,14 +1931,14 @@
       </p:sp>
       <p:sp>
         <p:nvSpPr>
-          <p:cNvPr id="8" name="Text 6"/>
-          <p:cNvSpPr txBox="1"/>
-          <p:nvPr/>
-        </p:nvSpPr>
-        <p:spPr>
-          <a:xfrm>
-            <a:off x="5577840" y="4160520"/>
-            <a:ext cx="6035040" cy="822960"/>
+          <p:cNvPr id="7" name="Text 5"/>
+          <p:cNvSpPr txBox="1"/>
+          <p:nvPr/>
+        </p:nvSpPr>
+        <p:spPr>
+          <a:xfrm>
+            <a:off x="5669280" y="4114800"/>
+            <a:ext cx="5852160" cy="822960"/>
           </a:xfrm>
           <a:prstGeom prst="rect">
             <a:avLst/>
@@ -2018,12 +1952,12 @@
           <a:p>
             <a:pPr indent="0" marL="0">
               <a:lnSpc>
-                <a:spcPts val="2700"/>
+                <a:spcPts val="2600"/>
               </a:lnSpc>
               <a:buNone/>
             </a:pPr>
             <a:r>
-              <a:rPr lang="en-US" sz="2000" dirty="0">
+              <a:rPr lang="en-US" sz="1900" dirty="0">
                 <a:solidFill>
                   <a:srgbClr val="1A1712"/>
                 </a:solidFill>
@@ -2033,17 +1967,17 @@
               </a:rPr>
               <a:t>platform take</a:t>
             </a:r>
-            <a:endParaRPr lang="en-US" sz="2000" dirty="0"/>
+            <a:endParaRPr lang="en-US" sz="1900" dirty="0"/>
           </a:p>
           <a:p>
             <a:pPr indent="0" marL="0">
               <a:lnSpc>
-                <a:spcPts val="2700"/>
+                <a:spcPts val="2600"/>
               </a:lnSpc>
               <a:buNone/>
             </a:pPr>
             <a:r>
-              <a:rPr lang="en-US" sz="2000" dirty="0">
+              <a:rPr lang="en-US" sz="1900" dirty="0">
                 <a:solidFill>
                   <a:srgbClr val="1A1712"/>
                 </a:solidFill>
@@ -2053,61 +1987,38 @@
               </a:rPr>
               <a:t>weeks to payout · their rules</a:t>
             </a:r>
-            <a:endParaRPr lang="en-US" sz="2000" dirty="0"/>
-          </a:p>
-        </p:txBody>
-      </p:sp>
-      <p:sp>
-        <p:nvSpPr>
-          <p:cNvPr id="9" name="Shape 7"/>
-          <p:cNvSpPr/>
-          <p:nvPr/>
-        </p:nvSpPr>
-        <p:spPr>
-          <a:xfrm>
-            <a:off x="548640" y="5806440"/>
-            <a:ext cx="11091672" cy="0"/>
-          </a:xfrm>
-          <a:prstGeom prst="line">
-            <a:avLst/>
-          </a:prstGeom>
-          <a:noFill/>
-          <a:ln w="12700">
-            <a:solidFill>
-              <a:srgbClr val="D8CDB8"/>
-            </a:solidFill>
-            <a:prstDash val="solid"/>
-          </a:ln>
-        </p:spPr>
-      </p:sp>
-      <p:sp>
-        <p:nvSpPr>
-          <p:cNvPr id="10" name="Text 8"/>
-          <p:cNvSpPr txBox="1"/>
-          <p:nvPr/>
-        </p:nvSpPr>
-        <p:spPr>
-          <a:xfrm>
-            <a:off x="548640" y="5943600"/>
-            <a:ext cx="11064240" cy="457200"/>
-          </a:xfrm>
-          <a:prstGeom prst="rect">
-            <a:avLst/>
-          </a:prstGeom>
-          <a:noFill/>
-          <a:ln/>
-        </p:spPr>
-        <p:txBody>
-          <a:bodyPr wrap="square" lIns="0" tIns="0" rIns="0" bIns="0" rtlCol="0" anchor="ctr"/>
-          <a:lstStyle/>
-          <a:p>
-            <a:pPr indent="0" marL="0">
-              <a:buNone/>
-            </a:pPr>
-            <a:r>
-              <a:rPr lang="en-US" sz="1800" i="1" dirty="0">
-                <a:solidFill>
-                  <a:srgbClr val="71685A"/>
+            <a:endParaRPr lang="en-US" sz="1900" dirty="0"/>
+          </a:p>
+        </p:txBody>
+      </p:sp>
+      <p:sp>
+        <p:nvSpPr>
+          <p:cNvPr id="8" name="Text 6"/>
+          <p:cNvSpPr txBox="1"/>
+          <p:nvPr/>
+        </p:nvSpPr>
+        <p:spPr>
+          <a:xfrm>
+            <a:off x="640080" y="5897880"/>
+            <a:ext cx="10972800" cy="457200"/>
+          </a:xfrm>
+          <a:prstGeom prst="rect">
+            <a:avLst/>
+          </a:prstGeom>
+          <a:noFill/>
+          <a:ln/>
+        </p:spPr>
+        <p:txBody>
+          <a:bodyPr wrap="square" lIns="0" tIns="0" rIns="0" bIns="0" rtlCol="0" anchor="ctr"/>
+          <a:lstStyle/>
+          <a:p>
+            <a:pPr indent="0" marL="0">
+              <a:buNone/>
+            </a:pPr>
+            <a:r>
+              <a:rPr lang="en-US" sz="1700" i="1" dirty="0">
+                <a:solidFill>
+                  <a:srgbClr val="8A8274"/>
                 </a:solidFill>
                 <a:latin typeface="Georgia" pitchFamily="34" charset="0"/>
                 <a:ea typeface="Georgia" pitchFamily="34" charset="-122"/>
@@ -2115,7 +2026,7 @@
               </a:rPr>
               <a:t>The demand is proven. The rails are broken.</a:t>
             </a:r>
-            <a:endParaRPr lang="en-US" sz="1800" dirty="0"/>
+            <a:endParaRPr lang="en-US" sz="1700" dirty="0"/>
           </a:p>
         </p:txBody>
       </p:sp>
@@ -2159,26 +2070,26 @@
         </p:nvSpPr>
         <p:spPr>
           <a:xfrm>
-            <a:off x="548640" y="411480"/>
-            <a:ext cx="10424160" cy="502920"/>
-          </a:xfrm>
-          <a:prstGeom prst="rect">
-            <a:avLst/>
-          </a:prstGeom>
-          <a:noFill/>
-          <a:ln/>
-        </p:spPr>
-        <p:txBody>
-          <a:bodyPr wrap="square" lIns="0" tIns="0" rIns="0" bIns="0" rtlCol="0" anchor="ctr"/>
-          <a:lstStyle/>
-          <a:p>
-            <a:pPr indent="0" marL="0">
-              <a:buNone/>
-            </a:pPr>
-            <a:r>
-              <a:rPr lang="en-US" sz="1600" b="1" spc="300" kern="0" dirty="0">
-                <a:solidFill>
-                  <a:srgbClr val="1A1712"/>
+            <a:off x="640080" y="457200"/>
+            <a:ext cx="10058400" cy="365760"/>
+          </a:xfrm>
+          <a:prstGeom prst="rect">
+            <a:avLst/>
+          </a:prstGeom>
+          <a:noFill/>
+          <a:ln/>
+        </p:spPr>
+        <p:txBody>
+          <a:bodyPr wrap="square" lIns="0" tIns="0" rIns="0" bIns="0" rtlCol="0" anchor="ctr"/>
+          <a:lstStyle/>
+          <a:p>
+            <a:pPr indent="0" marL="0">
+              <a:buNone/>
+            </a:pPr>
+            <a:r>
+              <a:rPr lang="en-US" sz="1200" b="1" spc="300" kern="0" dirty="0">
+                <a:solidFill>
+                  <a:srgbClr val="8A8274"/>
                 </a:solidFill>
                 <a:latin typeface="Courier New" pitchFamily="34" charset="0"/>
                 <a:ea typeface="Courier New" pitchFamily="34" charset="-122"/>
@@ -2186,7 +2097,7 @@
               </a:rPr>
               <a:t>ON OLD BLOCKCHAINS THIS WAS IMPOSSIBLE</a:t>
             </a:r>
-            <a:endParaRPr lang="en-US" sz="1600" dirty="0"/>
+            <a:endParaRPr lang="en-US" sz="1200" dirty="0"/>
           </a:p>
         </p:txBody>
       </p:sp>
@@ -2198,8 +2109,8 @@
         </p:nvSpPr>
         <p:spPr>
           <a:xfrm>
-            <a:off x="11137392" y="411480"/>
-            <a:ext cx="502920" cy="502920"/>
+            <a:off x="11045952" y="457200"/>
+            <a:ext cx="502920" cy="365760"/>
           </a:xfrm>
           <a:prstGeom prst="rect">
             <a:avLst/>
@@ -2215,9 +2126,9 @@
               <a:buNone/>
             </a:pPr>
             <a:r>
-              <a:rPr lang="en-US" sz="1600" dirty="0">
-                <a:solidFill>
-                  <a:srgbClr val="71685A"/>
+              <a:rPr lang="en-US" sz="1200" dirty="0">
+                <a:solidFill>
+                  <a:srgbClr val="8A8274"/>
                 </a:solidFill>
                 <a:latin typeface="Courier New" pitchFamily="34" charset="0"/>
                 <a:ea typeface="Courier New" pitchFamily="34" charset="-122"/>
@@ -2225,42 +2136,19 @@
               </a:rPr>
               <a:t>03</a:t>
             </a:r>
-            <a:endParaRPr lang="en-US" sz="1600" dirty="0"/>
-          </a:p>
-        </p:txBody>
-      </p:sp>
-      <p:sp>
-        <p:nvSpPr>
-          <p:cNvPr id="4" name="Shape 2"/>
-          <p:cNvSpPr/>
-          <p:nvPr/>
-        </p:nvSpPr>
-        <p:spPr>
-          <a:xfrm>
-            <a:off x="548640" y="960120"/>
-            <a:ext cx="11091672" cy="0"/>
-          </a:xfrm>
-          <a:prstGeom prst="line">
-            <a:avLst/>
-          </a:prstGeom>
-          <a:noFill/>
-          <a:ln w="15240">
-            <a:solidFill>
-              <a:srgbClr val="1A1712"/>
-            </a:solidFill>
-            <a:prstDash val="solid"/>
-          </a:ln>
-        </p:spPr>
-      </p:sp>
-      <p:sp>
-        <p:nvSpPr>
-          <p:cNvPr id="5" name="Text 3"/>
-          <p:cNvSpPr txBox="1"/>
-          <p:nvPr/>
-        </p:nvSpPr>
-        <p:spPr>
-          <a:xfrm>
-            <a:off x="548640" y="1371600"/>
+            <a:endParaRPr lang="en-US" sz="1200" dirty="0"/>
+          </a:p>
+        </p:txBody>
+      </p:sp>
+      <p:sp>
+        <p:nvSpPr>
+          <p:cNvPr id="4" name="Text 2"/>
+          <p:cNvSpPr txBox="1"/>
+          <p:nvPr/>
+        </p:nvSpPr>
+        <p:spPr>
+          <a:xfrm>
+            <a:off x="640080" y="1280160"/>
             <a:ext cx="4480560" cy="731520"/>
           </a:xfrm>
           <a:prstGeom prst="rect">
@@ -2293,14 +2181,14 @@
       </p:sp>
       <p:sp>
         <p:nvSpPr>
-          <p:cNvPr id="6" name="Text 4"/>
-          <p:cNvSpPr txBox="1"/>
-          <p:nvPr/>
-        </p:nvSpPr>
-        <p:spPr>
-          <a:xfrm>
-            <a:off x="5303520" y="1463040"/>
-            <a:ext cx="6309360" cy="731520"/>
+          <p:cNvPr id="5" name="Text 3"/>
+          <p:cNvSpPr txBox="1"/>
+          <p:nvPr/>
+        </p:nvSpPr>
+        <p:spPr>
+          <a:xfrm>
+            <a:off x="5394960" y="1389888"/>
+            <a:ext cx="6217920" cy="731520"/>
           </a:xfrm>
           <a:prstGeom prst="rect">
             <a:avLst/>
@@ -2314,14 +2202,14 @@
           <a:p>
             <a:pPr indent="0" marL="0">
               <a:lnSpc>
-                <a:spcPts val="2400"/>
+                <a:spcPts val="2300"/>
               </a:lnSpc>
               <a:buNone/>
             </a:pPr>
             <a:r>
-              <a:rPr lang="en-US" sz="1800" dirty="0">
-                <a:solidFill>
-                  <a:srgbClr val="71685A"/>
+              <a:rPr lang="en-US" sz="1700" dirty="0">
+                <a:solidFill>
+                  <a:srgbClr val="8A8274"/>
                 </a:solidFill>
                 <a:latin typeface="Georgia" pitchFamily="34" charset="0"/>
                 <a:ea typeface="Georgia" pitchFamily="34" charset="-122"/>
@@ -2329,19 +2217,19 @@
               </a:rPr>
               <a:t>to confirm a message — the conversation is dead on arrival</a:t>
             </a:r>
-            <a:endParaRPr lang="en-US" sz="1800" dirty="0"/>
-          </a:p>
-        </p:txBody>
-      </p:sp>
-      <p:sp>
-        <p:nvSpPr>
-          <p:cNvPr id="7" name="Text 5"/>
-          <p:cNvSpPr txBox="1"/>
-          <p:nvPr/>
-        </p:nvSpPr>
-        <p:spPr>
-          <a:xfrm>
-            <a:off x="548640" y="2404872"/>
+            <a:endParaRPr lang="en-US" sz="1700" dirty="0"/>
+          </a:p>
+        </p:txBody>
+      </p:sp>
+      <p:sp>
+        <p:nvSpPr>
+          <p:cNvPr id="6" name="Text 4"/>
+          <p:cNvSpPr txBox="1"/>
+          <p:nvPr/>
+        </p:nvSpPr>
+        <p:spPr>
+          <a:xfrm>
+            <a:off x="640080" y="2331720"/>
             <a:ext cx="4480560" cy="731520"/>
           </a:xfrm>
           <a:prstGeom prst="rect">
@@ -2374,14 +2262,14 @@
       </p:sp>
       <p:sp>
         <p:nvSpPr>
-          <p:cNvPr id="8" name="Text 6"/>
-          <p:cNvSpPr txBox="1"/>
-          <p:nvPr/>
-        </p:nvSpPr>
-        <p:spPr>
-          <a:xfrm>
-            <a:off x="5303520" y="2496312"/>
-            <a:ext cx="6309360" cy="731520"/>
+          <p:cNvPr id="7" name="Text 5"/>
+          <p:cNvSpPr txBox="1"/>
+          <p:nvPr/>
+        </p:nvSpPr>
+        <p:spPr>
+          <a:xfrm>
+            <a:off x="5394960" y="2441448"/>
+            <a:ext cx="6217920" cy="731520"/>
           </a:xfrm>
           <a:prstGeom prst="rect">
             <a:avLst/>
@@ -2395,14 +2283,14 @@
           <a:p>
             <a:pPr indent="0" marL="0">
               <a:lnSpc>
-                <a:spcPts val="2400"/>
+                <a:spcPts val="2300"/>
               </a:lnSpc>
               <a:buNone/>
             </a:pPr>
             <a:r>
-              <a:rPr lang="en-US" sz="1800" dirty="0">
-                <a:solidFill>
-                  <a:srgbClr val="71685A"/>
+              <a:rPr lang="en-US" sz="1700" dirty="0">
+                <a:solidFill>
+                  <a:srgbClr val="8A8274"/>
                 </a:solidFill>
                 <a:latin typeface="Georgia" pitchFamily="34" charset="0"/>
                 <a:ea typeface="Georgia" pitchFamily="34" charset="-122"/>
@@ -2410,19 +2298,19 @@
               </a:rPr>
               <a:t>for the whole world — one busy stream’s chat outruns the entire chain</a:t>
             </a:r>
-            <a:endParaRPr lang="en-US" sz="1800" dirty="0"/>
-          </a:p>
-        </p:txBody>
-      </p:sp>
-      <p:sp>
-        <p:nvSpPr>
-          <p:cNvPr id="9" name="Text 7"/>
-          <p:cNvSpPr txBox="1"/>
-          <p:nvPr/>
-        </p:nvSpPr>
-        <p:spPr>
-          <a:xfrm>
-            <a:off x="548640" y="3438144"/>
+            <a:endParaRPr lang="en-US" sz="1700" dirty="0"/>
+          </a:p>
+        </p:txBody>
+      </p:sp>
+      <p:sp>
+        <p:nvSpPr>
+          <p:cNvPr id="8" name="Text 6"/>
+          <p:cNvSpPr txBox="1"/>
+          <p:nvPr/>
+        </p:nvSpPr>
+        <p:spPr>
+          <a:xfrm>
+            <a:off x="640080" y="3383280"/>
             <a:ext cx="4480560" cy="731520"/>
           </a:xfrm>
           <a:prstGeom prst="rect">
@@ -2455,14 +2343,14 @@
       </p:sp>
       <p:sp>
         <p:nvSpPr>
-          <p:cNvPr id="10" name="Text 8"/>
-          <p:cNvSpPr txBox="1"/>
-          <p:nvPr/>
-        </p:nvSpPr>
-        <p:spPr>
-          <a:xfrm>
-            <a:off x="5303520" y="3529584"/>
-            <a:ext cx="6309360" cy="731520"/>
+          <p:cNvPr id="9" name="Text 7"/>
+          <p:cNvSpPr txBox="1"/>
+          <p:nvPr/>
+        </p:nvSpPr>
+        <p:spPr>
+          <a:xfrm>
+            <a:off x="5394960" y="3493008"/>
+            <a:ext cx="6217920" cy="731520"/>
           </a:xfrm>
           <a:prstGeom prst="rect">
             <a:avLst/>
@@ -2476,14 +2364,14 @@
           <a:p>
             <a:pPr indent="0" marL="0">
               <a:lnSpc>
-                <a:spcPts val="2400"/>
+                <a:spcPts val="2300"/>
               </a:lnSpc>
               <a:buNone/>
             </a:pPr>
             <a:r>
-              <a:rPr lang="en-US" sz="1800" dirty="0">
-                <a:solidFill>
-                  <a:srgbClr val="71685A"/>
+              <a:rPr lang="en-US" sz="1700" dirty="0">
+                <a:solidFill>
+                  <a:srgbClr val="8A8274"/>
                 </a:solidFill>
                 <a:latin typeface="Georgia" pitchFamily="34" charset="0"/>
                 <a:ea typeface="Georgia" pitchFamily="34" charset="-122"/>
@@ -2491,19 +2379,19 @@
               </a:rPr>
               <a:t>per message — the fee eats the word many times over</a:t>
             </a:r>
-            <a:endParaRPr lang="en-US" sz="1800" dirty="0"/>
-          </a:p>
-        </p:txBody>
-      </p:sp>
-      <p:sp>
-        <p:nvSpPr>
-          <p:cNvPr id="11" name="Text 9"/>
-          <p:cNvSpPr txBox="1"/>
-          <p:nvPr/>
-        </p:nvSpPr>
-        <p:spPr>
-          <a:xfrm>
-            <a:off x="548640" y="4471416"/>
+            <a:endParaRPr lang="en-US" sz="1700" dirty="0"/>
+          </a:p>
+        </p:txBody>
+      </p:sp>
+      <p:sp>
+        <p:nvSpPr>
+          <p:cNvPr id="10" name="Text 8"/>
+          <p:cNvSpPr txBox="1"/>
+          <p:nvPr/>
+        </p:nvSpPr>
+        <p:spPr>
+          <a:xfrm>
+            <a:off x="640080" y="4434840"/>
             <a:ext cx="4480560" cy="731520"/>
           </a:xfrm>
           <a:prstGeom prst="rect">
@@ -2536,14 +2424,14 @@
       </p:sp>
       <p:sp>
         <p:nvSpPr>
-          <p:cNvPr id="12" name="Text 10"/>
-          <p:cNvSpPr txBox="1"/>
-          <p:nvPr/>
-        </p:nvSpPr>
-        <p:spPr>
-          <a:xfrm>
-            <a:off x="5303520" y="4562856"/>
-            <a:ext cx="6309360" cy="731520"/>
+          <p:cNvPr id="11" name="Text 9"/>
+          <p:cNvSpPr txBox="1"/>
+          <p:nvPr/>
+        </p:nvSpPr>
+        <p:spPr>
+          <a:xfrm>
+            <a:off x="5394960" y="4544568"/>
+            <a:ext cx="6217920" cy="731520"/>
           </a:xfrm>
           <a:prstGeom prst="rect">
             <a:avLst/>
@@ -2557,14 +2445,14 @@
           <a:p>
             <a:pPr indent="0" marL="0">
               <a:lnSpc>
-                <a:spcPts val="2400"/>
+                <a:spcPts val="2300"/>
               </a:lnSpc>
               <a:buNone/>
             </a:pPr>
             <a:r>
-              <a:rPr lang="en-US" sz="1800" dirty="0">
-                <a:solidFill>
-                  <a:srgbClr val="71685A"/>
+              <a:rPr lang="en-US" sz="1700" dirty="0">
+                <a:solidFill>
+                  <a:srgbClr val="8A8274"/>
                 </a:solidFill>
                 <a:latin typeface="Georgia" pitchFamily="34" charset="0"/>
                 <a:ea typeface="Georgia" pitchFamily="34" charset="-122"/>
@@ -2572,61 +2460,38 @@
               </a:rPr>
               <a:t>bots flood a paid room faster than any server can ban them</a:t>
             </a:r>
-            <a:endParaRPr lang="en-US" sz="1800" dirty="0"/>
-          </a:p>
-        </p:txBody>
-      </p:sp>
-      <p:sp>
-        <p:nvSpPr>
-          <p:cNvPr id="13" name="Shape 11"/>
-          <p:cNvSpPr/>
-          <p:nvPr/>
-        </p:nvSpPr>
-        <p:spPr>
-          <a:xfrm>
-            <a:off x="548640" y="5577840"/>
-            <a:ext cx="11091672" cy="0"/>
-          </a:xfrm>
-          <a:prstGeom prst="line">
-            <a:avLst/>
-          </a:prstGeom>
-          <a:noFill/>
-          <a:ln w="12700">
-            <a:solidFill>
-              <a:srgbClr val="D8CDB8"/>
-            </a:solidFill>
-            <a:prstDash val="solid"/>
-          </a:ln>
-        </p:spPr>
-      </p:sp>
-      <p:sp>
-        <p:nvSpPr>
-          <p:cNvPr id="14" name="Text 12"/>
-          <p:cNvSpPr txBox="1"/>
-          <p:nvPr/>
-        </p:nvSpPr>
-        <p:spPr>
-          <a:xfrm>
-            <a:off x="548640" y="5760720"/>
-            <a:ext cx="11064240" cy="502920"/>
-          </a:xfrm>
-          <a:prstGeom prst="rect">
-            <a:avLst/>
-          </a:prstGeom>
-          <a:noFill/>
-          <a:ln/>
-        </p:spPr>
-        <p:txBody>
-          <a:bodyPr wrap="square" lIns="0" tIns="0" rIns="0" bIns="0" rtlCol="0" anchor="ctr"/>
-          <a:lstStyle/>
-          <a:p>
-            <a:pPr indent="0" marL="0">
-              <a:buNone/>
-            </a:pPr>
-            <a:r>
-              <a:rPr lang="en-US" sz="1900" i="1" dirty="0">
-                <a:solidFill>
-                  <a:srgbClr val="1A1712"/>
+            <a:endParaRPr lang="en-US" sz="1700" dirty="0"/>
+          </a:p>
+        </p:txBody>
+      </p:sp>
+      <p:sp>
+        <p:nvSpPr>
+          <p:cNvPr id="12" name="Text 10"/>
+          <p:cNvSpPr txBox="1"/>
+          <p:nvPr/>
+        </p:nvSpPr>
+        <p:spPr>
+          <a:xfrm>
+            <a:off x="640080" y="5897880"/>
+            <a:ext cx="10972800" cy="457200"/>
+          </a:xfrm>
+          <a:prstGeom prst="rect">
+            <a:avLst/>
+          </a:prstGeom>
+          <a:noFill/>
+          <a:ln/>
+        </p:spPr>
+        <p:txBody>
+          <a:bodyPr wrap="square" lIns="0" tIns="0" rIns="0" bIns="0" rtlCol="0" anchor="ctr"/>
+          <a:lstStyle/>
+          <a:p>
+            <a:pPr indent="0" marL="0">
+              <a:buNone/>
+            </a:pPr>
+            <a:r>
+              <a:rPr lang="en-US" sz="1700" i="1" dirty="0">
+                <a:solidFill>
+                  <a:srgbClr val="8A8274"/>
                 </a:solidFill>
                 <a:latin typeface="Georgia" pitchFamily="34" charset="0"/>
                 <a:ea typeface="Georgia" pitchFamily="34" charset="-122"/>
@@ -2634,7 +2499,7 @@
               </a:rPr>
               <a:t>“Every message is a payment” was an obvious idea no one could ship.</a:t>
             </a:r>
-            <a:endParaRPr lang="en-US" sz="1900" dirty="0"/>
+            <a:endParaRPr lang="en-US" sz="1700" dirty="0"/>
           </a:p>
         </p:txBody>
       </p:sp>
@@ -2652,7 +2517,7 @@
     <p:bg>
       <p:bgPr>
         <a:solidFill>
-          <a:srgbClr val="1A1712"/>
+          <a:srgbClr val="F4EFE6"/>
         </a:solidFill>
       </p:bgPr>
     </p:bg>
@@ -2678,26 +2543,26 @@
         </p:nvSpPr>
         <p:spPr>
           <a:xfrm>
-            <a:off x="548640" y="411480"/>
-            <a:ext cx="10424160" cy="502920"/>
-          </a:xfrm>
-          <a:prstGeom prst="rect">
-            <a:avLst/>
-          </a:prstGeom>
-          <a:noFill/>
-          <a:ln/>
-        </p:spPr>
-        <p:txBody>
-          <a:bodyPr wrap="square" lIns="0" tIns="0" rIns="0" bIns="0" rtlCol="0" anchor="ctr"/>
-          <a:lstStyle/>
-          <a:p>
-            <a:pPr indent="0" marL="0">
-              <a:buNone/>
-            </a:pPr>
-            <a:r>
-              <a:rPr lang="en-US" sz="1600" b="1" spc="300" kern="0" dirty="0">
-                <a:solidFill>
-                  <a:srgbClr val="F4EFE6"/>
+            <a:off x="640080" y="457200"/>
+            <a:ext cx="10058400" cy="365760"/>
+          </a:xfrm>
+          <a:prstGeom prst="rect">
+            <a:avLst/>
+          </a:prstGeom>
+          <a:noFill/>
+          <a:ln/>
+        </p:spPr>
+        <p:txBody>
+          <a:bodyPr wrap="square" lIns="0" tIns="0" rIns="0" bIns="0" rtlCol="0" anchor="ctr"/>
+          <a:lstStyle/>
+          <a:p>
+            <a:pPr indent="0" marL="0">
+              <a:buNone/>
+            </a:pPr>
+            <a:r>
+              <a:rPr lang="en-US" sz="1200" b="1" spc="300" kern="0" dirty="0">
+                <a:solidFill>
+                  <a:srgbClr val="8A8274"/>
                 </a:solidFill>
                 <a:latin typeface="Courier New" pitchFamily="34" charset="0"/>
                 <a:ea typeface="Courier New" pitchFamily="34" charset="-122"/>
@@ -2705,7 +2570,7 @@
               </a:rPr>
               <a:t>MONAD MAKES IT WORK</a:t>
             </a:r>
-            <a:endParaRPr lang="en-US" sz="1600" dirty="0"/>
+            <a:endParaRPr lang="en-US" sz="1200" dirty="0"/>
           </a:p>
         </p:txBody>
       </p:sp>
@@ -2717,8 +2582,8 @@
         </p:nvSpPr>
         <p:spPr>
           <a:xfrm>
-            <a:off x="11137392" y="411480"/>
-            <a:ext cx="502920" cy="502920"/>
+            <a:off x="11045952" y="457200"/>
+            <a:ext cx="502920" cy="365760"/>
           </a:xfrm>
           <a:prstGeom prst="rect">
             <a:avLst/>
@@ -2734,9 +2599,9 @@
               <a:buNone/>
             </a:pPr>
             <a:r>
-              <a:rPr lang="en-US" sz="1600" dirty="0">
-                <a:solidFill>
-                  <a:srgbClr val="BFB6A4"/>
+              <a:rPr lang="en-US" sz="1200" dirty="0">
+                <a:solidFill>
+                  <a:srgbClr val="8A8274"/>
                 </a:solidFill>
                 <a:latin typeface="Courier New" pitchFamily="34" charset="0"/>
                 <a:ea typeface="Courier New" pitchFamily="34" charset="-122"/>
@@ -2744,42 +2609,19 @@
               </a:rPr>
               <a:t>04</a:t>
             </a:r>
-            <a:endParaRPr lang="en-US" sz="1600" dirty="0"/>
-          </a:p>
-        </p:txBody>
-      </p:sp>
-      <p:sp>
-        <p:nvSpPr>
-          <p:cNvPr id="4" name="Shape 2"/>
-          <p:cNvSpPr/>
-          <p:nvPr/>
-        </p:nvSpPr>
-        <p:spPr>
-          <a:xfrm>
-            <a:off x="548640" y="960120"/>
-            <a:ext cx="11091672" cy="0"/>
-          </a:xfrm>
-          <a:prstGeom prst="line">
-            <a:avLst/>
-          </a:prstGeom>
-          <a:noFill/>
-          <a:ln w="15240">
-            <a:solidFill>
-              <a:srgbClr val="4A443A"/>
-            </a:solidFill>
-            <a:prstDash val="solid"/>
-          </a:ln>
-        </p:spPr>
-      </p:sp>
-      <p:sp>
-        <p:nvSpPr>
-          <p:cNvPr id="5" name="Text 3"/>
-          <p:cNvSpPr txBox="1"/>
-          <p:nvPr/>
-        </p:nvSpPr>
-        <p:spPr>
-          <a:xfrm>
-            <a:off x="548640" y="1325880"/>
+            <a:endParaRPr lang="en-US" sz="1200" dirty="0"/>
+          </a:p>
+        </p:txBody>
+      </p:sp>
+      <p:sp>
+        <p:nvSpPr>
+          <p:cNvPr id="4" name="Text 2"/>
+          <p:cNvSpPr txBox="1"/>
+          <p:nvPr/>
+        </p:nvSpPr>
+        <p:spPr>
+          <a:xfrm>
+            <a:off x="640080" y="1280160"/>
             <a:ext cx="4480560" cy="868680"/>
           </a:xfrm>
           <a:prstGeom prst="rect">
@@ -2796,7 +2638,7 @@
               <a:buNone/>
             </a:pPr>
             <a:r>
-              <a:rPr lang="en-US" sz="4600" dirty="0">
+              <a:rPr lang="en-US" sz="4400" dirty="0">
                 <a:solidFill>
                   <a:srgbClr val="BF3A1E"/>
                 </a:solidFill>
@@ -2806,20 +2648,20 @@
               </a:rPr>
               <a:t>0.5s</a:t>
             </a:r>
-            <a:endParaRPr lang="en-US" sz="4600" dirty="0"/>
-          </a:p>
-        </p:txBody>
-      </p:sp>
-      <p:sp>
-        <p:nvSpPr>
-          <p:cNvPr id="6" name="Text 4"/>
-          <p:cNvSpPr txBox="1"/>
-          <p:nvPr/>
-        </p:nvSpPr>
-        <p:spPr>
-          <a:xfrm>
-            <a:off x="5303520" y="1490472"/>
-            <a:ext cx="6309360" cy="868680"/>
+            <a:endParaRPr lang="en-US" sz="4400" dirty="0"/>
+          </a:p>
+        </p:txBody>
+      </p:sp>
+      <p:sp>
+        <p:nvSpPr>
+          <p:cNvPr id="5" name="Text 3"/>
+          <p:cNvSpPr txBox="1"/>
+          <p:nvPr/>
+        </p:nvSpPr>
+        <p:spPr>
+          <a:xfrm>
+            <a:off x="5394960" y="1444752"/>
+            <a:ext cx="6217920" cy="868680"/>
           </a:xfrm>
           <a:prstGeom prst="rect">
             <a:avLst/>
@@ -2833,14 +2675,14 @@
           <a:p>
             <a:pPr indent="0" marL="0">
               <a:lnSpc>
-                <a:spcPts val="2400"/>
+                <a:spcPts val="2300"/>
               </a:lnSpc>
               <a:buNone/>
             </a:pPr>
             <a:r>
-              <a:rPr lang="en-US" sz="1800" dirty="0">
-                <a:solidFill>
-                  <a:srgbClr val="E5DFD2"/>
+              <a:rPr lang="en-US" sz="1700" dirty="0">
+                <a:solidFill>
+                  <a:srgbClr val="1A1712"/>
                 </a:solidFill>
                 <a:latin typeface="Georgia" pitchFamily="34" charset="0"/>
                 <a:ea typeface="Georgia" pitchFamily="34" charset="-122"/>
@@ -2848,19 +2690,19 @@
               </a:rPr>
               <a:t>a message lands on chain before the reply is typed — we measured it, live, today</a:t>
             </a:r>
-            <a:endParaRPr lang="en-US" sz="1800" dirty="0"/>
-          </a:p>
-        </p:txBody>
-      </p:sp>
-      <p:sp>
-        <p:nvSpPr>
-          <p:cNvPr id="7" name="Text 5"/>
-          <p:cNvSpPr txBox="1"/>
-          <p:nvPr/>
-        </p:nvSpPr>
-        <p:spPr>
-          <a:xfrm>
-            <a:off x="548640" y="2496312"/>
+            <a:endParaRPr lang="en-US" sz="1700" dirty="0"/>
+          </a:p>
+        </p:txBody>
+      </p:sp>
+      <p:sp>
+        <p:nvSpPr>
+          <p:cNvPr id="6" name="Text 4"/>
+          <p:cNvSpPr txBox="1"/>
+          <p:nvPr/>
+        </p:nvSpPr>
+        <p:spPr>
+          <a:xfrm>
+            <a:off x="640080" y="2450592"/>
             <a:ext cx="4480560" cy="868680"/>
           </a:xfrm>
           <a:prstGeom prst="rect">
@@ -2877,9 +2719,9 @@
               <a:buNone/>
             </a:pPr>
             <a:r>
-              <a:rPr lang="en-US" sz="4600" dirty="0">
-                <a:solidFill>
-                  <a:srgbClr val="F4EFE6"/>
+              <a:rPr lang="en-US" sz="4400" dirty="0">
+                <a:solidFill>
+                  <a:srgbClr val="BF3A1E"/>
                 </a:solidFill>
                 <a:latin typeface="Alsina" pitchFamily="34" charset="0"/>
                 <a:ea typeface="Alsina" pitchFamily="34" charset="-122"/>
@@ -2887,20 +2729,20 @@
               </a:rPr>
               <a:t>~$0 fees</a:t>
             </a:r>
-            <a:endParaRPr lang="en-US" sz="4600" dirty="0"/>
-          </a:p>
-        </p:txBody>
-      </p:sp>
-      <p:sp>
-        <p:nvSpPr>
-          <p:cNvPr id="8" name="Text 6"/>
-          <p:cNvSpPr txBox="1"/>
-          <p:nvPr/>
-        </p:nvSpPr>
-        <p:spPr>
-          <a:xfrm>
-            <a:off x="5303520" y="2660904"/>
-            <a:ext cx="6309360" cy="868680"/>
+            <a:endParaRPr lang="en-US" sz="4400" dirty="0"/>
+          </a:p>
+        </p:txBody>
+      </p:sp>
+      <p:sp>
+        <p:nvSpPr>
+          <p:cNvPr id="7" name="Text 5"/>
+          <p:cNvSpPr txBox="1"/>
+          <p:nvPr/>
+        </p:nvSpPr>
+        <p:spPr>
+          <a:xfrm>
+            <a:off x="5394960" y="2615184"/>
+            <a:ext cx="6217920" cy="868680"/>
           </a:xfrm>
           <a:prstGeom prst="rect">
             <a:avLst/>
@@ -2914,14 +2756,14 @@
           <a:p>
             <a:pPr indent="0" marL="0">
               <a:lnSpc>
-                <a:spcPts val="2400"/>
+                <a:spcPts val="2300"/>
               </a:lnSpc>
               <a:buNone/>
             </a:pPr>
             <a:r>
-              <a:rPr lang="en-US" sz="1800" dirty="0">
-                <a:solidFill>
-                  <a:srgbClr val="E5DFD2"/>
+              <a:rPr lang="en-US" sz="1700" dirty="0">
+                <a:solidFill>
+                  <a:srgbClr val="1A1712"/>
                 </a:solidFill>
                 <a:latin typeface="Georgia" pitchFamily="34" charset="0"/>
                 <a:ea typeface="Georgia" pitchFamily="34" charset="-122"/>
@@ -2929,19 +2771,19 @@
               </a:rPr>
               <a:t>the rail costs a fraction of the word — streamers keep the money</a:t>
             </a:r>
-            <a:endParaRPr lang="en-US" sz="1800" dirty="0"/>
-          </a:p>
-        </p:txBody>
-      </p:sp>
-      <p:sp>
-        <p:nvSpPr>
-          <p:cNvPr id="9" name="Text 7"/>
-          <p:cNvSpPr txBox="1"/>
-          <p:nvPr/>
-        </p:nvSpPr>
-        <p:spPr>
-          <a:xfrm>
-            <a:off x="548640" y="3666744"/>
+            <a:endParaRPr lang="en-US" sz="1700" dirty="0"/>
+          </a:p>
+        </p:txBody>
+      </p:sp>
+      <p:sp>
+        <p:nvSpPr>
+          <p:cNvPr id="8" name="Text 6"/>
+          <p:cNvSpPr txBox="1"/>
+          <p:nvPr/>
+        </p:nvSpPr>
+        <p:spPr>
+          <a:xfrm>
+            <a:off x="640080" y="3621024"/>
             <a:ext cx="4480560" cy="868680"/>
           </a:xfrm>
           <a:prstGeom prst="rect">
@@ -2958,9 +2800,9 @@
               <a:buNone/>
             </a:pPr>
             <a:r>
-              <a:rPr lang="en-US" sz="4600" dirty="0">
-                <a:solidFill>
-                  <a:srgbClr val="F4EFE6"/>
+              <a:rPr lang="en-US" sz="4400" dirty="0">
+                <a:solidFill>
+                  <a:srgbClr val="BF3A1E"/>
                 </a:solidFill>
                 <a:latin typeface="Alsina" pitchFamily="34" charset="0"/>
                 <a:ea typeface="Alsina" pitchFamily="34" charset="-122"/>
@@ -2968,20 +2810,20 @@
               </a:rPr>
               <a:t>10,000 TPS</a:t>
             </a:r>
-            <a:endParaRPr lang="en-US" sz="4600" dirty="0"/>
-          </a:p>
-        </p:txBody>
-      </p:sp>
-      <p:sp>
-        <p:nvSpPr>
-          <p:cNvPr id="10" name="Text 8"/>
-          <p:cNvSpPr txBox="1"/>
-          <p:nvPr/>
-        </p:nvSpPr>
-        <p:spPr>
-          <a:xfrm>
-            <a:off x="5303520" y="3831336"/>
-            <a:ext cx="6309360" cy="868680"/>
+            <a:endParaRPr lang="en-US" sz="4400" dirty="0"/>
+          </a:p>
+        </p:txBody>
+      </p:sp>
+      <p:sp>
+        <p:nvSpPr>
+          <p:cNvPr id="9" name="Text 7"/>
+          <p:cNvSpPr txBox="1"/>
+          <p:nvPr/>
+        </p:nvSpPr>
+        <p:spPr>
+          <a:xfrm>
+            <a:off x="5394960" y="3785616"/>
+            <a:ext cx="6217920" cy="868680"/>
           </a:xfrm>
           <a:prstGeom prst="rect">
             <a:avLst/>
@@ -2995,14 +2837,14 @@
           <a:p>
             <a:pPr indent="0" marL="0">
               <a:lnSpc>
-                <a:spcPts val="2400"/>
+                <a:spcPts val="2300"/>
               </a:lnSpc>
               <a:buNone/>
             </a:pPr>
             <a:r>
-              <a:rPr lang="en-US" sz="1800" dirty="0">
-                <a:solidFill>
-                  <a:srgbClr val="E5DFD2"/>
+              <a:rPr lang="en-US" sz="1700" dirty="0">
+                <a:solidFill>
+                  <a:srgbClr val="1A1712"/>
                 </a:solidFill>
                 <a:latin typeface="Georgia" pitchFamily="34" charset="0"/>
                 <a:ea typeface="Georgia" pitchFamily="34" charset="-122"/>
@@ -3010,19 +2852,19 @@
               </a:rPr>
               <a:t>an entire platform's chat is normal load, not an attack</a:t>
             </a:r>
-            <a:endParaRPr lang="en-US" sz="1800" dirty="0"/>
-          </a:p>
-        </p:txBody>
-      </p:sp>
-      <p:sp>
-        <p:nvSpPr>
-          <p:cNvPr id="11" name="Text 9"/>
-          <p:cNvSpPr txBox="1"/>
-          <p:nvPr/>
-        </p:nvSpPr>
-        <p:spPr>
-          <a:xfrm>
-            <a:off x="548640" y="4837176"/>
+            <a:endParaRPr lang="en-US" sz="1700" dirty="0"/>
+          </a:p>
+        </p:txBody>
+      </p:sp>
+      <p:sp>
+        <p:nvSpPr>
+          <p:cNvPr id="10" name="Text 8"/>
+          <p:cNvSpPr txBox="1"/>
+          <p:nvPr/>
+        </p:nvSpPr>
+        <p:spPr>
+          <a:xfrm>
+            <a:off x="640080" y="4791456"/>
             <a:ext cx="4480560" cy="868680"/>
           </a:xfrm>
           <a:prstGeom prst="rect">
@@ -3039,9 +2881,9 @@
               <a:buNone/>
             </a:pPr>
             <a:r>
-              <a:rPr lang="en-US" sz="4600" dirty="0">
-                <a:solidFill>
-                  <a:srgbClr val="F4EFE6"/>
+              <a:rPr lang="en-US" sz="4400" dirty="0">
+                <a:solidFill>
+                  <a:srgbClr val="BF3A1E"/>
                 </a:solidFill>
                 <a:latin typeface="Alsina" pitchFamily="34" charset="0"/>
                 <a:ea typeface="Alsina" pitchFamily="34" charset="-122"/>
@@ -3049,20 +2891,20 @@
               </a:rPr>
               <a:t>spam self-destructs</a:t>
             </a:r>
-            <a:endParaRPr lang="en-US" sz="4600" dirty="0"/>
-          </a:p>
-        </p:txBody>
-      </p:sp>
-      <p:sp>
-        <p:nvSpPr>
-          <p:cNvPr id="12" name="Text 10"/>
-          <p:cNvSpPr txBox="1"/>
-          <p:nvPr/>
-        </p:nvSpPr>
-        <p:spPr>
-          <a:xfrm>
-            <a:off x="5303520" y="5001768"/>
-            <a:ext cx="6309360" cy="868680"/>
+            <a:endParaRPr lang="en-US" sz="4400" dirty="0"/>
+          </a:p>
+        </p:txBody>
+      </p:sp>
+      <p:sp>
+        <p:nvSpPr>
+          <p:cNvPr id="11" name="Text 9"/>
+          <p:cNvSpPr txBox="1"/>
+          <p:nvPr/>
+        </p:nvSpPr>
+        <p:spPr>
+          <a:xfrm>
+            <a:off x="5394960" y="4956048"/>
+            <a:ext cx="6217920" cy="868680"/>
           </a:xfrm>
           <a:prstGeom prst="rect">
             <a:avLst/>
@@ -3076,14 +2918,14 @@
           <a:p>
             <a:pPr indent="0" marL="0">
               <a:lnSpc>
-                <a:spcPts val="2400"/>
+                <a:spcPts val="2300"/>
               </a:lnSpc>
               <a:buNone/>
             </a:pPr>
             <a:r>
-              <a:rPr lang="en-US" sz="1800" dirty="0">
-                <a:solidFill>
-                  <a:srgbClr val="E5DFD2"/>
+              <a:rPr lang="en-US" sz="1700" dirty="0">
+                <a:solidFill>
+                  <a:srgbClr val="1A1712"/>
                 </a:solidFill>
                 <a:latin typeface="Georgia" pitchFamily="34" charset="0"/>
                 <a:ea typeface="Georgia" pitchFamily="34" charset="-122"/>
@@ -3091,7 +2933,7 @@
               </a:rPr>
               <a:t>the network rate-limits every wallet — spamming burns the spammer’s own gas</a:t>
             </a:r>
-            <a:endParaRPr lang="en-US" sz="1800" dirty="0"/>
+            <a:endParaRPr lang="en-US" sz="1700" dirty="0"/>
           </a:p>
         </p:txBody>
       </p:sp>
@@ -3135,26 +2977,26 @@
         </p:nvSpPr>
         <p:spPr>
           <a:xfrm>
-            <a:off x="548640" y="411480"/>
-            <a:ext cx="10424160" cy="502920"/>
-          </a:xfrm>
-          <a:prstGeom prst="rect">
-            <a:avLst/>
-          </a:prstGeom>
-          <a:noFill/>
-          <a:ln/>
-        </p:spPr>
-        <p:txBody>
-          <a:bodyPr wrap="square" lIns="0" tIns="0" rIns="0" bIns="0" rtlCol="0" anchor="ctr"/>
-          <a:lstStyle/>
-          <a:p>
-            <a:pPr indent="0" marL="0">
-              <a:buNone/>
-            </a:pPr>
-            <a:r>
-              <a:rPr lang="en-US" sz="1600" b="1" spc="300" kern="0" dirty="0">
-                <a:solidFill>
-                  <a:srgbClr val="1A1712"/>
+            <a:off x="640080" y="457200"/>
+            <a:ext cx="10058400" cy="365760"/>
+          </a:xfrm>
+          <a:prstGeom prst="rect">
+            <a:avLst/>
+          </a:prstGeom>
+          <a:noFill/>
+          <a:ln/>
+        </p:spPr>
+        <p:txBody>
+          <a:bodyPr wrap="square" lIns="0" tIns="0" rIns="0" bIns="0" rtlCol="0" anchor="ctr"/>
+          <a:lstStyle/>
+          <a:p>
+            <a:pPr indent="0" marL="0">
+              <a:buNone/>
+            </a:pPr>
+            <a:r>
+              <a:rPr lang="en-US" sz="1200" b="1" spc="300" kern="0" dirty="0">
+                <a:solidFill>
+                  <a:srgbClr val="8A8274"/>
                 </a:solidFill>
                 <a:latin typeface="Courier New" pitchFamily="34" charset="0"/>
                 <a:ea typeface="Courier New" pitchFamily="34" charset="-122"/>
@@ -3162,7 +3004,7 @@
               </a:rPr>
               <a:t>HOW MONADCHAT WORKS</a:t>
             </a:r>
-            <a:endParaRPr lang="en-US" sz="1600" dirty="0"/>
+            <a:endParaRPr lang="en-US" sz="1200" dirty="0"/>
           </a:p>
         </p:txBody>
       </p:sp>
@@ -3174,8 +3016,8 @@
         </p:nvSpPr>
         <p:spPr>
           <a:xfrm>
-            <a:off x="11137392" y="411480"/>
-            <a:ext cx="502920" cy="502920"/>
+            <a:off x="11045952" y="457200"/>
+            <a:ext cx="502920" cy="365760"/>
           </a:xfrm>
           <a:prstGeom prst="rect">
             <a:avLst/>
@@ -3191,9 +3033,9 @@
               <a:buNone/>
             </a:pPr>
             <a:r>
-              <a:rPr lang="en-US" sz="1600" dirty="0">
-                <a:solidFill>
-                  <a:srgbClr val="71685A"/>
+              <a:rPr lang="en-US" sz="1200" dirty="0">
+                <a:solidFill>
+                  <a:srgbClr val="8A8274"/>
                 </a:solidFill>
                 <a:latin typeface="Courier New" pitchFamily="34" charset="0"/>
                 <a:ea typeface="Courier New" pitchFamily="34" charset="-122"/>
@@ -3201,42 +3043,19 @@
               </a:rPr>
               <a:t>05</a:t>
             </a:r>
-            <a:endParaRPr lang="en-US" sz="1600" dirty="0"/>
-          </a:p>
-        </p:txBody>
-      </p:sp>
-      <p:sp>
-        <p:nvSpPr>
-          <p:cNvPr id="4" name="Shape 2"/>
-          <p:cNvSpPr/>
-          <p:nvPr/>
-        </p:nvSpPr>
-        <p:spPr>
-          <a:xfrm>
-            <a:off x="548640" y="960120"/>
-            <a:ext cx="11091672" cy="0"/>
-          </a:xfrm>
-          <a:prstGeom prst="line">
-            <a:avLst/>
-          </a:prstGeom>
-          <a:noFill/>
-          <a:ln w="15240">
-            <a:solidFill>
-              <a:srgbClr val="1A1712"/>
-            </a:solidFill>
-            <a:prstDash val="solid"/>
-          </a:ln>
-        </p:spPr>
-      </p:sp>
-      <p:sp>
-        <p:nvSpPr>
-          <p:cNvPr id="5" name="Text 3"/>
-          <p:cNvSpPr txBox="1"/>
-          <p:nvPr/>
-        </p:nvSpPr>
-        <p:spPr>
-          <a:xfrm>
-            <a:off x="548640" y="1417320"/>
+            <a:endParaRPr lang="en-US" sz="1200" dirty="0"/>
+          </a:p>
+        </p:txBody>
+      </p:sp>
+      <p:sp>
+        <p:nvSpPr>
+          <p:cNvPr id="4" name="Text 2"/>
+          <p:cNvSpPr txBox="1"/>
+          <p:nvPr/>
+        </p:nvSpPr>
+        <p:spPr>
+          <a:xfrm>
+            <a:off x="640080" y="1344168"/>
             <a:ext cx="822960" cy="1005840"/>
           </a:xfrm>
           <a:prstGeom prst="rect">
@@ -3253,9 +3072,9 @@
               <a:buNone/>
             </a:pPr>
             <a:r>
-              <a:rPr lang="en-US" sz="6000" dirty="0">
-                <a:solidFill>
-                  <a:srgbClr val="BF3A1E"/>
+              <a:rPr lang="en-US" sz="5600" dirty="0">
+                <a:solidFill>
+                  <a:srgbClr val="8A8274"/>
                 </a:solidFill>
                 <a:latin typeface="Alsina" pitchFamily="34" charset="0"/>
                 <a:ea typeface="Alsina" pitchFamily="34" charset="-122"/>
@@ -3263,36 +3082,36 @@
               </a:rPr>
               <a:t>1</a:t>
             </a:r>
-            <a:endParaRPr lang="en-US" sz="6000" dirty="0"/>
-          </a:p>
-        </p:txBody>
-      </p:sp>
-      <p:sp>
-        <p:nvSpPr>
-          <p:cNvPr id="6" name="Text 4"/>
-          <p:cNvSpPr txBox="1"/>
-          <p:nvPr/>
-        </p:nvSpPr>
-        <p:spPr>
-          <a:xfrm>
-            <a:off x="1600200" y="1508760"/>
-            <a:ext cx="6949440" cy="548640"/>
-          </a:xfrm>
-          <a:prstGeom prst="rect">
-            <a:avLst/>
-          </a:prstGeom>
-          <a:noFill/>
-          <a:ln/>
-        </p:spPr>
-        <p:txBody>
-          <a:bodyPr wrap="square" lIns="0" tIns="0" rIns="0" bIns="0" rtlCol="0" anchor="ctr"/>
-          <a:lstStyle/>
-          <a:p>
-            <a:pPr indent="0" marL="0">
-              <a:buNone/>
-            </a:pPr>
-            <a:r>
-              <a:rPr lang="en-US" sz="2500" b="1" dirty="0">
+            <a:endParaRPr lang="en-US" sz="5600" dirty="0"/>
+          </a:p>
+        </p:txBody>
+      </p:sp>
+      <p:sp>
+        <p:nvSpPr>
+          <p:cNvPr id="5" name="Text 3"/>
+          <p:cNvSpPr txBox="1"/>
+          <p:nvPr/>
+        </p:nvSpPr>
+        <p:spPr>
+          <a:xfrm>
+            <a:off x="1645920" y="1417320"/>
+            <a:ext cx="9875520" cy="548640"/>
+          </a:xfrm>
+          <a:prstGeom prst="rect">
+            <a:avLst/>
+          </a:prstGeom>
+          <a:noFill/>
+          <a:ln/>
+        </p:spPr>
+        <p:txBody>
+          <a:bodyPr wrap="square" lIns="0" tIns="0" rIns="0" bIns="0" rtlCol="0" anchor="ctr"/>
+          <a:lstStyle/>
+          <a:p>
+            <a:pPr indent="0" marL="0">
+              <a:buNone/>
+            </a:pPr>
+            <a:r>
+              <a:rPr lang="en-US" sz="2400" b="1" dirty="0">
                 <a:solidFill>
                   <a:srgbClr val="1A1712"/>
                 </a:solidFill>
@@ -3302,38 +3121,38 @@
               </a:rPr>
               <a:t>A fan pays per word</a:t>
             </a:r>
-            <a:endParaRPr lang="en-US" sz="2500" dirty="0"/>
-          </a:p>
-        </p:txBody>
-      </p:sp>
-      <p:sp>
-        <p:nvSpPr>
-          <p:cNvPr id="7" name="Text 5"/>
-          <p:cNvSpPr txBox="1"/>
-          <p:nvPr/>
-        </p:nvSpPr>
-        <p:spPr>
-          <a:xfrm>
-            <a:off x="1600200" y="2075688"/>
-            <a:ext cx="9601200" cy="502920"/>
-          </a:xfrm>
-          <a:prstGeom prst="rect">
-            <a:avLst/>
-          </a:prstGeom>
-          <a:noFill/>
-          <a:ln/>
-        </p:spPr>
-        <p:txBody>
-          <a:bodyPr wrap="square" lIns="0" tIns="0" rIns="0" bIns="0" rtlCol="0" anchor="ctr"/>
-          <a:lstStyle/>
-          <a:p>
-            <a:pPr indent="0" marL="0">
-              <a:buNone/>
-            </a:pPr>
-            <a:r>
-              <a:rPr lang="en-US" sz="1700" dirty="0">
-                <a:solidFill>
-                  <a:srgbClr val="71685A"/>
+            <a:endParaRPr lang="en-US" sz="2400" dirty="0"/>
+          </a:p>
+        </p:txBody>
+      </p:sp>
+      <p:sp>
+        <p:nvSpPr>
+          <p:cNvPr id="6" name="Text 4"/>
+          <p:cNvSpPr txBox="1"/>
+          <p:nvPr/>
+        </p:nvSpPr>
+        <p:spPr>
+          <a:xfrm>
+            <a:off x="1645920" y="1965960"/>
+            <a:ext cx="9875520" cy="502920"/>
+          </a:xfrm>
+          <a:prstGeom prst="rect">
+            <a:avLst/>
+          </a:prstGeom>
+          <a:noFill/>
+          <a:ln/>
+        </p:spPr>
+        <p:txBody>
+          <a:bodyPr wrap="square" lIns="0" tIns="0" rIns="0" bIns="0" rtlCol="0" anchor="ctr"/>
+          <a:lstStyle/>
+          <a:p>
+            <a:pPr indent="0" marL="0">
+              <a:buNone/>
+            </a:pPr>
+            <a:r>
+              <a:rPr lang="en-US" sz="1600" dirty="0">
+                <a:solidFill>
+                  <a:srgbClr val="8A8274"/>
                 </a:solidFill>
                 <a:latin typeface="Georgia" pitchFamily="34" charset="0"/>
                 <a:ea typeface="Georgia" pitchFamily="34" charset="-122"/>
@@ -3341,19 +3160,19 @@
               </a:rPr>
               <a:t>no wallet setup — the browser creates one; typing in ten seconds</a:t>
             </a:r>
-            <a:endParaRPr lang="en-US" sz="1700" dirty="0"/>
-          </a:p>
-        </p:txBody>
-      </p:sp>
-      <p:sp>
-        <p:nvSpPr>
-          <p:cNvPr id="8" name="Text 6"/>
-          <p:cNvSpPr txBox="1"/>
-          <p:nvPr/>
-        </p:nvSpPr>
-        <p:spPr>
-          <a:xfrm>
-            <a:off x="548640" y="2834640"/>
+            <a:endParaRPr lang="en-US" sz="1600" dirty="0"/>
+          </a:p>
+        </p:txBody>
+      </p:sp>
+      <p:sp>
+        <p:nvSpPr>
+          <p:cNvPr id="7" name="Text 5"/>
+          <p:cNvSpPr txBox="1"/>
+          <p:nvPr/>
+        </p:nvSpPr>
+        <p:spPr>
+          <a:xfrm>
+            <a:off x="640080" y="2761488"/>
             <a:ext cx="822960" cy="1005840"/>
           </a:xfrm>
           <a:prstGeom prst="rect">
@@ -3370,9 +3189,9 @@
               <a:buNone/>
             </a:pPr>
             <a:r>
-              <a:rPr lang="en-US" sz="6000" dirty="0">
-                <a:solidFill>
-                  <a:srgbClr val="BF3A1E"/>
+              <a:rPr lang="en-US" sz="5600" dirty="0">
+                <a:solidFill>
+                  <a:srgbClr val="8A8274"/>
                 </a:solidFill>
                 <a:latin typeface="Alsina" pitchFamily="34" charset="0"/>
                 <a:ea typeface="Alsina" pitchFamily="34" charset="-122"/>
@@ -3380,36 +3199,36 @@
               </a:rPr>
               <a:t>2</a:t>
             </a:r>
-            <a:endParaRPr lang="en-US" sz="6000" dirty="0"/>
-          </a:p>
-        </p:txBody>
-      </p:sp>
-      <p:sp>
-        <p:nvSpPr>
-          <p:cNvPr id="9" name="Text 7"/>
-          <p:cNvSpPr txBox="1"/>
-          <p:nvPr/>
-        </p:nvSpPr>
-        <p:spPr>
-          <a:xfrm>
-            <a:off x="1600200" y="2926080"/>
-            <a:ext cx="6949440" cy="548640"/>
-          </a:xfrm>
-          <a:prstGeom prst="rect">
-            <a:avLst/>
-          </a:prstGeom>
-          <a:noFill/>
-          <a:ln/>
-        </p:spPr>
-        <p:txBody>
-          <a:bodyPr wrap="square" lIns="0" tIns="0" rIns="0" bIns="0" rtlCol="0" anchor="ctr"/>
-          <a:lstStyle/>
-          <a:p>
-            <a:pPr indent="0" marL="0">
-              <a:buNone/>
-            </a:pPr>
-            <a:r>
-              <a:rPr lang="en-US" sz="2500" b="1" dirty="0">
+            <a:endParaRPr lang="en-US" sz="5600" dirty="0"/>
+          </a:p>
+        </p:txBody>
+      </p:sp>
+      <p:sp>
+        <p:nvSpPr>
+          <p:cNvPr id="8" name="Text 6"/>
+          <p:cNvSpPr txBox="1"/>
+          <p:nvPr/>
+        </p:nvSpPr>
+        <p:spPr>
+          <a:xfrm>
+            <a:off x="1645920" y="2834640"/>
+            <a:ext cx="9875520" cy="548640"/>
+          </a:xfrm>
+          <a:prstGeom prst="rect">
+            <a:avLst/>
+          </a:prstGeom>
+          <a:noFill/>
+          <a:ln/>
+        </p:spPr>
+        <p:txBody>
+          <a:bodyPr wrap="square" lIns="0" tIns="0" rIns="0" bIns="0" rtlCol="0" anchor="ctr"/>
+          <a:lstStyle/>
+          <a:p>
+            <a:pPr indent="0" marL="0">
+              <a:buNone/>
+            </a:pPr>
+            <a:r>
+              <a:rPr lang="en-US" sz="2400" b="1" dirty="0">
                 <a:solidFill>
                   <a:srgbClr val="1A1712"/>
                 </a:solidFill>
@@ -3419,38 +3238,38 @@
               </a:rPr>
               <a:t>The streamer is paid the same second</a:t>
             </a:r>
-            <a:endParaRPr lang="en-US" sz="2500" dirty="0"/>
-          </a:p>
-        </p:txBody>
-      </p:sp>
-      <p:sp>
-        <p:nvSpPr>
-          <p:cNvPr id="10" name="Text 8"/>
-          <p:cNvSpPr txBox="1"/>
-          <p:nvPr/>
-        </p:nvSpPr>
-        <p:spPr>
-          <a:xfrm>
-            <a:off x="1600200" y="3493008"/>
-            <a:ext cx="9601200" cy="502920"/>
-          </a:xfrm>
-          <a:prstGeom prst="rect">
-            <a:avLst/>
-          </a:prstGeom>
-          <a:noFill/>
-          <a:ln/>
-        </p:spPr>
-        <p:txBody>
-          <a:bodyPr wrap="square" lIns="0" tIns="0" rIns="0" bIns="0" rtlCol="0" anchor="ctr"/>
-          <a:lstStyle/>
-          <a:p>
-            <a:pPr indent="0" marL="0">
-              <a:buNone/>
-            </a:pPr>
-            <a:r>
-              <a:rPr lang="en-US" sz="1700" dirty="0">
-                <a:solidFill>
-                  <a:srgbClr val="71685A"/>
+            <a:endParaRPr lang="en-US" sz="2400" dirty="0"/>
+          </a:p>
+        </p:txBody>
+      </p:sp>
+      <p:sp>
+        <p:nvSpPr>
+          <p:cNvPr id="9" name="Text 7"/>
+          <p:cNvSpPr txBox="1"/>
+          <p:nvPr/>
+        </p:nvSpPr>
+        <p:spPr>
+          <a:xfrm>
+            <a:off x="1645920" y="3383280"/>
+            <a:ext cx="9875520" cy="502920"/>
+          </a:xfrm>
+          <a:prstGeom prst="rect">
+            <a:avLst/>
+          </a:prstGeom>
+          <a:noFill/>
+          <a:ln/>
+        </p:spPr>
+        <p:txBody>
+          <a:bodyPr wrap="square" lIns="0" tIns="0" rIns="0" bIns="0" rtlCol="0" anchor="ctr"/>
+          <a:lstStyle/>
+          <a:p>
+            <a:pPr indent="0" marL="0">
+              <a:buNone/>
+            </a:pPr>
+            <a:r>
+              <a:rPr lang="en-US" sz="1600" dirty="0">
+                <a:solidFill>
+                  <a:srgbClr val="8A8274"/>
                 </a:solidFill>
                 <a:latin typeface="Georgia" pitchFamily="34" charset="0"/>
                 <a:ea typeface="Georgia" pitchFamily="34" charset="-122"/>
@@ -3458,19 +3277,19 @@
               </a:rPr>
               <a:t>100% of the price, straight to their wallet — no payout day</a:t>
             </a:r>
-            <a:endParaRPr lang="en-US" sz="1700" dirty="0"/>
-          </a:p>
-        </p:txBody>
-      </p:sp>
-      <p:sp>
-        <p:nvSpPr>
-          <p:cNvPr id="11" name="Text 9"/>
-          <p:cNvSpPr txBox="1"/>
-          <p:nvPr/>
-        </p:nvSpPr>
-        <p:spPr>
-          <a:xfrm>
-            <a:off x="548640" y="4251960"/>
+            <a:endParaRPr lang="en-US" sz="1600" dirty="0"/>
+          </a:p>
+        </p:txBody>
+      </p:sp>
+      <p:sp>
+        <p:nvSpPr>
+          <p:cNvPr id="10" name="Text 8"/>
+          <p:cNvSpPr txBox="1"/>
+          <p:nvPr/>
+        </p:nvSpPr>
+        <p:spPr>
+          <a:xfrm>
+            <a:off x="640080" y="4178808"/>
             <a:ext cx="822960" cy="1005840"/>
           </a:xfrm>
           <a:prstGeom prst="rect">
@@ -3487,9 +3306,9 @@
               <a:buNone/>
             </a:pPr>
             <a:r>
-              <a:rPr lang="en-US" sz="6000" dirty="0">
-                <a:solidFill>
-                  <a:srgbClr val="BF3A1E"/>
+              <a:rPr lang="en-US" sz="5600" dirty="0">
+                <a:solidFill>
+                  <a:srgbClr val="8A8274"/>
                 </a:solidFill>
                 <a:latin typeface="Alsina" pitchFamily="34" charset="0"/>
                 <a:ea typeface="Alsina" pitchFamily="34" charset="-122"/>
@@ -3497,36 +3316,36 @@
               </a:rPr>
               <a:t>3</a:t>
             </a:r>
-            <a:endParaRPr lang="en-US" sz="6000" dirty="0"/>
-          </a:p>
-        </p:txBody>
-      </p:sp>
-      <p:sp>
-        <p:nvSpPr>
-          <p:cNvPr id="12" name="Text 10"/>
-          <p:cNvSpPr txBox="1"/>
-          <p:nvPr/>
-        </p:nvSpPr>
-        <p:spPr>
-          <a:xfrm>
-            <a:off x="1600200" y="4343400"/>
-            <a:ext cx="6949440" cy="548640"/>
-          </a:xfrm>
-          <a:prstGeom prst="rect">
-            <a:avLst/>
-          </a:prstGeom>
-          <a:noFill/>
-          <a:ln/>
-        </p:spPr>
-        <p:txBody>
-          <a:bodyPr wrap="square" lIns="0" tIns="0" rIns="0" bIns="0" rtlCol="0" anchor="ctr"/>
-          <a:lstStyle/>
-          <a:p>
-            <a:pPr indent="0" marL="0">
-              <a:buNone/>
-            </a:pPr>
-            <a:r>
-              <a:rPr lang="en-US" sz="2500" b="1" dirty="0">
+            <a:endParaRPr lang="en-US" sz="5600" dirty="0"/>
+          </a:p>
+        </p:txBody>
+      </p:sp>
+      <p:sp>
+        <p:nvSpPr>
+          <p:cNvPr id="11" name="Text 9"/>
+          <p:cNvSpPr txBox="1"/>
+          <p:nvPr/>
+        </p:nvSpPr>
+        <p:spPr>
+          <a:xfrm>
+            <a:off x="1645920" y="4251960"/>
+            <a:ext cx="9875520" cy="548640"/>
+          </a:xfrm>
+          <a:prstGeom prst="rect">
+            <a:avLst/>
+          </a:prstGeom>
+          <a:noFill/>
+          <a:ln/>
+        </p:spPr>
+        <p:txBody>
+          <a:bodyPr wrap="square" lIns="0" tIns="0" rIns="0" bIns="0" rtlCol="0" anchor="ctr"/>
+          <a:lstStyle/>
+          <a:p>
+            <a:pPr indent="0" marL="0">
+              <a:buNone/>
+            </a:pPr>
+            <a:r>
+              <a:rPr lang="en-US" sz="2400" b="1" dirty="0">
                 <a:solidFill>
                   <a:srgbClr val="1A1712"/>
                 </a:solidFill>
@@ -3536,38 +3355,38 @@
               </a:rPr>
               <a:t>It plugs into any stream</a:t>
             </a:r>
-            <a:endParaRPr lang="en-US" sz="2500" dirty="0"/>
-          </a:p>
-        </p:txBody>
-      </p:sp>
-      <p:sp>
-        <p:nvSpPr>
-          <p:cNvPr id="13" name="Text 11"/>
-          <p:cNvSpPr txBox="1"/>
-          <p:nvPr/>
-        </p:nvSpPr>
-        <p:spPr>
-          <a:xfrm>
-            <a:off x="1600200" y="4910328"/>
-            <a:ext cx="9601200" cy="502920"/>
-          </a:xfrm>
-          <a:prstGeom prst="rect">
-            <a:avLst/>
-          </a:prstGeom>
-          <a:noFill/>
-          <a:ln/>
-        </p:spPr>
-        <p:txBody>
-          <a:bodyPr wrap="square" lIns="0" tIns="0" rIns="0" bIns="0" rtlCol="0" anchor="ctr"/>
-          <a:lstStyle/>
-          <a:p>
-            <a:pPr indent="0" marL="0">
-              <a:buNone/>
-            </a:pPr>
-            <a:r>
-              <a:rPr lang="en-US" sz="1700" dirty="0">
-                <a:solidFill>
-                  <a:srgbClr val="71685A"/>
+            <a:endParaRPr lang="en-US" sz="2400" dirty="0"/>
+          </a:p>
+        </p:txBody>
+      </p:sp>
+      <p:sp>
+        <p:nvSpPr>
+          <p:cNvPr id="12" name="Text 10"/>
+          <p:cNvSpPr txBox="1"/>
+          <p:nvPr/>
+        </p:nvSpPr>
+        <p:spPr>
+          <a:xfrm>
+            <a:off x="1645920" y="4800600"/>
+            <a:ext cx="9875520" cy="502920"/>
+          </a:xfrm>
+          <a:prstGeom prst="rect">
+            <a:avLst/>
+          </a:prstGeom>
+          <a:noFill/>
+          <a:ln/>
+        </p:spPr>
+        <p:txBody>
+          <a:bodyPr wrap="square" lIns="0" tIns="0" rIns="0" bIns="0" rtlCol="0" anchor="ctr"/>
+          <a:lstStyle/>
+          <a:p>
+            <a:pPr indent="0" marL="0">
+              <a:buNone/>
+            </a:pPr>
+            <a:r>
+              <a:rPr lang="en-US" sz="1600" dirty="0">
+                <a:solidFill>
+                  <a:srgbClr val="8A8274"/>
                 </a:solidFill>
                 <a:latin typeface="Georgia" pitchFamily="34" charset="0"/>
                 <a:ea typeface="Georgia" pitchFamily="34" charset="-122"/>
@@ -3575,61 +3394,38 @@
               </a:rPr>
               <a:t>Twitch · YouTube · Kick — plus an OBS overlay on the video itself</a:t>
             </a:r>
-            <a:endParaRPr lang="en-US" sz="1700" dirty="0"/>
-          </a:p>
-        </p:txBody>
-      </p:sp>
-      <p:sp>
-        <p:nvSpPr>
-          <p:cNvPr id="14" name="Shape 12"/>
-          <p:cNvSpPr/>
-          <p:nvPr/>
-        </p:nvSpPr>
-        <p:spPr>
-          <a:xfrm>
-            <a:off x="548640" y="5806440"/>
-            <a:ext cx="11091672" cy="0"/>
-          </a:xfrm>
-          <a:prstGeom prst="line">
-            <a:avLst/>
-          </a:prstGeom>
-          <a:noFill/>
-          <a:ln w="12700">
-            <a:solidFill>
-              <a:srgbClr val="D8CDB8"/>
-            </a:solidFill>
-            <a:prstDash val="solid"/>
-          </a:ln>
-        </p:spPr>
-      </p:sp>
-      <p:sp>
-        <p:nvSpPr>
-          <p:cNvPr id="15" name="Text 13"/>
-          <p:cNvSpPr txBox="1"/>
-          <p:nvPr/>
-        </p:nvSpPr>
-        <p:spPr>
-          <a:xfrm>
-            <a:off x="548640" y="5943600"/>
-            <a:ext cx="11064240" cy="457200"/>
-          </a:xfrm>
-          <a:prstGeom prst="rect">
-            <a:avLst/>
-          </a:prstGeom>
-          <a:noFill/>
-          <a:ln/>
-        </p:spPr>
-        <p:txBody>
-          <a:bodyPr wrap="square" lIns="0" tIns="0" rIns="0" bIns="0" rtlCol="0" anchor="ctr"/>
-          <a:lstStyle/>
-          <a:p>
-            <a:pPr indent="0" marL="0">
-              <a:buNone/>
-            </a:pPr>
-            <a:r>
-              <a:rPr lang="en-US" sz="1700" i="1" dirty="0">
-                <a:solidFill>
-                  <a:srgbClr val="71685A"/>
+            <a:endParaRPr lang="en-US" sz="1600" dirty="0"/>
+          </a:p>
+        </p:txBody>
+      </p:sp>
+      <p:sp>
+        <p:nvSpPr>
+          <p:cNvPr id="13" name="Text 11"/>
+          <p:cNvSpPr txBox="1"/>
+          <p:nvPr/>
+        </p:nvSpPr>
+        <p:spPr>
+          <a:xfrm>
+            <a:off x="640080" y="5897880"/>
+            <a:ext cx="10972800" cy="457200"/>
+          </a:xfrm>
+          <a:prstGeom prst="rect">
+            <a:avLst/>
+          </a:prstGeom>
+          <a:noFill/>
+          <a:ln/>
+        </p:spPr>
+        <p:txBody>
+          <a:bodyPr wrap="square" lIns="0" tIns="0" rIns="0" bIns="0" rtlCol="0" anchor="ctr"/>
+          <a:lstStyle/>
+          <a:p>
+            <a:pPr indent="0" marL="0">
+              <a:buNone/>
+            </a:pPr>
+            <a:r>
+              <a:rPr lang="en-US" sz="1600" i="1" dirty="0">
+                <a:solidFill>
+                  <a:srgbClr val="8A8274"/>
                 </a:solidFill>
                 <a:latin typeface="Georgia" pitchFamily="34" charset="0"/>
                 <a:ea typeface="Georgia" pitchFamily="34" charset="-122"/>
@@ -3637,7 +3433,7 @@
               </a:rPr>
               <a:t>The streamer sets the price of a word. Spam gets expensive; attention gets honestly paid for.</a:t>
             </a:r>
-            <a:endParaRPr lang="en-US" sz="1700" dirty="0"/>
+            <a:endParaRPr lang="en-US" sz="1600" dirty="0"/>
           </a:p>
         </p:txBody>
       </p:sp>
@@ -3681,26 +3477,26 @@
         </p:nvSpPr>
         <p:spPr>
           <a:xfrm>
-            <a:off x="548640" y="411480"/>
-            <a:ext cx="10424160" cy="502920"/>
-          </a:xfrm>
-          <a:prstGeom prst="rect">
-            <a:avLst/>
-          </a:prstGeom>
-          <a:noFill/>
-          <a:ln/>
-        </p:spPr>
-        <p:txBody>
-          <a:bodyPr wrap="square" lIns="0" tIns="0" rIns="0" bIns="0" rtlCol="0" anchor="ctr"/>
-          <a:lstStyle/>
-          <a:p>
-            <a:pPr indent="0" marL="0">
-              <a:buNone/>
-            </a:pPr>
-            <a:r>
-              <a:rPr lang="en-US" sz="1600" b="1" spc="300" kern="0" dirty="0">
-                <a:solidFill>
-                  <a:srgbClr val="1A1712"/>
+            <a:off x="640080" y="457200"/>
+            <a:ext cx="10058400" cy="365760"/>
+          </a:xfrm>
+          <a:prstGeom prst="rect">
+            <a:avLst/>
+          </a:prstGeom>
+          <a:noFill/>
+          <a:ln/>
+        </p:spPr>
+        <p:txBody>
+          <a:bodyPr wrap="square" lIns="0" tIns="0" rIns="0" bIns="0" rtlCol="0" anchor="ctr"/>
+          <a:lstStyle/>
+          <a:p>
+            <a:pPr indent="0" marL="0">
+              <a:buNone/>
+            </a:pPr>
+            <a:r>
+              <a:rPr lang="en-US" sz="1200" b="1" spc="300" kern="0" dirty="0">
+                <a:solidFill>
+                  <a:srgbClr val="8A8274"/>
                 </a:solidFill>
                 <a:latin typeface="Courier New" pitchFamily="34" charset="0"/>
                 <a:ea typeface="Courier New" pitchFamily="34" charset="-122"/>
@@ -3708,7 +3504,7 @@
               </a:rPr>
               <a:t>LIVE TODAY — NOT A CONCEPT</a:t>
             </a:r>
-            <a:endParaRPr lang="en-US" sz="1600" dirty="0"/>
+            <a:endParaRPr lang="en-US" sz="1200" dirty="0"/>
           </a:p>
         </p:txBody>
       </p:sp>
@@ -3720,8 +3516,8 @@
         </p:nvSpPr>
         <p:spPr>
           <a:xfrm>
-            <a:off x="11137392" y="411480"/>
-            <a:ext cx="502920" cy="502920"/>
+            <a:off x="11045952" y="457200"/>
+            <a:ext cx="502920" cy="365760"/>
           </a:xfrm>
           <a:prstGeom prst="rect">
             <a:avLst/>
@@ -3737,9 +3533,9 @@
               <a:buNone/>
             </a:pPr>
             <a:r>
-              <a:rPr lang="en-US" sz="1600" dirty="0">
-                <a:solidFill>
-                  <a:srgbClr val="71685A"/>
+              <a:rPr lang="en-US" sz="1200" dirty="0">
+                <a:solidFill>
+                  <a:srgbClr val="8A8274"/>
                 </a:solidFill>
                 <a:latin typeface="Courier New" pitchFamily="34" charset="0"/>
                 <a:ea typeface="Courier New" pitchFamily="34" charset="-122"/>
@@ -3747,92 +3543,97 @@
               </a:rPr>
               <a:t>06</a:t>
             </a:r>
-            <a:endParaRPr lang="en-US" sz="1600" dirty="0"/>
-          </a:p>
-        </p:txBody>
-      </p:sp>
-      <p:sp>
-        <p:nvSpPr>
-          <p:cNvPr id="4" name="Shape 2"/>
-          <p:cNvSpPr/>
-          <p:nvPr/>
-        </p:nvSpPr>
-        <p:spPr>
-          <a:xfrm>
-            <a:off x="548640" y="960120"/>
-            <a:ext cx="11091672" cy="0"/>
-          </a:xfrm>
-          <a:prstGeom prst="line">
-            <a:avLst/>
-          </a:prstGeom>
-          <a:noFill/>
-          <a:ln w="15240">
-            <a:solidFill>
-              <a:srgbClr val="1A1712"/>
-            </a:solidFill>
-            <a:prstDash val="solid"/>
-          </a:ln>
-        </p:spPr>
-      </p:sp>
-      <p:sp>
-        <p:nvSpPr>
-          <p:cNvPr id="5" name="Shape 3"/>
-          <p:cNvSpPr/>
-          <p:nvPr/>
-        </p:nvSpPr>
-        <p:spPr>
-          <a:xfrm>
-            <a:off x="548640" y="1325880"/>
-            <a:ext cx="6400800" cy="4114800"/>
-          </a:xfrm>
-          <a:prstGeom prst="rect">
-            <a:avLst/>
-          </a:prstGeom>
-          <a:solidFill>
-            <a:srgbClr val="ECE4D3"/>
-          </a:solidFill>
-          <a:ln w="15240">
-            <a:solidFill>
-              <a:srgbClr val="1A1712"/>
-            </a:solidFill>
-            <a:prstDash val="solid"/>
-          </a:ln>
-        </p:spPr>
-      </p:sp>
-      <p:sp>
-        <p:nvSpPr>
-          <p:cNvPr id="6" name="Text 4"/>
-          <p:cNvSpPr txBox="1"/>
-          <p:nvPr/>
-        </p:nvSpPr>
-        <p:spPr>
-          <a:xfrm>
-            <a:off x="868680" y="1554480"/>
-            <a:ext cx="1097280" cy="320040"/>
-          </a:xfrm>
-          <a:prstGeom prst="rect">
-            <a:avLst/>
-          </a:prstGeom>
-          <a:noFill/>
-          <a:ln/>
-        </p:spPr>
-        <p:txBody>
-          <a:bodyPr wrap="square" lIns="0" tIns="0" rIns="0" bIns="0" rtlCol="0" anchor="ctr"/>
-          <a:lstStyle/>
-          <a:p>
-            <a:pPr indent="0" marL="0">
-              <a:buNone/>
-            </a:pPr>
-            <a:r>
-              <a:rPr lang="en-US" sz="1200" b="1" spc="300" kern="0" dirty="0">
+            <a:endParaRPr lang="en-US" sz="1200" dirty="0"/>
+          </a:p>
+        </p:txBody>
+      </p:sp>
+      <p:sp>
+        <p:nvSpPr>
+          <p:cNvPr id="4" name="Text 2"/>
+          <p:cNvSpPr txBox="1"/>
+          <p:nvPr/>
+        </p:nvSpPr>
+        <p:spPr>
+          <a:xfrm>
+            <a:off x="640080" y="1554480"/>
+            <a:ext cx="5852160" cy="457200"/>
+          </a:xfrm>
+          <a:prstGeom prst="rect">
+            <a:avLst/>
+          </a:prstGeom>
+          <a:noFill/>
+          <a:ln/>
+        </p:spPr>
+        <p:txBody>
+          <a:bodyPr wrap="square" lIns="0" tIns="0" rIns="0" bIns="0" rtlCol="0" anchor="ctr"/>
+          <a:lstStyle/>
+          <a:p>
+            <a:pPr indent="0" marL="0">
+              <a:buNone/>
+            </a:pPr>
+            <a:r>
+              <a:rPr lang="en-US" sz="1800" b="1" dirty="0">
+                <a:solidFill>
+                  <a:srgbClr val="BF3A1E"/>
+                </a:solidFill>
+                <a:latin typeface="Georgia" pitchFamily="34" charset="0"/>
+                <a:ea typeface="Georgia" pitchFamily="34" charset="-122"/>
+                <a:cs typeface="Georgia" pitchFamily="34" charset="-120"/>
+              </a:rPr>
+              <a:t>mona</a:t>
+            </a:r>
+            <a:pPr indent="0" marL="0">
+              <a:buNone/>
+            </a:pPr>
+            <a:r>
+              <a:rPr lang="en-US" sz="1800" dirty="0">
                 <a:solidFill>
                   <a:srgbClr val="1A1712"/>
+                </a:solidFill>
+                <a:latin typeface="Georgia" pitchFamily="34" charset="0"/>
+                <a:ea typeface="Georgia" pitchFamily="34" charset="-122"/>
+                <a:cs typeface="Georgia" pitchFamily="34" charset="-120"/>
+              </a:rPr>
+              <a:t>  ·  gm Amsterdam — this line cost money</a:t>
+            </a:r>
+            <a:endParaRPr lang="en-US" sz="1800" dirty="0"/>
+          </a:p>
+        </p:txBody>
+      </p:sp>
+      <p:sp>
+        <p:nvSpPr>
+          <p:cNvPr id="5" name="Text 3"/>
+          <p:cNvSpPr txBox="1"/>
+          <p:nvPr/>
+        </p:nvSpPr>
+        <p:spPr>
+          <a:xfrm>
+            <a:off x="640080" y="2011680"/>
+            <a:ext cx="5577840" cy="365760"/>
+          </a:xfrm>
+          <a:prstGeom prst="rect">
+            <a:avLst/>
+          </a:prstGeom>
+          <a:noFill/>
+          <a:ln/>
+        </p:spPr>
+        <p:txBody>
+          <a:bodyPr wrap="square" lIns="0" tIns="0" rIns="0" bIns="0" rtlCol="0" anchor="ctr"/>
+          <a:lstStyle/>
+          <a:p>
+            <a:pPr indent="0" marL="0">
+              <a:buNone/>
+            </a:pPr>
+            <a:r>
+              <a:rPr lang="en-US" sz="1200" b="1" dirty="0">
+                <a:solidFill>
+                  <a:srgbClr val="1C6B4A"/>
                 </a:solidFill>
                 <a:latin typeface="Courier New" pitchFamily="34" charset="0"/>
                 <a:ea typeface="Courier New" pitchFamily="34" charset="-122"/>
                 <a:cs typeface="Courier New" pitchFamily="34" charset="-120"/>
               </a:rPr>
-              <a:t>CHAT</a:t>
+              <a:t>0.05</a:t>
             </a:r>
             <a:endParaRPr lang="en-US" sz="1200" dirty="0"/>
           </a:p>
@@ -3840,87 +3641,44 @@
       </p:sp>
       <p:sp>
         <p:nvSpPr>
-          <p:cNvPr id="7" name="Shape 5"/>
-          <p:cNvSpPr/>
-          <p:nvPr/>
-        </p:nvSpPr>
-        <p:spPr>
-          <a:xfrm>
-            <a:off x="1645920" y="1664208"/>
-            <a:ext cx="91440" cy="91440"/>
-          </a:xfrm>
-          <a:prstGeom prst="ellipse">
-            <a:avLst/>
-          </a:prstGeom>
-          <a:solidFill>
-            <a:srgbClr val="1C6B4A"/>
-          </a:solidFill>
-          <a:ln/>
-        </p:spPr>
-      </p:sp>
-      <p:sp>
-        <p:nvSpPr>
-          <p:cNvPr id="8" name="Shape 6"/>
-          <p:cNvSpPr/>
-          <p:nvPr/>
-        </p:nvSpPr>
-        <p:spPr>
-          <a:xfrm>
-            <a:off x="548640" y="1993392"/>
-            <a:ext cx="6400800" cy="0"/>
-          </a:xfrm>
-          <a:prstGeom prst="line">
-            <a:avLst/>
-          </a:prstGeom>
-          <a:noFill/>
-          <a:ln w="12700">
-            <a:solidFill>
-              <a:srgbClr val="1A1712"/>
-            </a:solidFill>
-            <a:prstDash val="solid"/>
-          </a:ln>
-        </p:spPr>
-      </p:sp>
-      <p:sp>
-        <p:nvSpPr>
-          <p:cNvPr id="9" name="Text 7"/>
-          <p:cNvSpPr txBox="1"/>
-          <p:nvPr/>
-        </p:nvSpPr>
-        <p:spPr>
-          <a:xfrm>
-            <a:off x="868680" y="2286000"/>
-            <a:ext cx="5760720" cy="457200"/>
-          </a:xfrm>
-          <a:prstGeom prst="rect">
-            <a:avLst/>
-          </a:prstGeom>
-          <a:noFill/>
-          <a:ln/>
-        </p:spPr>
-        <p:txBody>
-          <a:bodyPr wrap="square" lIns="0" tIns="0" rIns="0" bIns="0" rtlCol="0" anchor="ctr"/>
-          <a:lstStyle/>
-          <a:p>
-            <a:pPr indent="0" marL="0">
-              <a:buNone/>
-            </a:pPr>
-            <a:r>
-              <a:rPr lang="en-US" sz="1700" b="1" dirty="0">
-                <a:solidFill>
-                  <a:srgbClr val="BF3A1E"/>
+          <p:cNvPr id="6" name="Text 4"/>
+          <p:cNvSpPr txBox="1"/>
+          <p:nvPr/>
+        </p:nvSpPr>
+        <p:spPr>
+          <a:xfrm>
+            <a:off x="640080" y="2606040"/>
+            <a:ext cx="5852160" cy="457200"/>
+          </a:xfrm>
+          <a:prstGeom prst="rect">
+            <a:avLst/>
+          </a:prstGeom>
+          <a:noFill/>
+          <a:ln/>
+        </p:spPr>
+        <p:txBody>
+          <a:bodyPr wrap="square" lIns="0" tIns="0" rIns="0" bIns="0" rtlCol="0" anchor="ctr"/>
+          <a:lstStyle/>
+          <a:p>
+            <a:pPr indent="0" marL="0">
+              <a:buNone/>
+            </a:pPr>
+            <a:r>
+              <a:rPr lang="en-US" sz="1800" b="1" dirty="0">
+                <a:solidFill>
+                  <a:srgbClr val="1C6B4A"/>
                 </a:solidFill>
                 <a:latin typeface="Georgia" pitchFamily="34" charset="0"/>
                 <a:ea typeface="Georgia" pitchFamily="34" charset="-122"/>
                 <a:cs typeface="Georgia" pitchFamily="34" charset="-120"/>
               </a:rPr>
-              <a:t>mona</a:t>
-            </a:r>
-            <a:pPr indent="0" marL="0">
-              <a:buNone/>
-            </a:pPr>
-            <a:r>
-              <a:rPr lang="en-US" sz="1700" dirty="0">
+              <a:t>nad_holder</a:t>
+            </a:r>
+            <a:pPr indent="0" marL="0">
+              <a:buNone/>
+            </a:pPr>
+            <a:r>
+              <a:rPr lang="en-US" sz="1800" dirty="0">
                 <a:solidFill>
                   <a:srgbClr val="1A1712"/>
                 </a:solidFill>
@@ -3928,61 +3686,38 @@
                 <a:ea typeface="Georgia" pitchFamily="34" charset="-122"/>
                 <a:cs typeface="Georgia" pitchFamily="34" charset="-120"/>
               </a:rPr>
-              <a:t>  ·  gm Amsterdam — this line cost money</a:t>
-            </a:r>
-            <a:endParaRPr lang="en-US" sz="1700" dirty="0"/>
-          </a:p>
-        </p:txBody>
-      </p:sp>
-      <p:sp>
-        <p:nvSpPr>
-          <p:cNvPr id="10" name="Shape 8"/>
-          <p:cNvSpPr/>
-          <p:nvPr/>
-        </p:nvSpPr>
-        <p:spPr>
-          <a:xfrm>
-            <a:off x="868680" y="2889504"/>
-            <a:ext cx="4206240" cy="0"/>
-          </a:xfrm>
-          <a:prstGeom prst="line">
-            <a:avLst/>
-          </a:prstGeom>
-          <a:noFill/>
-          <a:ln w="12700">
-            <a:solidFill>
-              <a:srgbClr val="71685A"/>
-            </a:solidFill>
-            <a:prstDash val="sysDot"/>
-          </a:ln>
-        </p:spPr>
-      </p:sp>
-      <p:sp>
-        <p:nvSpPr>
-          <p:cNvPr id="11" name="Text 9"/>
-          <p:cNvSpPr txBox="1"/>
-          <p:nvPr/>
-        </p:nvSpPr>
-        <p:spPr>
-          <a:xfrm>
-            <a:off x="4754880" y="2688336"/>
-            <a:ext cx="1828800" cy="365760"/>
-          </a:xfrm>
-          <a:prstGeom prst="rect">
-            <a:avLst/>
-          </a:prstGeom>
-          <a:noFill/>
-          <a:ln/>
-        </p:spPr>
-        <p:txBody>
-          <a:bodyPr wrap="square" lIns="0" tIns="0" rIns="0" bIns="0" rtlCol="0" anchor="ctr"/>
-          <a:lstStyle/>
-          <a:p>
-            <a:pPr algn="r" indent="0" marL="0">
-              <a:buNone/>
-            </a:pPr>
-            <a:r>
-              <a:rPr lang="en-US" sz="1300" b="1" dirty="0">
+              <a:t>  ·  every message here is a transaction</a:t>
+            </a:r>
+            <a:endParaRPr lang="en-US" sz="1800" dirty="0"/>
+          </a:p>
+        </p:txBody>
+      </p:sp>
+      <p:sp>
+        <p:nvSpPr>
+          <p:cNvPr id="7" name="Text 5"/>
+          <p:cNvSpPr txBox="1"/>
+          <p:nvPr/>
+        </p:nvSpPr>
+        <p:spPr>
+          <a:xfrm>
+            <a:off x="640080" y="3063240"/>
+            <a:ext cx="5577840" cy="365760"/>
+          </a:xfrm>
+          <a:prstGeom prst="rect">
+            <a:avLst/>
+          </a:prstGeom>
+          <a:noFill/>
+          <a:ln/>
+        </p:spPr>
+        <p:txBody>
+          <a:bodyPr wrap="square" lIns="0" tIns="0" rIns="0" bIns="0" rtlCol="0" anchor="ctr"/>
+          <a:lstStyle/>
+          <a:p>
+            <a:pPr indent="0" marL="0">
+              <a:buNone/>
+            </a:pPr>
+            <a:r>
+              <a:rPr lang="en-US" sz="1200" b="1" dirty="0">
                 <a:solidFill>
                   <a:srgbClr val="1C6B4A"/>
                 </a:solidFill>
@@ -3992,50 +3727,50 @@
               </a:rPr>
               <a:t>0.05</a:t>
             </a:r>
-            <a:endParaRPr lang="en-US" sz="1300" dirty="0"/>
-          </a:p>
-        </p:txBody>
-      </p:sp>
-      <p:sp>
-        <p:nvSpPr>
-          <p:cNvPr id="12" name="Text 10"/>
-          <p:cNvSpPr txBox="1"/>
-          <p:nvPr/>
-        </p:nvSpPr>
-        <p:spPr>
-          <a:xfrm>
-            <a:off x="868680" y="3291840"/>
-            <a:ext cx="5760720" cy="457200"/>
-          </a:xfrm>
-          <a:prstGeom prst="rect">
-            <a:avLst/>
-          </a:prstGeom>
-          <a:noFill/>
-          <a:ln/>
-        </p:spPr>
-        <p:txBody>
-          <a:bodyPr wrap="square" lIns="0" tIns="0" rIns="0" bIns="0" rtlCol="0" anchor="ctr"/>
-          <a:lstStyle/>
-          <a:p>
-            <a:pPr indent="0" marL="0">
-              <a:buNone/>
-            </a:pPr>
-            <a:r>
-              <a:rPr lang="en-US" sz="1700" b="1" dirty="0">
-                <a:solidFill>
-                  <a:srgbClr val="1C6B4A"/>
+            <a:endParaRPr lang="en-US" sz="1200" dirty="0"/>
+          </a:p>
+        </p:txBody>
+      </p:sp>
+      <p:sp>
+        <p:nvSpPr>
+          <p:cNvPr id="8" name="Text 6"/>
+          <p:cNvSpPr txBox="1"/>
+          <p:nvPr/>
+        </p:nvSpPr>
+        <p:spPr>
+          <a:xfrm>
+            <a:off x="640080" y="3657600"/>
+            <a:ext cx="5852160" cy="457200"/>
+          </a:xfrm>
+          <a:prstGeom prst="rect">
+            <a:avLst/>
+          </a:prstGeom>
+          <a:noFill/>
+          <a:ln/>
+        </p:spPr>
+        <p:txBody>
+          <a:bodyPr wrap="square" lIns="0" tIns="0" rIns="0" bIns="0" rtlCol="0" anchor="ctr"/>
+          <a:lstStyle/>
+          <a:p>
+            <a:pPr indent="0" marL="0">
+              <a:buNone/>
+            </a:pPr>
+            <a:r>
+              <a:rPr lang="en-US" sz="1800" b="1" dirty="0">
+                <a:solidFill>
+                  <a:srgbClr val="1D5A8A"/>
                 </a:solidFill>
                 <a:latin typeface="Georgia" pitchFamily="34" charset="0"/>
                 <a:ea typeface="Georgia" pitchFamily="34" charset="-122"/>
                 <a:cs typeface="Georgia" pitchFamily="34" charset="-120"/>
               </a:rPr>
-              <a:t>nad_holder</a:t>
-            </a:r>
-            <a:pPr indent="0" marL="0">
-              <a:buNone/>
-            </a:pPr>
-            <a:r>
-              <a:rPr lang="en-US" sz="1700" dirty="0">
+              <a:t>blitz_fan</a:t>
+            </a:r>
+            <a:pPr indent="0" marL="0">
+              <a:buNone/>
+            </a:pPr>
+            <a:r>
+              <a:rPr lang="en-US" sz="1800" dirty="0">
                 <a:solidFill>
                   <a:srgbClr val="1A1712"/>
                 </a:solidFill>
@@ -4043,61 +3778,38 @@
                 <a:ea typeface="Georgia" pitchFamily="34" charset="-122"/>
                 <a:cs typeface="Georgia" pitchFamily="34" charset="-120"/>
               </a:rPr>
-              <a:t>  ·  every message here is a transaction</a:t>
-            </a:r>
-            <a:endParaRPr lang="en-US" sz="1700" dirty="0"/>
-          </a:p>
-        </p:txBody>
-      </p:sp>
-      <p:sp>
-        <p:nvSpPr>
-          <p:cNvPr id="13" name="Shape 11"/>
-          <p:cNvSpPr/>
-          <p:nvPr/>
-        </p:nvSpPr>
-        <p:spPr>
-          <a:xfrm>
-            <a:off x="868680" y="3895344"/>
-            <a:ext cx="4206240" cy="0"/>
-          </a:xfrm>
-          <a:prstGeom prst="line">
-            <a:avLst/>
-          </a:prstGeom>
-          <a:noFill/>
-          <a:ln w="12700">
-            <a:solidFill>
-              <a:srgbClr val="71685A"/>
-            </a:solidFill>
-            <a:prstDash val="sysDot"/>
-          </a:ln>
-        </p:spPr>
-      </p:sp>
-      <p:sp>
-        <p:nvSpPr>
-          <p:cNvPr id="14" name="Text 12"/>
-          <p:cNvSpPr txBox="1"/>
-          <p:nvPr/>
-        </p:nvSpPr>
-        <p:spPr>
-          <a:xfrm>
-            <a:off x="4754880" y="3694176"/>
-            <a:ext cx="1828800" cy="365760"/>
-          </a:xfrm>
-          <a:prstGeom prst="rect">
-            <a:avLst/>
-          </a:prstGeom>
-          <a:noFill/>
-          <a:ln/>
-        </p:spPr>
-        <p:txBody>
-          <a:bodyPr wrap="square" lIns="0" tIns="0" rIns="0" bIns="0" rtlCol="0" anchor="ctr"/>
-          <a:lstStyle/>
-          <a:p>
-            <a:pPr algn="r" indent="0" marL="0">
-              <a:buNone/>
-            </a:pPr>
-            <a:r>
-              <a:rPr lang="en-US" sz="1300" b="1" dirty="0">
+              <a:t>  ·  watch the badge → half a second</a:t>
+            </a:r>
+            <a:endParaRPr lang="en-US" sz="1800" dirty="0"/>
+          </a:p>
+        </p:txBody>
+      </p:sp>
+      <p:sp>
+        <p:nvSpPr>
+          <p:cNvPr id="9" name="Text 7"/>
+          <p:cNvSpPr txBox="1"/>
+          <p:nvPr/>
+        </p:nvSpPr>
+        <p:spPr>
+          <a:xfrm>
+            <a:off x="640080" y="4114800"/>
+            <a:ext cx="5577840" cy="365760"/>
+          </a:xfrm>
+          <a:prstGeom prst="rect">
+            <a:avLst/>
+          </a:prstGeom>
+          <a:noFill/>
+          <a:ln/>
+        </p:spPr>
+        <p:txBody>
+          <a:bodyPr wrap="square" lIns="0" tIns="0" rIns="0" bIns="0" rtlCol="0" anchor="ctr"/>
+          <a:lstStyle/>
+          <a:p>
+            <a:pPr indent="0" marL="0">
+              <a:buNone/>
+            </a:pPr>
+            <a:r>
+              <a:rPr lang="en-US" sz="1200" b="1" dirty="0">
                 <a:solidFill>
                   <a:srgbClr val="1C6B4A"/>
                 </a:solidFill>
@@ -4105,52 +3817,77 @@
                 <a:ea typeface="Courier New" pitchFamily="34" charset="-122"/>
                 <a:cs typeface="Courier New" pitchFamily="34" charset="-120"/>
               </a:rPr>
-              <a:t>0.05</a:t>
-            </a:r>
-            <a:endParaRPr lang="en-US" sz="1300" dirty="0"/>
-          </a:p>
-        </p:txBody>
-      </p:sp>
-      <p:sp>
-        <p:nvSpPr>
-          <p:cNvPr id="15" name="Text 13"/>
-          <p:cNvSpPr txBox="1"/>
-          <p:nvPr/>
-        </p:nvSpPr>
-        <p:spPr>
-          <a:xfrm>
-            <a:off x="868680" y="4297680"/>
-            <a:ext cx="5760720" cy="457200"/>
-          </a:xfrm>
-          <a:prstGeom prst="rect">
-            <a:avLst/>
-          </a:prstGeom>
-          <a:noFill/>
-          <a:ln/>
-        </p:spPr>
-        <p:txBody>
-          <a:bodyPr wrap="square" lIns="0" tIns="0" rIns="0" bIns="0" rtlCol="0" anchor="ctr"/>
-          <a:lstStyle/>
-          <a:p>
-            <a:pPr indent="0" marL="0">
-              <a:buNone/>
-            </a:pPr>
-            <a:r>
-              <a:rPr lang="en-US" sz="1700" b="1" dirty="0">
-                <a:solidFill>
-                  <a:srgbClr val="1D5A8A"/>
+              <a:t>0.05 · 0.55s</a:t>
+            </a:r>
+            <a:endParaRPr lang="en-US" sz="1200" dirty="0"/>
+          </a:p>
+        </p:txBody>
+      </p:sp>
+      <p:sp>
+        <p:nvSpPr>
+          <p:cNvPr id="10" name="Text 8"/>
+          <p:cNvSpPr txBox="1"/>
+          <p:nvPr/>
+        </p:nvSpPr>
+        <p:spPr>
+          <a:xfrm>
+            <a:off x="6949440" y="1554480"/>
+            <a:ext cx="4663440" cy="548640"/>
+          </a:xfrm>
+          <a:prstGeom prst="rect">
+            <a:avLst/>
+          </a:prstGeom>
+          <a:noFill/>
+          <a:ln/>
+        </p:spPr>
+        <p:txBody>
+          <a:bodyPr wrap="square" lIns="0" tIns="0" rIns="0" bIns="0" rtlCol="0" anchor="ctr"/>
+          <a:lstStyle/>
+          <a:p>
+            <a:pPr indent="0" marL="0">
+              <a:buNone/>
+            </a:pPr>
+            <a:r>
+              <a:rPr lang="en-US" sz="1800" dirty="0">
+                <a:solidFill>
+                  <a:srgbClr val="1A1712"/>
                 </a:solidFill>
                 <a:latin typeface="Georgia" pitchFamily="34" charset="0"/>
                 <a:ea typeface="Georgia" pitchFamily="34" charset="-122"/>
                 <a:cs typeface="Georgia" pitchFamily="34" charset="-120"/>
               </a:rPr>
-              <a:t>blitz_fan</a:t>
-            </a:r>
-            <a:pPr indent="0" marL="0">
-              <a:buNone/>
-            </a:pPr>
-            <a:r>
-              <a:rPr lang="en-US" sz="1700" dirty="0">
+              <a:t>— real rooms, real MON moving today</a:t>
+            </a:r>
+            <a:endParaRPr lang="en-US" sz="1800" dirty="0"/>
+          </a:p>
+        </p:txBody>
+      </p:sp>
+      <p:sp>
+        <p:nvSpPr>
+          <p:cNvPr id="11" name="Text 9"/>
+          <p:cNvSpPr txBox="1"/>
+          <p:nvPr/>
+        </p:nvSpPr>
+        <p:spPr>
+          <a:xfrm>
+            <a:off x="6949440" y="2331720"/>
+            <a:ext cx="4663440" cy="548640"/>
+          </a:xfrm>
+          <a:prstGeom prst="rect">
+            <a:avLst/>
+          </a:prstGeom>
+          <a:noFill/>
+          <a:ln/>
+        </p:spPr>
+        <p:txBody>
+          <a:bodyPr wrap="square" lIns="0" tIns="0" rIns="0" bIns="0" rtlCol="0" anchor="ctr"/>
+          <a:lstStyle/>
+          <a:p>
+            <a:pPr indent="0" marL="0">
+              <a:buNone/>
+            </a:pPr>
+            <a:r>
+              <a:rPr lang="en-US" sz="1800" dirty="0">
                 <a:solidFill>
                   <a:srgbClr val="1A1712"/>
                 </a:solidFill>
@@ -4158,346 +3895,126 @@
                 <a:ea typeface="Georgia" pitchFamily="34" charset="-122"/>
                 <a:cs typeface="Georgia" pitchFamily="34" charset="-120"/>
               </a:rPr>
-              <a:t>  ·  watch the badge → half a second</a:t>
-            </a:r>
-            <a:endParaRPr lang="en-US" sz="1700" dirty="0"/>
-          </a:p>
-        </p:txBody>
-      </p:sp>
-      <p:sp>
-        <p:nvSpPr>
-          <p:cNvPr id="16" name="Shape 14"/>
-          <p:cNvSpPr/>
-          <p:nvPr/>
-        </p:nvSpPr>
-        <p:spPr>
-          <a:xfrm>
-            <a:off x="868680" y="4901184"/>
-            <a:ext cx="4206240" cy="0"/>
-          </a:xfrm>
-          <a:prstGeom prst="line">
-            <a:avLst/>
-          </a:prstGeom>
-          <a:noFill/>
-          <a:ln w="12700">
-            <a:solidFill>
-              <a:srgbClr val="71685A"/>
-            </a:solidFill>
-            <a:prstDash val="sysDot"/>
-          </a:ln>
-        </p:spPr>
-      </p:sp>
-      <p:sp>
-        <p:nvSpPr>
-          <p:cNvPr id="17" name="Text 15"/>
-          <p:cNvSpPr txBox="1"/>
-          <p:nvPr/>
-        </p:nvSpPr>
-        <p:spPr>
-          <a:xfrm>
-            <a:off x="4754880" y="4700016"/>
-            <a:ext cx="1828800" cy="365760"/>
-          </a:xfrm>
-          <a:prstGeom prst="rect">
-            <a:avLst/>
-          </a:prstGeom>
-          <a:noFill/>
-          <a:ln/>
-        </p:spPr>
-        <p:txBody>
-          <a:bodyPr wrap="square" lIns="0" tIns="0" rIns="0" bIns="0" rtlCol="0" anchor="ctr"/>
-          <a:lstStyle/>
-          <a:p>
-            <a:pPr algn="r" indent="0" marL="0">
+              <a:t>— latency printed on every message</a:t>
+            </a:r>
+            <a:endParaRPr lang="en-US" sz="1800" dirty="0"/>
+          </a:p>
+        </p:txBody>
+      </p:sp>
+      <p:sp>
+        <p:nvSpPr>
+          <p:cNvPr id="12" name="Text 10"/>
+          <p:cNvSpPr txBox="1"/>
+          <p:nvPr/>
+        </p:nvSpPr>
+        <p:spPr>
+          <a:xfrm>
+            <a:off x="6949440" y="3108960"/>
+            <a:ext cx="4663440" cy="548640"/>
+          </a:xfrm>
+          <a:prstGeom prst="rect">
+            <a:avLst/>
+          </a:prstGeom>
+          <a:noFill/>
+          <a:ln/>
+        </p:spPr>
+        <p:txBody>
+          <a:bodyPr wrap="square" lIns="0" tIns="0" rIns="0" bIns="0" rtlCol="0" anchor="ctr"/>
+          <a:lstStyle/>
+          <a:p>
+            <a:pPr indent="0" marL="0">
+              <a:buNone/>
+            </a:pPr>
+            <a:r>
+              <a:rPr lang="en-US" sz="1800" dirty="0">
+                <a:solidFill>
+                  <a:srgbClr val="1A1712"/>
+                </a:solidFill>
+                <a:latin typeface="Georgia" pitchFamily="34" charset="0"/>
+                <a:ea typeface="Georgia" pitchFamily="34" charset="-122"/>
+                <a:cs typeface="Georgia" pitchFamily="34" charset="-120"/>
+              </a:rPr>
+              <a:t>— a 67-line contract — verified</a:t>
+            </a:r>
+            <a:endParaRPr lang="en-US" sz="1800" dirty="0"/>
+          </a:p>
+        </p:txBody>
+      </p:sp>
+      <p:sp>
+        <p:nvSpPr>
+          <p:cNvPr id="13" name="Text 11"/>
+          <p:cNvSpPr txBox="1"/>
+          <p:nvPr/>
+        </p:nvSpPr>
+        <p:spPr>
+          <a:xfrm>
+            <a:off x="6949440" y="3886200"/>
+            <a:ext cx="4663440" cy="548640"/>
+          </a:xfrm>
+          <a:prstGeom prst="rect">
+            <a:avLst/>
+          </a:prstGeom>
+          <a:noFill/>
+          <a:ln/>
+        </p:spPr>
+        <p:txBody>
+          <a:bodyPr wrap="square" lIns="0" tIns="0" rIns="0" bIns="0" rtlCol="0" anchor="ctr"/>
+          <a:lstStyle/>
+          <a:p>
+            <a:pPr indent="0" marL="0">
+              <a:buNone/>
+            </a:pPr>
+            <a:r>
+              <a:rPr lang="en-US" sz="1800" dirty="0">
+                <a:solidFill>
+                  <a:srgbClr val="1A1712"/>
+                </a:solidFill>
+                <a:latin typeface="Georgia" pitchFamily="34" charset="0"/>
+                <a:ea typeface="Georgia" pitchFamily="34" charset="-122"/>
+                <a:cs typeface="Georgia" pitchFamily="34" charset="-120"/>
+              </a:rPr>
+              <a:t>— zero servers: the chain is the backend</a:t>
+            </a:r>
+            <a:endParaRPr lang="en-US" sz="1800" dirty="0"/>
+          </a:p>
+        </p:txBody>
+      </p:sp>
+      <p:sp>
+        <p:nvSpPr>
+          <p:cNvPr id="14" name="Text 12"/>
+          <p:cNvSpPr txBox="1"/>
+          <p:nvPr/>
+        </p:nvSpPr>
+        <p:spPr>
+          <a:xfrm>
+            <a:off x="6949440" y="4846320"/>
+            <a:ext cx="4663440" cy="457200"/>
+          </a:xfrm>
+          <a:prstGeom prst="rect">
+            <a:avLst/>
+          </a:prstGeom>
+          <a:noFill/>
+          <a:ln/>
+        </p:spPr>
+        <p:txBody>
+          <a:bodyPr wrap="square" lIns="0" tIns="0" rIns="0" bIns="0" rtlCol="0" anchor="ctr"/>
+          <a:lstStyle/>
+          <a:p>
+            <a:pPr indent="0" marL="0">
               <a:buNone/>
             </a:pPr>
             <a:r>
               <a:rPr lang="en-US" sz="1300" b="1" dirty="0">
                 <a:solidFill>
-                  <a:srgbClr val="1C6B4A"/>
+                  <a:srgbClr val="BF3A1E"/>
                 </a:solidFill>
                 <a:latin typeface="Courier New" pitchFamily="34" charset="0"/>
                 <a:ea typeface="Courier New" pitchFamily="34" charset="-122"/>
                 <a:cs typeface="Courier New" pitchFamily="34" charset="-120"/>
               </a:rPr>
-              <a:t>0.05 · 0.55s</a:t>
+              <a:t>try it from your phone right now</a:t>
             </a:r>
             <a:endParaRPr lang="en-US" sz="1300" dirty="0"/>
-          </a:p>
-        </p:txBody>
-      </p:sp>
-      <p:sp>
-        <p:nvSpPr>
-          <p:cNvPr id="18" name="Shape 16"/>
-          <p:cNvSpPr/>
-          <p:nvPr/>
-        </p:nvSpPr>
-        <p:spPr>
-          <a:xfrm>
-            <a:off x="7315200" y="1664208"/>
-            <a:ext cx="146304" cy="146304"/>
-          </a:xfrm>
-          <a:prstGeom prst="rect">
-            <a:avLst/>
-          </a:prstGeom>
-          <a:solidFill>
-            <a:srgbClr val="BF3A1E"/>
-          </a:solidFill>
-          <a:ln/>
-        </p:spPr>
-      </p:sp>
-      <p:sp>
-        <p:nvSpPr>
-          <p:cNvPr id="19" name="Text 17"/>
-          <p:cNvSpPr txBox="1"/>
-          <p:nvPr/>
-        </p:nvSpPr>
-        <p:spPr>
-          <a:xfrm>
-            <a:off x="7635240" y="1554480"/>
-            <a:ext cx="4114800" cy="548640"/>
-          </a:xfrm>
-          <a:prstGeom prst="rect">
-            <a:avLst/>
-          </a:prstGeom>
-          <a:noFill/>
-          <a:ln/>
-        </p:spPr>
-        <p:txBody>
-          <a:bodyPr wrap="square" lIns="0" tIns="0" rIns="0" bIns="0" rtlCol="0" anchor="ctr"/>
-          <a:lstStyle/>
-          <a:p>
-            <a:pPr indent="0" marL="0">
-              <a:buNone/>
-            </a:pPr>
-            <a:r>
-              <a:rPr lang="en-US" sz="1800" dirty="0">
-                <a:solidFill>
-                  <a:srgbClr val="1A1712"/>
-                </a:solidFill>
-                <a:latin typeface="Georgia" pitchFamily="34" charset="0"/>
-                <a:ea typeface="Georgia" pitchFamily="34" charset="-122"/>
-                <a:cs typeface="Georgia" pitchFamily="34" charset="-120"/>
-              </a:rPr>
-              <a:t>real rooms, real MON moving today</a:t>
-            </a:r>
-            <a:endParaRPr lang="en-US" sz="1800" dirty="0"/>
-          </a:p>
-        </p:txBody>
-      </p:sp>
-      <p:sp>
-        <p:nvSpPr>
-          <p:cNvPr id="20" name="Shape 18"/>
-          <p:cNvSpPr/>
-          <p:nvPr/>
-        </p:nvSpPr>
-        <p:spPr>
-          <a:xfrm>
-            <a:off x="7315200" y="2532888"/>
-            <a:ext cx="146304" cy="146304"/>
-          </a:xfrm>
-          <a:prstGeom prst="rect">
-            <a:avLst/>
-          </a:prstGeom>
-          <a:solidFill>
-            <a:srgbClr val="BF3A1E"/>
-          </a:solidFill>
-          <a:ln/>
-        </p:spPr>
-      </p:sp>
-      <p:sp>
-        <p:nvSpPr>
-          <p:cNvPr id="21" name="Text 19"/>
-          <p:cNvSpPr txBox="1"/>
-          <p:nvPr/>
-        </p:nvSpPr>
-        <p:spPr>
-          <a:xfrm>
-            <a:off x="7635240" y="2423160"/>
-            <a:ext cx="4114800" cy="548640"/>
-          </a:xfrm>
-          <a:prstGeom prst="rect">
-            <a:avLst/>
-          </a:prstGeom>
-          <a:noFill/>
-          <a:ln/>
-        </p:spPr>
-        <p:txBody>
-          <a:bodyPr wrap="square" lIns="0" tIns="0" rIns="0" bIns="0" rtlCol="0" anchor="ctr"/>
-          <a:lstStyle/>
-          <a:p>
-            <a:pPr indent="0" marL="0">
-              <a:buNone/>
-            </a:pPr>
-            <a:r>
-              <a:rPr lang="en-US" sz="1800" dirty="0">
-                <a:solidFill>
-                  <a:srgbClr val="1A1712"/>
-                </a:solidFill>
-                <a:latin typeface="Georgia" pitchFamily="34" charset="0"/>
-                <a:ea typeface="Georgia" pitchFamily="34" charset="-122"/>
-                <a:cs typeface="Georgia" pitchFamily="34" charset="-120"/>
-              </a:rPr>
-              <a:t>latency printed on every message</a:t>
-            </a:r>
-            <a:endParaRPr lang="en-US" sz="1800" dirty="0"/>
-          </a:p>
-        </p:txBody>
-      </p:sp>
-      <p:sp>
-        <p:nvSpPr>
-          <p:cNvPr id="22" name="Shape 20"/>
-          <p:cNvSpPr/>
-          <p:nvPr/>
-        </p:nvSpPr>
-        <p:spPr>
-          <a:xfrm>
-            <a:off x="7315200" y="3401568"/>
-            <a:ext cx="146304" cy="146304"/>
-          </a:xfrm>
-          <a:prstGeom prst="rect">
-            <a:avLst/>
-          </a:prstGeom>
-          <a:solidFill>
-            <a:srgbClr val="BF3A1E"/>
-          </a:solidFill>
-          <a:ln/>
-        </p:spPr>
-      </p:sp>
-      <p:sp>
-        <p:nvSpPr>
-          <p:cNvPr id="23" name="Text 21"/>
-          <p:cNvSpPr txBox="1"/>
-          <p:nvPr/>
-        </p:nvSpPr>
-        <p:spPr>
-          <a:xfrm>
-            <a:off x="7635240" y="3291840"/>
-            <a:ext cx="4114800" cy="548640"/>
-          </a:xfrm>
-          <a:prstGeom prst="rect">
-            <a:avLst/>
-          </a:prstGeom>
-          <a:noFill/>
-          <a:ln/>
-        </p:spPr>
-        <p:txBody>
-          <a:bodyPr wrap="square" lIns="0" tIns="0" rIns="0" bIns="0" rtlCol="0" anchor="ctr"/>
-          <a:lstStyle/>
-          <a:p>
-            <a:pPr indent="0" marL="0">
-              <a:buNone/>
-            </a:pPr>
-            <a:r>
-              <a:rPr lang="en-US" sz="1800" dirty="0">
-                <a:solidFill>
-                  <a:srgbClr val="1A1712"/>
-                </a:solidFill>
-                <a:latin typeface="Georgia" pitchFamily="34" charset="0"/>
-                <a:ea typeface="Georgia" pitchFamily="34" charset="-122"/>
-                <a:cs typeface="Georgia" pitchFamily="34" charset="-120"/>
-              </a:rPr>
-              <a:t>a 67-line contract — verified</a:t>
-            </a:r>
-            <a:endParaRPr lang="en-US" sz="1800" dirty="0"/>
-          </a:p>
-        </p:txBody>
-      </p:sp>
-      <p:sp>
-        <p:nvSpPr>
-          <p:cNvPr id="24" name="Shape 22"/>
-          <p:cNvSpPr/>
-          <p:nvPr/>
-        </p:nvSpPr>
-        <p:spPr>
-          <a:xfrm>
-            <a:off x="7315200" y="4270248"/>
-            <a:ext cx="146304" cy="146304"/>
-          </a:xfrm>
-          <a:prstGeom prst="rect">
-            <a:avLst/>
-          </a:prstGeom>
-          <a:solidFill>
-            <a:srgbClr val="BF3A1E"/>
-          </a:solidFill>
-          <a:ln/>
-        </p:spPr>
-      </p:sp>
-      <p:sp>
-        <p:nvSpPr>
-          <p:cNvPr id="25" name="Text 23"/>
-          <p:cNvSpPr txBox="1"/>
-          <p:nvPr/>
-        </p:nvSpPr>
-        <p:spPr>
-          <a:xfrm>
-            <a:off x="7635240" y="4160520"/>
-            <a:ext cx="4114800" cy="548640"/>
-          </a:xfrm>
-          <a:prstGeom prst="rect">
-            <a:avLst/>
-          </a:prstGeom>
-          <a:noFill/>
-          <a:ln/>
-        </p:spPr>
-        <p:txBody>
-          <a:bodyPr wrap="square" lIns="0" tIns="0" rIns="0" bIns="0" rtlCol="0" anchor="ctr"/>
-          <a:lstStyle/>
-          <a:p>
-            <a:pPr indent="0" marL="0">
-              <a:buNone/>
-            </a:pPr>
-            <a:r>
-              <a:rPr lang="en-US" sz="1800" dirty="0">
-                <a:solidFill>
-                  <a:srgbClr val="1A1712"/>
-                </a:solidFill>
-                <a:latin typeface="Georgia" pitchFamily="34" charset="0"/>
-                <a:ea typeface="Georgia" pitchFamily="34" charset="-122"/>
-                <a:cs typeface="Georgia" pitchFamily="34" charset="-120"/>
-              </a:rPr>
-              <a:t>zero servers: the chain is the backend</a:t>
-            </a:r>
-            <a:endParaRPr lang="en-US" sz="1800" dirty="0"/>
-          </a:p>
-        </p:txBody>
-      </p:sp>
-      <p:sp>
-        <p:nvSpPr>
-          <p:cNvPr id="26" name="Text 24"/>
-          <p:cNvSpPr txBox="1"/>
-          <p:nvPr/>
-        </p:nvSpPr>
-        <p:spPr>
-          <a:xfrm>
-            <a:off x="7315200" y="5029200"/>
-            <a:ext cx="4480560" cy="457200"/>
-          </a:xfrm>
-          <a:prstGeom prst="rect">
-            <a:avLst/>
-          </a:prstGeom>
-          <a:noFill/>
-          <a:ln/>
-        </p:spPr>
-        <p:txBody>
-          <a:bodyPr wrap="square" lIns="0" tIns="0" rIns="0" bIns="0" rtlCol="0" anchor="ctr"/>
-          <a:lstStyle/>
-          <a:p>
-            <a:pPr indent="0" marL="0">
-              <a:buNone/>
-            </a:pPr>
-            <a:r>
-              <a:rPr lang="en-US" sz="1400" b="1" dirty="0">
-                <a:solidFill>
-                  <a:srgbClr val="BF3A1E"/>
-                </a:solidFill>
-                <a:latin typeface="Courier New" pitchFamily="34" charset="0"/>
-                <a:ea typeface="Courier New" pitchFamily="34" charset="-122"/>
-                <a:cs typeface="Courier New" pitchFamily="34" charset="-120"/>
-              </a:rPr>
-              <a:t>try it from your phone right now</a:t>
-            </a:r>
-            <a:endParaRPr lang="en-US" sz="1400" dirty="0"/>
           </a:p>
         </p:txBody>
       </p:sp>
@@ -4515,7 +4032,7 @@
     <p:bg>
       <p:bgPr>
         <a:solidFill>
-          <a:srgbClr val="1A1712"/>
+          <a:srgbClr val="F4EFE6"/>
         </a:solidFill>
       </p:bgPr>
     </p:bg>
@@ -4535,73 +4052,53 @@
       </p:grpSpPr>
       <p:sp>
         <p:nvSpPr>
-          <p:cNvPr id="2" name="Shape 0"/>
-          <p:cNvSpPr/>
-          <p:nvPr/>
-        </p:nvSpPr>
-        <p:spPr>
-          <a:xfrm>
-            <a:off x="566928" y="665683"/>
-            <a:ext cx="241402" cy="241402"/>
-          </a:xfrm>
-          <a:prstGeom prst="rect">
-            <a:avLst/>
-          </a:prstGeom>
-          <a:solidFill>
-            <a:srgbClr val="BF3A1E"/>
-          </a:solidFill>
-          <a:ln/>
-        </p:spPr>
-      </p:sp>
-      <p:sp>
-        <p:nvSpPr>
-          <p:cNvPr id="3" name="Text 1"/>
-          <p:cNvSpPr txBox="1"/>
-          <p:nvPr/>
-        </p:nvSpPr>
-        <p:spPr>
-          <a:xfrm>
-            <a:off x="918058" y="391363"/>
-            <a:ext cx="3657600" cy="526694"/>
-          </a:xfrm>
-          <a:prstGeom prst="rect">
-            <a:avLst/>
-          </a:prstGeom>
-          <a:noFill/>
-          <a:ln/>
-        </p:spPr>
-        <p:txBody>
-          <a:bodyPr wrap="square" lIns="0" tIns="0" rIns="0" bIns="0" rtlCol="0" anchor="ctr"/>
-          <a:lstStyle/>
-          <a:p>
-            <a:pPr indent="0" marL="0">
-              <a:buNone/>
-            </a:pPr>
-            <a:r>
-              <a:rPr lang="en-US" sz="2400" dirty="0">
-                <a:solidFill>
-                  <a:srgbClr val="F4EFE6"/>
+          <p:cNvPr id="2" name="Text 0"/>
+          <p:cNvSpPr txBox="1"/>
+          <p:nvPr/>
+        </p:nvSpPr>
+        <p:spPr>
+          <a:xfrm>
+            <a:off x="640080" y="2103120"/>
+            <a:ext cx="10972800" cy="1188720"/>
+          </a:xfrm>
+          <a:prstGeom prst="rect">
+            <a:avLst/>
+          </a:prstGeom>
+          <a:noFill/>
+          <a:ln/>
+        </p:spPr>
+        <p:txBody>
+          <a:bodyPr wrap="square" lIns="0" tIns="0" rIns="0" bIns="0" rtlCol="0" anchor="ctr"/>
+          <a:lstStyle/>
+          <a:p>
+            <a:pPr algn="ctr" indent="0" marL="0">
+              <a:buNone/>
+            </a:pPr>
+            <a:r>
+              <a:rPr lang="en-US" sz="6400" dirty="0">
+                <a:solidFill>
+                  <a:srgbClr val="1A1712"/>
                 </a:solidFill>
                 <a:latin typeface="Alsina" pitchFamily="34" charset="0"/>
                 <a:ea typeface="Alsina" pitchFamily="34" charset="-122"/>
                 <a:cs typeface="Alsina" pitchFamily="34" charset="-120"/>
               </a:rPr>
-              <a:t>MonadChat</a:t>
-            </a:r>
-            <a:endParaRPr lang="en-US" sz="2400" dirty="0"/>
-          </a:p>
-        </p:txBody>
-      </p:sp>
-      <p:sp>
-        <p:nvSpPr>
-          <p:cNvPr id="4" name="Text 2"/>
-          <p:cNvSpPr txBox="1"/>
-          <p:nvPr/>
-        </p:nvSpPr>
-        <p:spPr>
-          <a:xfrm>
-            <a:off x="548640" y="1920240"/>
-            <a:ext cx="11064240" cy="1188720"/>
+              <a:t>Chat is a revenue stream now.</a:t>
+            </a:r>
+            <a:endParaRPr lang="en-US" sz="6400" dirty="0"/>
+          </a:p>
+        </p:txBody>
+      </p:sp>
+      <p:sp>
+        <p:nvSpPr>
+          <p:cNvPr id="3" name="Text 1"/>
+          <p:cNvSpPr txBox="1"/>
+          <p:nvPr/>
+        </p:nvSpPr>
+        <p:spPr>
+          <a:xfrm>
+            <a:off x="640080" y="3611880"/>
+            <a:ext cx="10972800" cy="640080"/>
           </a:xfrm>
           <a:prstGeom prst="rect">
             <a:avLst/>
@@ -4617,46 +4114,7 @@
               <a:buNone/>
             </a:pPr>
             <a:r>
-              <a:rPr lang="en-US" sz="6400" dirty="0">
-                <a:solidFill>
-                  <a:srgbClr val="F4EFE6"/>
-                </a:solidFill>
-                <a:latin typeface="Alsina" pitchFamily="34" charset="0"/>
-                <a:ea typeface="Alsina" pitchFamily="34" charset="-122"/>
-                <a:cs typeface="Alsina" pitchFamily="34" charset="-120"/>
-              </a:rPr>
-              <a:t>Chat is a revenue stream now.</a:t>
-            </a:r>
-            <a:endParaRPr lang="en-US" sz="6400" dirty="0"/>
-          </a:p>
-        </p:txBody>
-      </p:sp>
-      <p:sp>
-        <p:nvSpPr>
-          <p:cNvPr id="5" name="Text 3"/>
-          <p:cNvSpPr txBox="1"/>
-          <p:nvPr/>
-        </p:nvSpPr>
-        <p:spPr>
-          <a:xfrm>
-            <a:off x="548640" y="3474720"/>
-            <a:ext cx="11064240" cy="640080"/>
-          </a:xfrm>
-          <a:prstGeom prst="rect">
-            <a:avLst/>
-          </a:prstGeom>
-          <a:noFill/>
-          <a:ln/>
-        </p:spPr>
-        <p:txBody>
-          <a:bodyPr wrap="square" lIns="0" tIns="0" rIns="0" bIns="0" rtlCol="0" anchor="ctr"/>
-          <a:lstStyle/>
-          <a:p>
-            <a:pPr algn="ctr" indent="0" marL="0">
-              <a:buNone/>
-            </a:pPr>
-            <a:r>
-              <a:rPr lang="en-US" sz="3000" b="1" dirty="0">
+              <a:rPr lang="en-US" sz="2800" b="1" dirty="0">
                 <a:solidFill>
                   <a:srgbClr val="BF3A1E"/>
                 </a:solidFill>
@@ -4666,20 +4124,20 @@
               </a:rPr>
               <a:t>monadchat-rvfc1.vercel.app</a:t>
             </a:r>
-            <a:endParaRPr lang="en-US" sz="3000" dirty="0"/>
-          </a:p>
-        </p:txBody>
-      </p:sp>
-      <p:sp>
-        <p:nvSpPr>
-          <p:cNvPr id="6" name="Text 4"/>
-          <p:cNvSpPr txBox="1"/>
-          <p:nvPr/>
-        </p:nvSpPr>
-        <p:spPr>
-          <a:xfrm>
-            <a:off x="548640" y="4251960"/>
-            <a:ext cx="11064240" cy="457200"/>
+            <a:endParaRPr lang="en-US" sz="2800" dirty="0"/>
+          </a:p>
+        </p:txBody>
+      </p:sp>
+      <p:sp>
+        <p:nvSpPr>
+          <p:cNvPr id="4" name="Text 2"/>
+          <p:cNvSpPr txBox="1"/>
+          <p:nvPr/>
+        </p:nvSpPr>
+        <p:spPr>
+          <a:xfrm>
+            <a:off x="640080" y="4389120"/>
+            <a:ext cx="10972800" cy="457200"/>
           </a:xfrm>
           <a:prstGeom prst="rect">
             <a:avLst/>
@@ -4695,9 +4153,9 @@
               <a:buNone/>
             </a:pPr>
             <a:r>
-              <a:rPr lang="en-US" sz="1800" i="1" dirty="0">
-                <a:solidFill>
-                  <a:srgbClr val="BFB6A4"/>
+              <a:rPr lang="en-US" sz="1700" i="1" dirty="0">
+                <a:solidFill>
+                  <a:srgbClr val="8A8274"/>
                 </a:solidFill>
                 <a:latin typeface="Georgia" pitchFamily="34" charset="0"/>
                 <a:ea typeface="Georgia" pitchFamily="34" charset="-122"/>
@@ -4705,42 +4163,19 @@
               </a:rPr>
               <a:t>open the demo · write a word · watch it land in half a second</a:t>
             </a:r>
-            <a:endParaRPr lang="en-US" sz="1800" dirty="0"/>
-          </a:p>
-        </p:txBody>
-      </p:sp>
-      <p:sp>
-        <p:nvSpPr>
-          <p:cNvPr id="7" name="Shape 5"/>
-          <p:cNvSpPr/>
-          <p:nvPr/>
-        </p:nvSpPr>
-        <p:spPr>
-          <a:xfrm>
-            <a:off x="548640" y="5806440"/>
-            <a:ext cx="11091672" cy="0"/>
-          </a:xfrm>
-          <a:prstGeom prst="line">
-            <a:avLst/>
-          </a:prstGeom>
-          <a:noFill/>
-          <a:ln w="12700">
-            <a:solidFill>
-              <a:srgbClr val="4A443A"/>
-            </a:solidFill>
-            <a:prstDash val="solid"/>
-          </a:ln>
-        </p:spPr>
-      </p:sp>
-      <p:sp>
-        <p:nvSpPr>
-          <p:cNvPr id="8" name="Text 6"/>
-          <p:cNvSpPr txBox="1"/>
-          <p:nvPr/>
-        </p:nvSpPr>
-        <p:spPr>
-          <a:xfrm>
-            <a:off x="548640" y="5943600"/>
+            <a:endParaRPr lang="en-US" sz="1700" dirty="0"/>
+          </a:p>
+        </p:txBody>
+      </p:sp>
+      <p:sp>
+        <p:nvSpPr>
+          <p:cNvPr id="5" name="Text 3"/>
+          <p:cNvSpPr txBox="1"/>
+          <p:nvPr/>
+        </p:nvSpPr>
+        <p:spPr>
+          <a:xfrm>
+            <a:off x="640080" y="6035040"/>
             <a:ext cx="5943600" cy="365760"/>
           </a:xfrm>
           <a:prstGeom prst="rect">
@@ -4757,9 +4192,9 @@
               <a:buNone/>
             </a:pPr>
             <a:r>
-              <a:rPr lang="en-US" sz="1200" dirty="0">
-                <a:solidFill>
-                  <a:srgbClr val="BFB6A4"/>
+              <a:rPr lang="en-US" sz="1100" dirty="0">
+                <a:solidFill>
+                  <a:srgbClr val="8A8274"/>
                 </a:solidFill>
                 <a:latin typeface="Courier New" pitchFamily="34" charset="0"/>
                 <a:ea typeface="Courier New" pitchFamily="34" charset="-122"/>
@@ -4767,19 +4202,19 @@
               </a:rPr>
               <a:t>contract 0xba3c36b0…4be8 — verified</a:t>
             </a:r>
-            <a:endParaRPr lang="en-US" sz="1200" dirty="0"/>
-          </a:p>
-        </p:txBody>
-      </p:sp>
-      <p:sp>
-        <p:nvSpPr>
-          <p:cNvPr id="9" name="Text 7"/>
-          <p:cNvSpPr txBox="1"/>
-          <p:nvPr/>
-        </p:nvSpPr>
-        <p:spPr>
-          <a:xfrm>
-            <a:off x="6583680" y="5943600"/>
+            <a:endParaRPr lang="en-US" sz="1100" dirty="0"/>
+          </a:p>
+        </p:txBody>
+      </p:sp>
+      <p:sp>
+        <p:nvSpPr>
+          <p:cNvPr id="6" name="Text 4"/>
+          <p:cNvSpPr txBox="1"/>
+          <p:nvPr/>
+        </p:nvSpPr>
+        <p:spPr>
+          <a:xfrm>
+            <a:off x="6492240" y="6035040"/>
             <a:ext cx="5029200" cy="365760"/>
           </a:xfrm>
           <a:prstGeom prst="rect">
@@ -4796,9 +4231,9 @@
               <a:buNone/>
             </a:pPr>
             <a:r>
-              <a:rPr lang="en-US" sz="1200" spc="200" kern="0" dirty="0">
-                <a:solidFill>
-                  <a:srgbClr val="BFB6A4"/>
+              <a:rPr lang="en-US" sz="1100" spc="200" kern="0" dirty="0">
+                <a:solidFill>
+                  <a:srgbClr val="8A8274"/>
                 </a:solidFill>
                 <a:latin typeface="Courier New" pitchFamily="34" charset="0"/>
                 <a:ea typeface="Courier New" pitchFamily="34" charset="-122"/>
@@ -4806,7 +4241,7 @@
               </a:rPr>
               <a:t>MONAD BLITZ · AMSTERDAM · 2026</a:t>
             </a:r>
-            <a:endParaRPr lang="en-US" sz="1200" dirty="0"/>
+            <a:endParaRPr lang="en-US" sz="1100" dirty="0"/>
           </a:p>
         </p:txBody>
       </p:sp>

--- a/MonadChat-pitch.pptx
+++ b/MonadChat-pitch.pptx
@@ -4,18 +4,17 @@
   <p:sldMasterIdLst>
     <p:sldMasterId id="2147483648" r:id="rId1"/>
   </p:sldMasterIdLst>
+  <p:notesMasterIdLst>
+    <p:notesMasterId r:id="rId8"/>
+  </p:notesMasterIdLst>
   <p:sldIdLst>
     <p:sldId id="256" r:id="rId2"/>
     <p:sldId id="257" r:id="rId3"/>
     <p:sldId id="258" r:id="rId4"/>
     <p:sldId id="259" r:id="rId5"/>
     <p:sldId id="260" r:id="rId6"/>
-    <p:sldId id="261" r:id="rId7"/>
-    <p:sldId id="262" r:id="rId8"/>
+    <p:sldId id="262" r:id="rId7"/>
   </p:sldIdLst>
-  <p:notesMasterIdLst>
-    <p:notesMasterId r:id="rId9"/>
-  </p:notesMasterIdLst>
   <p:sldSz cx="12192000" cy="6858000"/>
   <p:notesSz cx="6858000" cy="12192000"/>
   <p:defaultTextStyle>
@@ -110,6 +109,11 @@
       </a:defRPr>
     </a:lvl9pPr>
   </p:defaultTextStyle>
+  <p:extLst>
+    <p:ext uri="{EFAFB233-063F-42B5-8137-9DF3F51BA10A}">
+      <p15:sldGuideLst xmlns:p15="http://schemas.microsoft.com/office/powerpoint/2012/main"/>
+    </p:ext>
+  </p:extLst>
 </p:presentation>
 </file>
 
@@ -135,234 +139,10 @@
           <a:chExt cx="0" cy="0"/>
         </a:xfrm>
       </p:grpSpPr>
-      <p:sp>
-        <p:nvSpPr>
-          <p:cNvPr id="2" name="Header Placeholder 1"/>
-          <p:cNvSpPr>
-            <a:spLocks noGrp="1"/>
-          </p:cNvSpPr>
-          <p:nvPr>
-            <p:ph type="hdr" sz="quarter"/>
-          </p:nvPr>
-        </p:nvSpPr>
-        <p:spPr>
-          <a:xfrm>
-            <a:off x="0" y="0"/>
-            <a:ext cx="2971800" cy="458788"/>
-          </a:xfrm>
-          <a:prstGeom prst="rect">
-            <a:avLst/>
-          </a:prstGeom>
-        </p:spPr>
-        <p:txBody>
-          <a:bodyPr vert="horz" lIns="91440" tIns="45720" rIns="91440" bIns="45720" rtlCol="0"/>
-          <a:lstStyle>
-            <a:lvl1pPr algn="l">
-              <a:defRPr sz="1200"/>
-            </a:lvl1pPr>
-          </a:lstStyle>
-          <a:p>
-            <a:endParaRPr lang="en-US"/>
-          </a:p>
-        </p:txBody>
-      </p:sp>
-      <p:sp>
-        <p:nvSpPr>
-          <p:cNvPr id="3" name="Date Placeholder 2"/>
-          <p:cNvSpPr>
-            <a:spLocks noGrp="1"/>
-          </p:cNvSpPr>
-          <p:nvPr>
-            <p:ph type="dt" idx="1"/>
-          </p:nvPr>
-        </p:nvSpPr>
-        <p:spPr>
-          <a:xfrm>
-            <a:off x="3884613" y="0"/>
-            <a:ext cx="2971800" cy="458788"/>
-          </a:xfrm>
-          <a:prstGeom prst="rect">
-            <a:avLst/>
-          </a:prstGeom>
-        </p:spPr>
-        <p:txBody>
-          <a:bodyPr vert="horz" lIns="91440" tIns="45720" rIns="91440" bIns="45720" rtlCol="0"/>
-          <a:lstStyle>
-            <a:lvl1pPr algn="r">
-              <a:defRPr sz="1200"/>
-            </a:lvl1pPr>
-          </a:lstStyle>
-          <a:p>
-            <a:fld id="{5282F153-3F37-0F45-9E97-73ACFA13230C}" type="datetimeFigureOut">
-              <a:rPr lang="en-US"/>
-              <a:t>7/23/19</a:t>
-            </a:fld>
-            <a:endParaRPr lang="en-US"/>
-          </a:p>
-        </p:txBody>
-      </p:sp>
-      <p:sp>
-        <p:nvSpPr>
-          <p:cNvPr id="4" name="Slide Image Placeholder 3"/>
-          <p:cNvSpPr>
-            <a:spLocks noGrp="1" noRot="1" noChangeAspect="1"/>
-          </p:cNvSpPr>
-          <p:nvPr>
-            <p:ph type="sldImg" idx="2"/>
-          </p:nvPr>
-        </p:nvSpPr>
-        <p:spPr>
-          <a:xfrm>
-            <a:off x="685800" y="1143000"/>
-            <a:ext cx="5486400" cy="3086100"/>
-          </a:xfrm>
-          <a:prstGeom prst="rect">
-            <a:avLst/>
-          </a:prstGeom>
-          <a:noFill/>
-          <a:ln w="12700">
-            <a:solidFill>
-              <a:prstClr val="black"/>
-            </a:solidFill>
-          </a:ln>
-        </p:spPr>
-        <p:txBody>
-          <a:bodyPr vert="horz" lIns="91440" tIns="45720" rIns="91440" bIns="45720" rtlCol="0" anchor="ctr"/>
-          <a:lstStyle/>
-          <a:p>
-            <a:endParaRPr lang="en-US"/>
-          </a:p>
-        </p:txBody>
-      </p:sp>
-      <p:sp>
-        <p:nvSpPr>
-          <p:cNvPr id="5" name="Notes Placeholder 4"/>
-          <p:cNvSpPr>
-            <a:spLocks noGrp="1"/>
-          </p:cNvSpPr>
-          <p:nvPr>
-            <p:ph type="body" sz="quarter" idx="3"/>
-          </p:nvPr>
-        </p:nvSpPr>
-        <p:spPr>
-          <a:xfrm>
-            <a:off x="685800" y="4400550"/>
-            <a:ext cx="5486400" cy="3600450"/>
-          </a:xfrm>
-          <a:prstGeom prst="rect">
-            <a:avLst/>
-          </a:prstGeom>
-        </p:spPr>
-        <p:txBody>
-          <a:bodyPr vert="horz" lIns="91440" tIns="45720" rIns="91440" bIns="45720" rtlCol="0"/>
-          <a:lstStyle/>
-          <a:p>
-            <a:pPr lvl="0"/>
-            <a:r>
-              <a:rPr lang="en-US"/>
-              <a:t>Click to edit Master text styles</a:t>
-            </a:r>
-          </a:p>
-          <a:p>
-            <a:pPr lvl="1"/>
-            <a:r>
-              <a:rPr lang="en-US"/>
-              <a:t>Second level</a:t>
-            </a:r>
-          </a:p>
-          <a:p>
-            <a:pPr lvl="2"/>
-            <a:r>
-              <a:rPr lang="en-US"/>
-              <a:t>Third level</a:t>
-            </a:r>
-          </a:p>
-          <a:p>
-            <a:pPr lvl="3"/>
-            <a:r>
-              <a:rPr lang="en-US"/>
-              <a:t>Fourth level</a:t>
-            </a:r>
-          </a:p>
-          <a:p>
-            <a:pPr lvl="4"/>
-            <a:r>
-              <a:rPr lang="en-US"/>
-              <a:t>Fifth level</a:t>
-            </a:r>
-          </a:p>
-        </p:txBody>
-      </p:sp>
-      <p:sp>
-        <p:nvSpPr>
-          <p:cNvPr id="6" name="Footer Placeholder 5"/>
-          <p:cNvSpPr>
-            <a:spLocks noGrp="1"/>
-          </p:cNvSpPr>
-          <p:nvPr>
-            <p:ph type="ftr" sz="quarter" idx="4"/>
-          </p:nvPr>
-        </p:nvSpPr>
-        <p:spPr>
-          <a:xfrm>
-            <a:off x="0" y="8685213"/>
-            <a:ext cx="2971800" cy="458787"/>
-          </a:xfrm>
-          <a:prstGeom prst="rect">
-            <a:avLst/>
-          </a:prstGeom>
-        </p:spPr>
-        <p:txBody>
-          <a:bodyPr vert="horz" lIns="91440" tIns="45720" rIns="91440" bIns="45720" rtlCol="0" anchor="b"/>
-          <a:lstStyle>
-            <a:lvl1pPr algn="l">
-              <a:defRPr sz="1200"/>
-            </a:lvl1pPr>
-          </a:lstStyle>
-          <a:p>
-            <a:endParaRPr lang="en-US"/>
-          </a:p>
-        </p:txBody>
-      </p:sp>
-      <p:sp>
-        <p:nvSpPr>
-          <p:cNvPr id="7" name="Slide Number Placeholder 6"/>
-          <p:cNvSpPr>
-            <a:spLocks noGrp="1"/>
-          </p:cNvSpPr>
-          <p:nvPr>
-            <p:ph type="sldNum" sz="quarter" idx="5"/>
-          </p:nvPr>
-        </p:nvSpPr>
-        <p:spPr>
-          <a:xfrm>
-            <a:off x="3884613" y="8685213"/>
-            <a:ext cx="2971800" cy="458787"/>
-          </a:xfrm>
-          <a:prstGeom prst="rect">
-            <a:avLst/>
-          </a:prstGeom>
-        </p:spPr>
-        <p:txBody>
-          <a:bodyPr vert="horz" lIns="91440" tIns="45720" rIns="91440" bIns="45720" rtlCol="0" anchor="b"/>
-          <a:lstStyle>
-            <a:lvl1pPr algn="r">
-              <a:defRPr sz="1200"/>
-            </a:lvl1pPr>
-          </a:lstStyle>
-          <a:p>
-            <a:fld id="{CE5E9CC1-C706-0F49-92D6-E571CC5EEA8F}" type="slidenum">
-              <a:rPr lang="en-US"/>
-              <a:t>‹#›</a:t>
-            </a:fld>
-            <a:endParaRPr lang="en-US"/>
-          </a:p>
-        </p:txBody>
-      </p:sp>
     </p:spTree>
     <p:extLst>
       <p:ext uri="{BB962C8B-B14F-4D97-AF65-F5344CB8AC3E}">
-        <p14:creationId xmlns:p14="http://schemas.microsoft.com/office/powerpoint/2010/main" val="1024086991"/>
+        <p14:creationId xmlns:p14="http://schemas.microsoft.com/office/powerpoint/2010/main" val="3556392620"/>
       </p:ext>
     </p:extLst>
   </p:cSld>
@@ -510,7 +290,6 @@
               <a:rPr lang="en-US" dirty="0"/>
               <a:t>MonadChat is Superchat without the platform: viewers pay to speak in stream chat, streamers keep one hundred percent and get it the same second.</a:t>
             </a:r>
-            <a:endParaRPr lang="en-US" dirty="0"/>
           </a:p>
         </p:txBody>
       </p:sp>
@@ -598,7 +377,6 @@
               <a:rPr lang="en-US" dirty="0"/>
               <a:t>The demand already exists. Chat is the most engaged surface of a stream and it earns the streamer nothing. Fans already pay to be seen — Superchat is a billion-dollar behavior. But the platform takes thirty to fifty percent and pays out in weeks. The demand is proven, the rails are broken.</a:t>
             </a:r>
-            <a:endParaRPr lang="en-US" dirty="0"/>
           </a:p>
         </p:txBody>
       </p:sp>
@@ -686,7 +464,6 @@
               <a:rPr lang="en-US" dirty="0"/>
               <a:t>So why has nobody shipped this? Because on old chains it was impossible. Twelve seconds to confirm a message kills the conversation. Fifteen to thirty TPS for the whole planet — one busy stream’s chat outruns the entire chain. Dollars of gas eat the word many times over. And bots flood a paid room with no spam control. Every message as a payment was an obvious idea no one could ship.</a:t>
             </a:r>
-            <a:endParaRPr lang="en-US" dirty="0"/>
           </a:p>
         </p:txBody>
       </p:sp>
@@ -774,7 +551,6 @@
               <a:rPr lang="en-US" dirty="0"/>
               <a:t>And now it works — because of Monad. Four hundred millisecond blocks: a message lands before the reply is typed, we measured half a second today, live. Fees are near zero, so the streamer keeps the money. Throughput takes a whole platform of chat as normal load. And spam self-destructs: the network itself rate-limits every wallet, and spamming burns the spammer’s own gas.</a:t>
             </a:r>
-            <a:endParaRPr lang="en-US" dirty="0"/>
           </a:p>
         </p:txBody>
       </p:sp>
@@ -862,7 +638,6 @@
               <a:rPr lang="en-US" dirty="0"/>
               <a:t>How it works: a fan pays per word — no wallet setup, the browser creates one, you are typing in ten seconds. The streamer is paid the same second, one hundred percent. And it plugs into any stream — Twitch, YouTube, Kick — with an OBS overlay right on the video.</a:t>
             </a:r>
-            <a:endParaRPr lang="en-US" dirty="0"/>
           </a:p>
         </p:txBody>
       </p:sp>
@@ -948,9 +723,8 @@
           <a:p>
             <a:r>
               <a:rPr lang="en-US" dirty="0"/>
-              <a:t>And this is not a concept — it is live right now. Real rooms, real MON moving, the latency printed on every message. A sixty-seven line verified contract and zero servers — the chain is the backend. Try it from your phone while I talk.</a:t>
-            </a:r>
-            <a:endParaRPr lang="en-US" dirty="0"/>
+              <a:t>Chat is a revenue stream now. Open the demo, write a word, and watch it land in half a second. Thank you.</a:t>
+            </a:r>
           </a:p>
         </p:txBody>
       </p:sp>
@@ -972,94 +746,6 @@
             <a:fld id="{F7021451-1387-4CA6-816F-3879F97B5CBC}" type="slidenum">
               <a:rPr lang="en-US"/>
               <a:t>6</a:t>
-            </a:fld>
-            <a:endParaRPr lang="en-US"/>
-          </a:p>
-        </p:txBody>
-      </p:sp>
-    </p:spTree>
-    <p:extLst>
-      <p:ext uri="{BB962C8B-B14F-4D97-AF65-F5344CB8AC3E}">
-        <p14:creationId xmlns:p14="http://schemas.microsoft.com/office/powerpoint/2010/main" val="1024086991"/>
-      </p:ext>
-    </p:extLst>
-  </p:cSld>
-  <p:clrMapOvr>
-    <a:masterClrMapping/>
-  </p:clrMapOvr>
-</p:notes>
-</file>
-
-<file path=ppt/notesSlides/notesSlide7.xml><?xml version="1.0" encoding="utf-8"?>
-<p:notes xmlns:a="http://schemas.openxmlformats.org/drawingml/2006/main" xmlns:r="http://schemas.openxmlformats.org/officeDocument/2006/relationships" xmlns:p="http://schemas.openxmlformats.org/presentationml/2006/main">
-  <p:cSld>
-    <p:spTree>
-      <p:nvGrpSpPr>
-        <p:cNvPr id="1" name=""/>
-        <p:cNvGrpSpPr/>
-        <p:nvPr/>
-      </p:nvGrpSpPr>
-      <p:grpSpPr>
-        <a:xfrm>
-          <a:off x="0" y="0"/>
-          <a:ext cx="0" cy="0"/>
-          <a:chOff x="0" y="0"/>
-          <a:chExt cx="0" cy="0"/>
-        </a:xfrm>
-      </p:grpSpPr>
-      <p:sp>
-        <p:nvSpPr>
-          <p:cNvPr id="2" name="Slide Image Placeholder 1"/>
-          <p:cNvSpPr>
-            <a:spLocks noGrp="1" noRot="1" noChangeAspect="1"/>
-          </p:cNvSpPr>
-          <p:nvPr>
-            <p:ph type="sldImg"/>
-          </p:nvPr>
-        </p:nvSpPr>
-        <p:spPr/>
-      </p:sp>
-      <p:sp>
-        <p:nvSpPr>
-          <p:cNvPr id="3" name="Notes Placeholder 2"/>
-          <p:cNvSpPr>
-            <a:spLocks noGrp="1"/>
-          </p:cNvSpPr>
-          <p:nvPr>
-            <p:ph type="body" idx="1"/>
-          </p:nvPr>
-        </p:nvSpPr>
-        <p:spPr/>
-        <p:txBody>
-          <a:bodyPr/>
-          <a:lstStyle/>
-          <a:p>
-            <a:r>
-              <a:rPr lang="en-US" dirty="0"/>
-              <a:t>Chat is a revenue stream now. Open the demo, write a word, and watch it land in half a second. Thank you.</a:t>
-            </a:r>
-            <a:endParaRPr lang="en-US" dirty="0"/>
-          </a:p>
-        </p:txBody>
-      </p:sp>
-      <p:sp>
-        <p:nvSpPr>
-          <p:cNvPr id="4" name="Slide Number Placeholder 3"/>
-          <p:cNvSpPr>
-            <a:spLocks noGrp="1"/>
-          </p:cNvSpPr>
-          <p:nvPr>
-            <p:ph type="sldNum" sz="quarter" idx="10"/>
-          </p:nvPr>
-        </p:nvSpPr>
-        <p:spPr/>
-        <p:txBody>
-          <a:bodyPr/>
-          <a:lstStyle/>
-          <a:p>
-            <a:fld id="{F7021451-1387-4CA6-816F-3879F97B5CBC}" type="slidenum">
-              <a:rPr lang="en-US"/>
-              <a:t>7</a:t>
             </a:fld>
             <a:endParaRPr lang="en-US"/>
           </a:p>
@@ -1111,6 +797,11 @@
 <file path=ppt/slideMasters/slideMaster1.xml><?xml version="1.0" encoding="utf-8"?>
 <p:sldMaster xmlns:a="http://schemas.openxmlformats.org/drawingml/2006/main" xmlns:r="http://schemas.openxmlformats.org/officeDocument/2006/relationships" xmlns:p="http://schemas.openxmlformats.org/presentationml/2006/main">
   <p:cSld>
+    <p:bg>
+      <p:bgRef idx="1001">
+        <a:schemeClr val="bg1"/>
+      </p:bgRef>
+    </p:bg>
     <p:spTree>
       <p:nvGrpSpPr>
         <p:cNvPr id="1" name=""/>
@@ -1393,6 +1084,7 @@
         <a:solidFill>
           <a:srgbClr val="F4EFE6"/>
         </a:solidFill>
+        <a:effectLst/>
       </p:bgPr>
     </p:bg>
     <p:spTree>
@@ -1430,7 +1122,7 @@
           <a:bodyPr wrap="square" lIns="0" tIns="0" rIns="0" bIns="0" rtlCol="0" anchor="ctr"/>
           <a:lstStyle/>
           <a:p>
-            <a:pPr indent="0" marL="0">
+            <a:pPr marL="0" indent="0">
               <a:buNone/>
             </a:pPr>
             <a:r>
@@ -1469,7 +1161,7 @@
           <a:bodyPr wrap="square" lIns="0" tIns="0" rIns="0" bIns="0" rtlCol="0" anchor="ctr"/>
           <a:lstStyle/>
           <a:p>
-            <a:pPr indent="0" marL="0">
+            <a:pPr marL="0" indent="0">
               <a:lnSpc>
                 <a:spcPts val="8000"/>
               </a:lnSpc>
@@ -1485,40 +1177,17 @@
                 <a:cs typeface="Alsina" pitchFamily="34" charset="-120"/>
               </a:rPr>
               <a:t>Chat where
-</a:t>
-            </a:r>
-            <a:pPr indent="0" marL="0">
-              <a:lnSpc>
-                <a:spcPts val="8000"/>
-              </a:lnSpc>
-              <a:buNone/>
-            </a:pPr>
+words cost </a:t>
+            </a:r>
             <a:r>
               <a:rPr lang="en-US" sz="8400" dirty="0">
                 <a:solidFill>
-                  <a:srgbClr val="1A1712"/>
+                  <a:srgbClr val="BF3A1E"/>
                 </a:solidFill>
                 <a:latin typeface="Alsina" pitchFamily="34" charset="0"/>
                 <a:ea typeface="Alsina" pitchFamily="34" charset="-122"/>
                 <a:cs typeface="Alsina" pitchFamily="34" charset="-120"/>
               </a:rPr>
-              <a:t>words cost </a:t>
-            </a:r>
-            <a:pPr indent="0" marL="0">
-              <a:lnSpc>
-                <a:spcPts val="8000"/>
-              </a:lnSpc>
-              <a:buNone/>
-            </a:pPr>
-            <a:r>
-              <a:rPr lang="en-US" sz="8400" dirty="0">
-                <a:solidFill>
-                  <a:srgbClr val="BF3A1E"/>
-                </a:solidFill>
-                <a:latin typeface="Alsina" pitchFamily="34" charset="0"/>
-                <a:ea typeface="Alsina" pitchFamily="34" charset="-122"/>
-                <a:cs typeface="Alsina" pitchFamily="34" charset="-120"/>
-              </a:rPr>
               <a:t>money</a:t>
             </a:r>
             <a:endParaRPr lang="en-US" sz="8400" dirty="0"/>
@@ -1546,7 +1215,7 @@
           <a:bodyPr wrap="square" lIns="0" tIns="0" rIns="0" bIns="0" rtlCol="0" anchor="ctr"/>
           <a:lstStyle/>
           <a:p>
-            <a:pPr indent="0" marL="0">
+            <a:pPr marL="0" indent="0">
               <a:buNone/>
             </a:pPr>
             <a:r>
@@ -1560,9 +1229,6 @@
               </a:rPr>
               <a:t>Superchat — without the platform. </a:t>
             </a:r>
-            <a:pPr indent="0" marL="0">
-              <a:buNone/>
-            </a:pPr>
             <a:r>
               <a:rPr lang="en-US" sz="2100" dirty="0">
                 <a:solidFill>
@@ -1599,11 +1265,11 @@
           <a:bodyPr wrap="square" lIns="0" tIns="0" rIns="0" bIns="0" rtlCol="0" anchor="ctr"/>
           <a:lstStyle/>
           <a:p>
-            <a:pPr indent="0" marL="0">
-              <a:buNone/>
-            </a:pPr>
-            <a:r>
-              <a:rPr lang="en-US" sz="1200" spc="300" kern="0" dirty="0">
+            <a:pPr marL="0" indent="0">
+              <a:buNone/>
+            </a:pPr>
+            <a:r>
+              <a:rPr lang="en-US" sz="1200" kern="0" spc="300" dirty="0">
                 <a:solidFill>
                   <a:srgbClr val="8A8274"/>
                 </a:solidFill>
@@ -1638,7 +1304,7 @@
           <a:bodyPr wrap="square" lIns="0" tIns="0" rIns="0" bIns="0" rtlCol="0" anchor="ctr"/>
           <a:lstStyle/>
           <a:p>
-            <a:pPr algn="r" indent="0" marL="0">
+            <a:pPr marL="0" indent="0" algn="r">
               <a:buNone/>
             </a:pPr>
             <a:r>
@@ -1672,6 +1338,7 @@
         <a:solidFill>
           <a:srgbClr val="F4EFE6"/>
         </a:solidFill>
+        <a:effectLst/>
       </p:bgPr>
     </p:bg>
     <p:spTree>
@@ -1709,11 +1376,11 @@
           <a:bodyPr wrap="square" lIns="0" tIns="0" rIns="0" bIns="0" rtlCol="0" anchor="ctr"/>
           <a:lstStyle/>
           <a:p>
-            <a:pPr indent="0" marL="0">
-              <a:buNone/>
-            </a:pPr>
-            <a:r>
-              <a:rPr lang="en-US" sz="1200" b="1" spc="300" kern="0" dirty="0">
+            <a:pPr marL="0" indent="0">
+              <a:buNone/>
+            </a:pPr>
+            <a:r>
+              <a:rPr lang="en-US" sz="1200" b="1" kern="0" spc="300" dirty="0">
                 <a:solidFill>
                   <a:srgbClr val="8A8274"/>
                 </a:solidFill>
@@ -1748,7 +1415,7 @@
           <a:bodyPr wrap="square" lIns="0" tIns="0" rIns="0" bIns="0" rtlCol="0" anchor="ctr"/>
           <a:lstStyle/>
           <a:p>
-            <a:pPr algn="r" indent="0" marL="0">
+            <a:pPr marL="0" indent="0" algn="r">
               <a:buNone/>
             </a:pPr>
             <a:r>
@@ -1787,7 +1454,7 @@
           <a:bodyPr wrap="square" lIns="0" tIns="0" rIns="0" bIns="0" rtlCol="0" anchor="ctr"/>
           <a:lstStyle/>
           <a:p>
-            <a:pPr indent="0" marL="0">
+            <a:pPr marL="0" indent="0">
               <a:lnSpc>
                 <a:spcPts val="3500"/>
               </a:lnSpc>
@@ -1807,7 +1474,7 @@
             <a:endParaRPr lang="en-US" sz="2700" dirty="0"/>
           </a:p>
           <a:p>
-            <a:pPr indent="0" marL="0">
+            <a:pPr marL="0" indent="0">
               <a:lnSpc>
                 <a:spcPts val="3500"/>
               </a:lnSpc>
@@ -1849,7 +1516,7 @@
           <a:bodyPr wrap="square" lIns="0" tIns="0" rIns="0" bIns="0" rtlCol="0" anchor="ctr"/>
           <a:lstStyle/>
           <a:p>
-            <a:pPr indent="0" marL="0">
+            <a:pPr marL="0" indent="0">
               <a:lnSpc>
                 <a:spcPts val="2600"/>
               </a:lnSpc>
@@ -1864,12 +1531,12 @@
                 <a:ea typeface="Georgia" pitchFamily="34" charset="-122"/>
                 <a:cs typeface="Georgia" pitchFamily="34" charset="-120"/>
               </a:rPr>
-              <a:t>Fans already pay to be seen — Superchat is a billion-dollar behavior.</a:t>
+              <a:t>Fans already pay to be seen — Super chat on YouTube, bits on Twitch.</a:t>
             </a:r>
             <a:endParaRPr lang="en-US" sz="1800" dirty="0"/>
           </a:p>
           <a:p>
-            <a:pPr indent="0" marL="0">
+            <a:pPr marL="0" indent="0">
               <a:lnSpc>
                 <a:spcPts val="2600"/>
               </a:lnSpc>
@@ -1911,7 +1578,7 @@
           <a:bodyPr wrap="square" lIns="0" tIns="0" rIns="0" bIns="0" rtlCol="0" anchor="ctr"/>
           <a:lstStyle/>
           <a:p>
-            <a:pPr indent="0" marL="0">
+            <a:pPr marL="0" indent="0">
               <a:buNone/>
             </a:pPr>
             <a:r>
@@ -1950,7 +1617,7 @@
           <a:bodyPr wrap="square" lIns="0" tIns="0" rIns="0" bIns="0" rtlCol="0" anchor="ctr"/>
           <a:lstStyle/>
           <a:p>
-            <a:pPr indent="0" marL="0">
+            <a:pPr marL="0" indent="0">
               <a:lnSpc>
                 <a:spcPts val="2600"/>
               </a:lnSpc>
@@ -1965,27 +1632,7 @@
                 <a:ea typeface="Georgia" pitchFamily="34" charset="-122"/>
                 <a:cs typeface="Georgia" pitchFamily="34" charset="-120"/>
               </a:rPr>
-              <a:t>platform take</a:t>
-            </a:r>
-            <a:endParaRPr lang="en-US" sz="1900" dirty="0"/>
-          </a:p>
-          <a:p>
-            <a:pPr indent="0" marL="0">
-              <a:lnSpc>
-                <a:spcPts val="2600"/>
-              </a:lnSpc>
-              <a:buNone/>
-            </a:pPr>
-            <a:r>
-              <a:rPr lang="en-US" sz="1900" dirty="0">
-                <a:solidFill>
-                  <a:srgbClr val="1A1712"/>
-                </a:solidFill>
-                <a:latin typeface="Georgia" pitchFamily="34" charset="0"/>
-                <a:ea typeface="Georgia" pitchFamily="34" charset="-122"/>
-                <a:cs typeface="Georgia" pitchFamily="34" charset="-120"/>
-              </a:rPr>
-              <a:t>weeks to payout · their rules</a:t>
+              <a:t>platform take weeks to payout · their rules</a:t>
             </a:r>
             <a:endParaRPr lang="en-US" sz="1900" dirty="0"/>
           </a:p>
@@ -2012,7 +1659,7 @@
           <a:bodyPr wrap="square" lIns="0" tIns="0" rIns="0" bIns="0" rtlCol="0" anchor="ctr"/>
           <a:lstStyle/>
           <a:p>
-            <a:pPr indent="0" marL="0">
+            <a:pPr marL="0" indent="0">
               <a:buNone/>
             </a:pPr>
             <a:r>
@@ -2046,6 +1693,7 @@
         <a:solidFill>
           <a:srgbClr val="F4EFE6"/>
         </a:solidFill>
+        <a:effectLst/>
       </p:bgPr>
     </p:bg>
     <p:spTree>
@@ -2083,11 +1731,11 @@
           <a:bodyPr wrap="square" lIns="0" tIns="0" rIns="0" bIns="0" rtlCol="0" anchor="ctr"/>
           <a:lstStyle/>
           <a:p>
-            <a:pPr indent="0" marL="0">
-              <a:buNone/>
-            </a:pPr>
-            <a:r>
-              <a:rPr lang="en-US" sz="1200" b="1" spc="300" kern="0" dirty="0">
+            <a:pPr marL="0" indent="0">
+              <a:buNone/>
+            </a:pPr>
+            <a:r>
+              <a:rPr lang="en-US" sz="1200" b="1" kern="0" spc="300" dirty="0">
                 <a:solidFill>
                   <a:srgbClr val="8A8274"/>
                 </a:solidFill>
@@ -2122,7 +1770,7 @@
           <a:bodyPr wrap="square" lIns="0" tIns="0" rIns="0" bIns="0" rtlCol="0" anchor="ctr"/>
           <a:lstStyle/>
           <a:p>
-            <a:pPr algn="r" indent="0" marL="0">
+            <a:pPr marL="0" indent="0" algn="r">
               <a:buNone/>
             </a:pPr>
             <a:r>
@@ -2148,7 +1796,7 @@
         </p:nvSpPr>
         <p:spPr>
           <a:xfrm>
-            <a:off x="640080" y="1280160"/>
+            <a:off x="640080" y="1888236"/>
             <a:ext cx="4480560" cy="731520"/>
           </a:xfrm>
           <a:prstGeom prst="rect">
@@ -2161,7 +1809,7 @@
           <a:bodyPr wrap="square" lIns="0" tIns="0" rIns="0" bIns="0" rtlCol="0" anchor="ctr"/>
           <a:lstStyle/>
           <a:p>
-            <a:pPr indent="0" marL="0">
+            <a:pPr marL="0" indent="0">
               <a:buNone/>
             </a:pPr>
             <a:r>
@@ -2187,7 +1835,7 @@
         </p:nvSpPr>
         <p:spPr>
           <a:xfrm>
-            <a:off x="5394960" y="1389888"/>
+            <a:off x="5394960" y="1997964"/>
             <a:ext cx="6217920" cy="731520"/>
           </a:xfrm>
           <a:prstGeom prst="rect">
@@ -2200,7 +1848,7 @@
           <a:bodyPr wrap="square" lIns="0" tIns="0" rIns="0" bIns="0" rtlCol="0" anchor="ctr"/>
           <a:lstStyle/>
           <a:p>
-            <a:pPr indent="0" marL="0">
+            <a:pPr marL="0" indent="0">
               <a:lnSpc>
                 <a:spcPts val="2300"/>
               </a:lnSpc>
@@ -2229,7 +1877,7 @@
         </p:nvSpPr>
         <p:spPr>
           <a:xfrm>
-            <a:off x="640080" y="2331720"/>
+            <a:off x="640080" y="2939796"/>
             <a:ext cx="4480560" cy="731520"/>
           </a:xfrm>
           <a:prstGeom prst="rect">
@@ -2242,7 +1890,7 @@
           <a:bodyPr wrap="square" lIns="0" tIns="0" rIns="0" bIns="0" rtlCol="0" anchor="ctr"/>
           <a:lstStyle/>
           <a:p>
-            <a:pPr indent="0" marL="0">
+            <a:pPr marL="0" indent="0">
               <a:buNone/>
             </a:pPr>
             <a:r>
@@ -2268,7 +1916,7 @@
         </p:nvSpPr>
         <p:spPr>
           <a:xfrm>
-            <a:off x="5394960" y="2441448"/>
+            <a:off x="5394960" y="3049524"/>
             <a:ext cx="6217920" cy="731520"/>
           </a:xfrm>
           <a:prstGeom prst="rect">
@@ -2281,7 +1929,7 @@
           <a:bodyPr wrap="square" lIns="0" tIns="0" rIns="0" bIns="0" rtlCol="0" anchor="ctr"/>
           <a:lstStyle/>
           <a:p>
-            <a:pPr indent="0" marL="0">
+            <a:pPr marL="0" indent="0">
               <a:lnSpc>
                 <a:spcPts val="2300"/>
               </a:lnSpc>
@@ -2310,7 +1958,7 @@
         </p:nvSpPr>
         <p:spPr>
           <a:xfrm>
-            <a:off x="640080" y="3383280"/>
+            <a:off x="640080" y="3991356"/>
             <a:ext cx="4480560" cy="731520"/>
           </a:xfrm>
           <a:prstGeom prst="rect">
@@ -2323,7 +1971,7 @@
           <a:bodyPr wrap="square" lIns="0" tIns="0" rIns="0" bIns="0" rtlCol="0" anchor="ctr"/>
           <a:lstStyle/>
           <a:p>
-            <a:pPr indent="0" marL="0">
+            <a:pPr marL="0" indent="0">
               <a:buNone/>
             </a:pPr>
             <a:r>
@@ -2349,7 +1997,7 @@
         </p:nvSpPr>
         <p:spPr>
           <a:xfrm>
-            <a:off x="5394960" y="3493008"/>
+            <a:off x="5394960" y="4101084"/>
             <a:ext cx="6217920" cy="731520"/>
           </a:xfrm>
           <a:prstGeom prst="rect">
@@ -2362,7 +2010,7 @@
           <a:bodyPr wrap="square" lIns="0" tIns="0" rIns="0" bIns="0" rtlCol="0" anchor="ctr"/>
           <a:lstStyle/>
           <a:p>
-            <a:pPr indent="0" marL="0">
+            <a:pPr marL="0" indent="0">
               <a:lnSpc>
                 <a:spcPts val="2300"/>
               </a:lnSpc>
@@ -2385,87 +2033,6 @@
       </p:sp>
       <p:sp>
         <p:nvSpPr>
-          <p:cNvPr id="10" name="Text 8"/>
-          <p:cNvSpPr txBox="1"/>
-          <p:nvPr/>
-        </p:nvSpPr>
-        <p:spPr>
-          <a:xfrm>
-            <a:off x="640080" y="4434840"/>
-            <a:ext cx="4480560" cy="731520"/>
-          </a:xfrm>
-          <a:prstGeom prst="rect">
-            <a:avLst/>
-          </a:prstGeom>
-          <a:noFill/>
-          <a:ln/>
-        </p:spPr>
-        <p:txBody>
-          <a:bodyPr wrap="square" lIns="0" tIns="0" rIns="0" bIns="0" rtlCol="0" anchor="ctr"/>
-          <a:lstStyle/>
-          <a:p>
-            <a:pPr indent="0" marL="0">
-              <a:buNone/>
-            </a:pPr>
-            <a:r>
-              <a:rPr lang="en-US" sz="4000" dirty="0">
-                <a:solidFill>
-                  <a:srgbClr val="1A1712"/>
-                </a:solidFill>
-                <a:latin typeface="Alsina" pitchFamily="34" charset="0"/>
-                <a:ea typeface="Alsina" pitchFamily="34" charset="-122"/>
-                <a:cs typeface="Alsina" pitchFamily="34" charset="-120"/>
-              </a:rPr>
-              <a:t>zero spam control</a:t>
-            </a:r>
-            <a:endParaRPr lang="en-US" sz="4000" dirty="0"/>
-          </a:p>
-        </p:txBody>
-      </p:sp>
-      <p:sp>
-        <p:nvSpPr>
-          <p:cNvPr id="11" name="Text 9"/>
-          <p:cNvSpPr txBox="1"/>
-          <p:nvPr/>
-        </p:nvSpPr>
-        <p:spPr>
-          <a:xfrm>
-            <a:off x="5394960" y="4544568"/>
-            <a:ext cx="6217920" cy="731520"/>
-          </a:xfrm>
-          <a:prstGeom prst="rect">
-            <a:avLst/>
-          </a:prstGeom>
-          <a:noFill/>
-          <a:ln/>
-        </p:spPr>
-        <p:txBody>
-          <a:bodyPr wrap="square" lIns="0" tIns="0" rIns="0" bIns="0" rtlCol="0" anchor="ctr"/>
-          <a:lstStyle/>
-          <a:p>
-            <a:pPr indent="0" marL="0">
-              <a:lnSpc>
-                <a:spcPts val="2300"/>
-              </a:lnSpc>
-              <a:buNone/>
-            </a:pPr>
-            <a:r>
-              <a:rPr lang="en-US" sz="1700" dirty="0">
-                <a:solidFill>
-                  <a:srgbClr val="8A8274"/>
-                </a:solidFill>
-                <a:latin typeface="Georgia" pitchFamily="34" charset="0"/>
-                <a:ea typeface="Georgia" pitchFamily="34" charset="-122"/>
-                <a:cs typeface="Georgia" pitchFamily="34" charset="-120"/>
-              </a:rPr>
-              <a:t>bots flood a paid room faster than any server can ban them</a:t>
-            </a:r>
-            <a:endParaRPr lang="en-US" sz="1700" dirty="0"/>
-          </a:p>
-        </p:txBody>
-      </p:sp>
-      <p:sp>
-        <p:nvSpPr>
           <p:cNvPr id="12" name="Text 10"/>
           <p:cNvSpPr txBox="1"/>
           <p:nvPr/>
@@ -2485,7 +2052,7 @@
           <a:bodyPr wrap="square" lIns="0" tIns="0" rIns="0" bIns="0" rtlCol="0" anchor="ctr"/>
           <a:lstStyle/>
           <a:p>
-            <a:pPr indent="0" marL="0">
+            <a:pPr marL="0" indent="0">
               <a:buNone/>
             </a:pPr>
             <a:r>
@@ -2519,6 +2086,7 @@
         <a:solidFill>
           <a:srgbClr val="F4EFE6"/>
         </a:solidFill>
+        <a:effectLst/>
       </p:bgPr>
     </p:bg>
     <p:spTree>
@@ -2556,11 +2124,11 @@
           <a:bodyPr wrap="square" lIns="0" tIns="0" rIns="0" bIns="0" rtlCol="0" anchor="ctr"/>
           <a:lstStyle/>
           <a:p>
-            <a:pPr indent="0" marL="0">
-              <a:buNone/>
-            </a:pPr>
-            <a:r>
-              <a:rPr lang="en-US" sz="1200" b="1" spc="300" kern="0" dirty="0">
+            <a:pPr marL="0" indent="0">
+              <a:buNone/>
+            </a:pPr>
+            <a:r>
+              <a:rPr lang="en-US" sz="1200" b="1" kern="0" spc="300" dirty="0">
                 <a:solidFill>
                   <a:srgbClr val="8A8274"/>
                 </a:solidFill>
@@ -2595,7 +2163,7 @@
           <a:bodyPr wrap="square" lIns="0" tIns="0" rIns="0" bIns="0" rtlCol="0" anchor="ctr"/>
           <a:lstStyle/>
           <a:p>
-            <a:pPr algn="r" indent="0" marL="0">
+            <a:pPr marL="0" indent="0" algn="r">
               <a:buNone/>
             </a:pPr>
             <a:r>
@@ -2621,7 +2189,7 @@
         </p:nvSpPr>
         <p:spPr>
           <a:xfrm>
-            <a:off x="640080" y="1280160"/>
+            <a:off x="640080" y="1983545"/>
             <a:ext cx="4480560" cy="868680"/>
           </a:xfrm>
           <a:prstGeom prst="rect">
@@ -2634,7 +2202,7 @@
           <a:bodyPr wrap="square" lIns="0" tIns="0" rIns="0" bIns="0" rtlCol="0" anchor="ctr"/>
           <a:lstStyle/>
           <a:p>
-            <a:pPr indent="0" marL="0">
+            <a:pPr marL="0" indent="0">
               <a:buNone/>
             </a:pPr>
             <a:r>
@@ -2660,7 +2228,7 @@
         </p:nvSpPr>
         <p:spPr>
           <a:xfrm>
-            <a:off x="5394960" y="1444752"/>
+            <a:off x="5394960" y="2148137"/>
             <a:ext cx="6217920" cy="868680"/>
           </a:xfrm>
           <a:prstGeom prst="rect">
@@ -2673,7 +2241,7 @@
           <a:bodyPr wrap="square" lIns="0" tIns="0" rIns="0" bIns="0" rtlCol="0" anchor="ctr"/>
           <a:lstStyle/>
           <a:p>
-            <a:pPr indent="0" marL="0">
+            <a:pPr marL="0" indent="0">
               <a:lnSpc>
                 <a:spcPts val="2300"/>
               </a:lnSpc>
@@ -2702,7 +2270,7 @@
         </p:nvSpPr>
         <p:spPr>
           <a:xfrm>
-            <a:off x="640080" y="2450592"/>
+            <a:off x="640080" y="3153977"/>
             <a:ext cx="4480560" cy="868680"/>
           </a:xfrm>
           <a:prstGeom prst="rect">
@@ -2715,7 +2283,7 @@
           <a:bodyPr wrap="square" lIns="0" tIns="0" rIns="0" bIns="0" rtlCol="0" anchor="ctr"/>
           <a:lstStyle/>
           <a:p>
-            <a:pPr indent="0" marL="0">
+            <a:pPr marL="0" indent="0">
               <a:buNone/>
             </a:pPr>
             <a:r>
@@ -2741,7 +2309,7 @@
         </p:nvSpPr>
         <p:spPr>
           <a:xfrm>
-            <a:off x="5394960" y="2615184"/>
+            <a:off x="5394960" y="3318569"/>
             <a:ext cx="6217920" cy="868680"/>
           </a:xfrm>
           <a:prstGeom prst="rect">
@@ -2754,7 +2322,7 @@
           <a:bodyPr wrap="square" lIns="0" tIns="0" rIns="0" bIns="0" rtlCol="0" anchor="ctr"/>
           <a:lstStyle/>
           <a:p>
-            <a:pPr indent="0" marL="0">
+            <a:pPr marL="0" indent="0">
               <a:lnSpc>
                 <a:spcPts val="2300"/>
               </a:lnSpc>
@@ -2783,7 +2351,7 @@
         </p:nvSpPr>
         <p:spPr>
           <a:xfrm>
-            <a:off x="640080" y="3621024"/>
+            <a:off x="640080" y="4324409"/>
             <a:ext cx="4480560" cy="868680"/>
           </a:xfrm>
           <a:prstGeom prst="rect">
@@ -2796,7 +2364,7 @@
           <a:bodyPr wrap="square" lIns="0" tIns="0" rIns="0" bIns="0" rtlCol="0" anchor="ctr"/>
           <a:lstStyle/>
           <a:p>
-            <a:pPr indent="0" marL="0">
+            <a:pPr marL="0" indent="0">
               <a:buNone/>
             </a:pPr>
             <a:r>
@@ -2822,7 +2390,7 @@
         </p:nvSpPr>
         <p:spPr>
           <a:xfrm>
-            <a:off x="5394960" y="3785616"/>
+            <a:off x="5394960" y="4489001"/>
             <a:ext cx="6217920" cy="868680"/>
           </a:xfrm>
           <a:prstGeom prst="rect">
@@ -2835,7 +2403,7 @@
           <a:bodyPr wrap="square" lIns="0" tIns="0" rIns="0" bIns="0" rtlCol="0" anchor="ctr"/>
           <a:lstStyle/>
           <a:p>
-            <a:pPr indent="0" marL="0">
+            <a:pPr marL="0" indent="0">
               <a:lnSpc>
                 <a:spcPts val="2300"/>
               </a:lnSpc>
@@ -2851,87 +2419,6 @@
                 <a:cs typeface="Georgia" pitchFamily="34" charset="-120"/>
               </a:rPr>
               <a:t>an entire platform's chat is normal load, not an attack</a:t>
-            </a:r>
-            <a:endParaRPr lang="en-US" sz="1700" dirty="0"/>
-          </a:p>
-        </p:txBody>
-      </p:sp>
-      <p:sp>
-        <p:nvSpPr>
-          <p:cNvPr id="10" name="Text 8"/>
-          <p:cNvSpPr txBox="1"/>
-          <p:nvPr/>
-        </p:nvSpPr>
-        <p:spPr>
-          <a:xfrm>
-            <a:off x="640080" y="4791456"/>
-            <a:ext cx="4480560" cy="868680"/>
-          </a:xfrm>
-          <a:prstGeom prst="rect">
-            <a:avLst/>
-          </a:prstGeom>
-          <a:noFill/>
-          <a:ln/>
-        </p:spPr>
-        <p:txBody>
-          <a:bodyPr wrap="square" lIns="0" tIns="0" rIns="0" bIns="0" rtlCol="0" anchor="ctr"/>
-          <a:lstStyle/>
-          <a:p>
-            <a:pPr indent="0" marL="0">
-              <a:buNone/>
-            </a:pPr>
-            <a:r>
-              <a:rPr lang="en-US" sz="4400" dirty="0">
-                <a:solidFill>
-                  <a:srgbClr val="BF3A1E"/>
-                </a:solidFill>
-                <a:latin typeface="Alsina" pitchFamily="34" charset="0"/>
-                <a:ea typeface="Alsina" pitchFamily="34" charset="-122"/>
-                <a:cs typeface="Alsina" pitchFamily="34" charset="-120"/>
-              </a:rPr>
-              <a:t>spam self-destructs</a:t>
-            </a:r>
-            <a:endParaRPr lang="en-US" sz="4400" dirty="0"/>
-          </a:p>
-        </p:txBody>
-      </p:sp>
-      <p:sp>
-        <p:nvSpPr>
-          <p:cNvPr id="11" name="Text 9"/>
-          <p:cNvSpPr txBox="1"/>
-          <p:nvPr/>
-        </p:nvSpPr>
-        <p:spPr>
-          <a:xfrm>
-            <a:off x="5394960" y="4956048"/>
-            <a:ext cx="6217920" cy="868680"/>
-          </a:xfrm>
-          <a:prstGeom prst="rect">
-            <a:avLst/>
-          </a:prstGeom>
-          <a:noFill/>
-          <a:ln/>
-        </p:spPr>
-        <p:txBody>
-          <a:bodyPr wrap="square" lIns="0" tIns="0" rIns="0" bIns="0" rtlCol="0" anchor="ctr"/>
-          <a:lstStyle/>
-          <a:p>
-            <a:pPr indent="0" marL="0">
-              <a:lnSpc>
-                <a:spcPts val="2300"/>
-              </a:lnSpc>
-              <a:buNone/>
-            </a:pPr>
-            <a:r>
-              <a:rPr lang="en-US" sz="1700" dirty="0">
-                <a:solidFill>
-                  <a:srgbClr val="1A1712"/>
-                </a:solidFill>
-                <a:latin typeface="Georgia" pitchFamily="34" charset="0"/>
-                <a:ea typeface="Georgia" pitchFamily="34" charset="-122"/>
-                <a:cs typeface="Georgia" pitchFamily="34" charset="-120"/>
-              </a:rPr>
-              <a:t>the network rate-limits every wallet — spamming burns the spammer’s own gas</a:t>
             </a:r>
             <a:endParaRPr lang="en-US" sz="1700" dirty="0"/>
           </a:p>
@@ -2953,6 +2440,7 @@
         <a:solidFill>
           <a:srgbClr val="F4EFE6"/>
         </a:solidFill>
+        <a:effectLst/>
       </p:bgPr>
     </p:bg>
     <p:spTree>
@@ -2990,11 +2478,11 @@
           <a:bodyPr wrap="square" lIns="0" tIns="0" rIns="0" bIns="0" rtlCol="0" anchor="ctr"/>
           <a:lstStyle/>
           <a:p>
-            <a:pPr indent="0" marL="0">
-              <a:buNone/>
-            </a:pPr>
-            <a:r>
-              <a:rPr lang="en-US" sz="1200" b="1" spc="300" kern="0" dirty="0">
+            <a:pPr marL="0" indent="0">
+              <a:buNone/>
+            </a:pPr>
+            <a:r>
+              <a:rPr lang="en-US" sz="1200" b="1" kern="0" spc="300" dirty="0">
                 <a:solidFill>
                   <a:srgbClr val="8A8274"/>
                 </a:solidFill>
@@ -3029,7 +2517,7 @@
           <a:bodyPr wrap="square" lIns="0" tIns="0" rIns="0" bIns="0" rtlCol="0" anchor="ctr"/>
           <a:lstStyle/>
           <a:p>
-            <a:pPr algn="r" indent="0" marL="0">
+            <a:pPr marL="0" indent="0" algn="r">
               <a:buNone/>
             </a:pPr>
             <a:r>
@@ -3068,7 +2556,7 @@
           <a:bodyPr wrap="square" lIns="0" tIns="0" rIns="0" bIns="0" rtlCol="0" anchor="ctr"/>
           <a:lstStyle/>
           <a:p>
-            <a:pPr indent="0" marL="0">
+            <a:pPr marL="0" indent="0">
               <a:buNone/>
             </a:pPr>
             <a:r>
@@ -3107,7 +2595,7 @@
           <a:bodyPr wrap="square" lIns="0" tIns="0" rIns="0" bIns="0" rtlCol="0" anchor="ctr"/>
           <a:lstStyle/>
           <a:p>
-            <a:pPr indent="0" marL="0">
+            <a:pPr marL="0" indent="0">
               <a:buNone/>
             </a:pPr>
             <a:r>
@@ -3119,7 +2607,7 @@
                 <a:ea typeface="Georgia" pitchFamily="34" charset="-122"/>
                 <a:cs typeface="Georgia" pitchFamily="34" charset="-120"/>
               </a:rPr>
-              <a:t>A fan pays per word</a:t>
+              <a:t>A fan pays per message</a:t>
             </a:r>
             <a:endParaRPr lang="en-US" sz="2400" dirty="0"/>
           </a:p>
@@ -3146,7 +2634,7 @@
           <a:bodyPr wrap="square" lIns="0" tIns="0" rIns="0" bIns="0" rtlCol="0" anchor="ctr"/>
           <a:lstStyle/>
           <a:p>
-            <a:pPr indent="0" marL="0">
+            <a:pPr marL="0" indent="0">
               <a:buNone/>
             </a:pPr>
             <a:r>
@@ -3185,7 +2673,7 @@
           <a:bodyPr wrap="square" lIns="0" tIns="0" rIns="0" bIns="0" rtlCol="0" anchor="ctr"/>
           <a:lstStyle/>
           <a:p>
-            <a:pPr indent="0" marL="0">
+            <a:pPr marL="0" indent="0">
               <a:buNone/>
             </a:pPr>
             <a:r>
@@ -3224,7 +2712,7 @@
           <a:bodyPr wrap="square" lIns="0" tIns="0" rIns="0" bIns="0" rtlCol="0" anchor="ctr"/>
           <a:lstStyle/>
           <a:p>
-            <a:pPr indent="0" marL="0">
+            <a:pPr marL="0" indent="0">
               <a:buNone/>
             </a:pPr>
             <a:r>
@@ -3263,7 +2751,7 @@
           <a:bodyPr wrap="square" lIns="0" tIns="0" rIns="0" bIns="0" rtlCol="0" anchor="ctr"/>
           <a:lstStyle/>
           <a:p>
-            <a:pPr indent="0" marL="0">
+            <a:pPr marL="0" indent="0">
               <a:buNone/>
             </a:pPr>
             <a:r>
@@ -3302,7 +2790,7 @@
           <a:bodyPr wrap="square" lIns="0" tIns="0" rIns="0" bIns="0" rtlCol="0" anchor="ctr"/>
           <a:lstStyle/>
           <a:p>
-            <a:pPr indent="0" marL="0">
+            <a:pPr marL="0" indent="0">
               <a:buNone/>
             </a:pPr>
             <a:r>
@@ -3341,7 +2829,7 @@
           <a:bodyPr wrap="square" lIns="0" tIns="0" rIns="0" bIns="0" rtlCol="0" anchor="ctr"/>
           <a:lstStyle/>
           <a:p>
-            <a:pPr indent="0" marL="0">
+            <a:pPr marL="0" indent="0">
               <a:buNone/>
             </a:pPr>
             <a:r>
@@ -3380,7 +2868,7 @@
           <a:bodyPr wrap="square" lIns="0" tIns="0" rIns="0" bIns="0" rtlCol="0" anchor="ctr"/>
           <a:lstStyle/>
           <a:p>
-            <a:pPr indent="0" marL="0">
+            <a:pPr marL="0" indent="0">
               <a:buNone/>
             </a:pPr>
             <a:r>
@@ -3419,7 +2907,7 @@
           <a:bodyPr wrap="square" lIns="0" tIns="0" rIns="0" bIns="0" rtlCol="0" anchor="ctr"/>
           <a:lstStyle/>
           <a:p>
-            <a:pPr indent="0" marL="0">
+            <a:pPr marL="0" indent="0">
               <a:buNone/>
             </a:pPr>
             <a:r>
@@ -3447,12 +2935,13 @@
 
 <file path=ppt/slides/slide6.xml><?xml version="1.0" encoding="utf-8"?>
 <p:sld xmlns:a="http://schemas.openxmlformats.org/drawingml/2006/main" xmlns:r="http://schemas.openxmlformats.org/officeDocument/2006/relationships" xmlns:p="http://schemas.openxmlformats.org/presentationml/2006/main">
-  <p:cSld name="Slide 6">
+  <p:cSld name="Slide 7">
     <p:bg>
       <p:bgPr>
         <a:solidFill>
           <a:srgbClr val="F4EFE6"/>
         </a:solidFill>
+        <a:effectLst/>
       </p:bgPr>
     </p:bg>
     <p:spTree>
@@ -3477,63 +2966,141 @@
         </p:nvSpPr>
         <p:spPr>
           <a:xfrm>
-            <a:off x="640080" y="457200"/>
-            <a:ext cx="10058400" cy="365760"/>
-          </a:xfrm>
-          <a:prstGeom prst="rect">
-            <a:avLst/>
-          </a:prstGeom>
-          <a:noFill/>
-          <a:ln/>
-        </p:spPr>
-        <p:txBody>
-          <a:bodyPr wrap="square" lIns="0" tIns="0" rIns="0" bIns="0" rtlCol="0" anchor="ctr"/>
-          <a:lstStyle/>
-          <a:p>
-            <a:pPr indent="0" marL="0">
-              <a:buNone/>
-            </a:pPr>
-            <a:r>
-              <a:rPr lang="en-US" sz="1200" b="1" spc="300" kern="0" dirty="0">
-                <a:solidFill>
-                  <a:srgbClr val="8A8274"/>
+            <a:off x="640080" y="2103120"/>
+            <a:ext cx="10972800" cy="1188720"/>
+          </a:xfrm>
+          <a:prstGeom prst="rect">
+            <a:avLst/>
+          </a:prstGeom>
+          <a:noFill/>
+          <a:ln/>
+        </p:spPr>
+        <p:txBody>
+          <a:bodyPr wrap="square" lIns="0" tIns="0" rIns="0" bIns="0" rtlCol="0" anchor="ctr"/>
+          <a:lstStyle/>
+          <a:p>
+            <a:pPr marL="0" indent="0" algn="ctr">
+              <a:buNone/>
+            </a:pPr>
+            <a:r>
+              <a:rPr lang="en-US" sz="6400" dirty="0">
+                <a:solidFill>
+                  <a:srgbClr val="1A1712"/>
+                </a:solidFill>
+                <a:latin typeface="Alsina" pitchFamily="34" charset="0"/>
+                <a:ea typeface="Alsina" pitchFamily="34" charset="-122"/>
+                <a:cs typeface="Alsina" pitchFamily="34" charset="-120"/>
+              </a:rPr>
+              <a:t>Chat is a revenue stream now.</a:t>
+            </a:r>
+            <a:endParaRPr lang="en-US" sz="6400" dirty="0"/>
+          </a:p>
+        </p:txBody>
+      </p:sp>
+      <p:sp>
+        <p:nvSpPr>
+          <p:cNvPr id="3" name="Text 1"/>
+          <p:cNvSpPr txBox="1"/>
+          <p:nvPr/>
+        </p:nvSpPr>
+        <p:spPr>
+          <a:xfrm>
+            <a:off x="640080" y="3611880"/>
+            <a:ext cx="10972800" cy="640080"/>
+          </a:xfrm>
+          <a:prstGeom prst="rect">
+            <a:avLst/>
+          </a:prstGeom>
+          <a:noFill/>
+          <a:ln/>
+        </p:spPr>
+        <p:txBody>
+          <a:bodyPr wrap="square" lIns="0" tIns="0" rIns="0" bIns="0" rtlCol="0" anchor="ctr"/>
+          <a:lstStyle/>
+          <a:p>
+            <a:pPr marL="0" indent="0" algn="ctr">
+              <a:buNone/>
+            </a:pPr>
+            <a:r>
+              <a:rPr lang="en-US" sz="2800" b="1" dirty="0">
+                <a:solidFill>
+                  <a:srgbClr val="BF3A1E"/>
                 </a:solidFill>
                 <a:latin typeface="Courier New" pitchFamily="34" charset="0"/>
                 <a:ea typeface="Courier New" pitchFamily="34" charset="-122"/>
                 <a:cs typeface="Courier New" pitchFamily="34" charset="-120"/>
               </a:rPr>
-              <a:t>LIVE TODAY — NOT A CONCEPT</a:t>
-            </a:r>
-            <a:endParaRPr lang="en-US" sz="1200" dirty="0"/>
-          </a:p>
-        </p:txBody>
-      </p:sp>
-      <p:sp>
-        <p:nvSpPr>
-          <p:cNvPr id="3" name="Text 1"/>
-          <p:cNvSpPr txBox="1"/>
-          <p:nvPr/>
-        </p:nvSpPr>
-        <p:spPr>
-          <a:xfrm>
-            <a:off x="11045952" y="457200"/>
-            <a:ext cx="502920" cy="365760"/>
-          </a:xfrm>
-          <a:prstGeom prst="rect">
-            <a:avLst/>
-          </a:prstGeom>
-          <a:noFill/>
-          <a:ln/>
-        </p:spPr>
-        <p:txBody>
-          <a:bodyPr wrap="square" lIns="0" tIns="0" rIns="0" bIns="0" rtlCol="0" anchor="ctr"/>
-          <a:lstStyle/>
-          <a:p>
-            <a:pPr algn="r" indent="0" marL="0">
-              <a:buNone/>
-            </a:pPr>
-            <a:r>
-              <a:rPr lang="en-US" sz="1200" dirty="0">
+              <a:t>monadchat-rvfc1.vercel.app</a:t>
+            </a:r>
+            <a:endParaRPr lang="en-US" sz="2800" dirty="0"/>
+          </a:p>
+        </p:txBody>
+      </p:sp>
+      <p:sp>
+        <p:nvSpPr>
+          <p:cNvPr id="4" name="Text 2"/>
+          <p:cNvSpPr txBox="1"/>
+          <p:nvPr/>
+        </p:nvSpPr>
+        <p:spPr>
+          <a:xfrm>
+            <a:off x="640080" y="4389120"/>
+            <a:ext cx="10972800" cy="457200"/>
+          </a:xfrm>
+          <a:prstGeom prst="rect">
+            <a:avLst/>
+          </a:prstGeom>
+          <a:noFill/>
+          <a:ln/>
+        </p:spPr>
+        <p:txBody>
+          <a:bodyPr wrap="square" lIns="0" tIns="0" rIns="0" bIns="0" rtlCol="0" anchor="ctr"/>
+          <a:lstStyle/>
+          <a:p>
+            <a:pPr marL="0" indent="0" algn="ctr">
+              <a:buNone/>
+            </a:pPr>
+            <a:r>
+              <a:rPr lang="en-US" sz="1700" i="1" dirty="0">
+                <a:solidFill>
+                  <a:srgbClr val="8A8274"/>
+                </a:solidFill>
+                <a:latin typeface="Georgia" pitchFamily="34" charset="0"/>
+                <a:ea typeface="Georgia" pitchFamily="34" charset="-122"/>
+                <a:cs typeface="Georgia" pitchFamily="34" charset="-120"/>
+              </a:rPr>
+              <a:t>open the demo · write a word · watch it land in half a second</a:t>
+            </a:r>
+            <a:endParaRPr lang="en-US" sz="1700" dirty="0"/>
+          </a:p>
+        </p:txBody>
+      </p:sp>
+      <p:sp>
+        <p:nvSpPr>
+          <p:cNvPr id="5" name="Text 3"/>
+          <p:cNvSpPr txBox="1"/>
+          <p:nvPr/>
+        </p:nvSpPr>
+        <p:spPr>
+          <a:xfrm>
+            <a:off x="640080" y="6035040"/>
+            <a:ext cx="5943600" cy="365760"/>
+          </a:xfrm>
+          <a:prstGeom prst="rect">
+            <a:avLst/>
+          </a:prstGeom>
+          <a:noFill/>
+          <a:ln/>
+        </p:spPr>
+        <p:txBody>
+          <a:bodyPr wrap="square" lIns="0" tIns="0" rIns="0" bIns="0" rtlCol="0" anchor="ctr"/>
+          <a:lstStyle/>
+          <a:p>
+            <a:pPr marL="0" indent="0">
+              <a:buNone/>
+            </a:pPr>
+            <a:r>
+              <a:rPr lang="en-US" sz="1100" dirty="0">
                 <a:solidFill>
                   <a:srgbClr val="8A8274"/>
                 </a:solidFill>
@@ -3541,665 +3108,6 @@
                 <a:ea typeface="Courier New" pitchFamily="34" charset="-122"/>
                 <a:cs typeface="Courier New" pitchFamily="34" charset="-120"/>
               </a:rPr>
-              <a:t>06</a:t>
-            </a:r>
-            <a:endParaRPr lang="en-US" sz="1200" dirty="0"/>
-          </a:p>
-        </p:txBody>
-      </p:sp>
-      <p:sp>
-        <p:nvSpPr>
-          <p:cNvPr id="4" name="Text 2"/>
-          <p:cNvSpPr txBox="1"/>
-          <p:nvPr/>
-        </p:nvSpPr>
-        <p:spPr>
-          <a:xfrm>
-            <a:off x="640080" y="1554480"/>
-            <a:ext cx="5852160" cy="457200"/>
-          </a:xfrm>
-          <a:prstGeom prst="rect">
-            <a:avLst/>
-          </a:prstGeom>
-          <a:noFill/>
-          <a:ln/>
-        </p:spPr>
-        <p:txBody>
-          <a:bodyPr wrap="square" lIns="0" tIns="0" rIns="0" bIns="0" rtlCol="0" anchor="ctr"/>
-          <a:lstStyle/>
-          <a:p>
-            <a:pPr indent="0" marL="0">
-              <a:buNone/>
-            </a:pPr>
-            <a:r>
-              <a:rPr lang="en-US" sz="1800" b="1" dirty="0">
-                <a:solidFill>
-                  <a:srgbClr val="BF3A1E"/>
-                </a:solidFill>
-                <a:latin typeface="Georgia" pitchFamily="34" charset="0"/>
-                <a:ea typeface="Georgia" pitchFamily="34" charset="-122"/>
-                <a:cs typeface="Georgia" pitchFamily="34" charset="-120"/>
-              </a:rPr>
-              <a:t>mona</a:t>
-            </a:r>
-            <a:pPr indent="0" marL="0">
-              <a:buNone/>
-            </a:pPr>
-            <a:r>
-              <a:rPr lang="en-US" sz="1800" dirty="0">
-                <a:solidFill>
-                  <a:srgbClr val="1A1712"/>
-                </a:solidFill>
-                <a:latin typeface="Georgia" pitchFamily="34" charset="0"/>
-                <a:ea typeface="Georgia" pitchFamily="34" charset="-122"/>
-                <a:cs typeface="Georgia" pitchFamily="34" charset="-120"/>
-              </a:rPr>
-              <a:t>  ·  gm Amsterdam — this line cost money</a:t>
-            </a:r>
-            <a:endParaRPr lang="en-US" sz="1800" dirty="0"/>
-          </a:p>
-        </p:txBody>
-      </p:sp>
-      <p:sp>
-        <p:nvSpPr>
-          <p:cNvPr id="5" name="Text 3"/>
-          <p:cNvSpPr txBox="1"/>
-          <p:nvPr/>
-        </p:nvSpPr>
-        <p:spPr>
-          <a:xfrm>
-            <a:off x="640080" y="2011680"/>
-            <a:ext cx="5577840" cy="365760"/>
-          </a:xfrm>
-          <a:prstGeom prst="rect">
-            <a:avLst/>
-          </a:prstGeom>
-          <a:noFill/>
-          <a:ln/>
-        </p:spPr>
-        <p:txBody>
-          <a:bodyPr wrap="square" lIns="0" tIns="0" rIns="0" bIns="0" rtlCol="0" anchor="ctr"/>
-          <a:lstStyle/>
-          <a:p>
-            <a:pPr indent="0" marL="0">
-              <a:buNone/>
-            </a:pPr>
-            <a:r>
-              <a:rPr lang="en-US" sz="1200" b="1" dirty="0">
-                <a:solidFill>
-                  <a:srgbClr val="1C6B4A"/>
-                </a:solidFill>
-                <a:latin typeface="Courier New" pitchFamily="34" charset="0"/>
-                <a:ea typeface="Courier New" pitchFamily="34" charset="-122"/>
-                <a:cs typeface="Courier New" pitchFamily="34" charset="-120"/>
-              </a:rPr>
-              <a:t>0.05</a:t>
-            </a:r>
-            <a:endParaRPr lang="en-US" sz="1200" dirty="0"/>
-          </a:p>
-        </p:txBody>
-      </p:sp>
-      <p:sp>
-        <p:nvSpPr>
-          <p:cNvPr id="6" name="Text 4"/>
-          <p:cNvSpPr txBox="1"/>
-          <p:nvPr/>
-        </p:nvSpPr>
-        <p:spPr>
-          <a:xfrm>
-            <a:off x="640080" y="2606040"/>
-            <a:ext cx="5852160" cy="457200"/>
-          </a:xfrm>
-          <a:prstGeom prst="rect">
-            <a:avLst/>
-          </a:prstGeom>
-          <a:noFill/>
-          <a:ln/>
-        </p:spPr>
-        <p:txBody>
-          <a:bodyPr wrap="square" lIns="0" tIns="0" rIns="0" bIns="0" rtlCol="0" anchor="ctr"/>
-          <a:lstStyle/>
-          <a:p>
-            <a:pPr indent="0" marL="0">
-              <a:buNone/>
-            </a:pPr>
-            <a:r>
-              <a:rPr lang="en-US" sz="1800" b="1" dirty="0">
-                <a:solidFill>
-                  <a:srgbClr val="1C6B4A"/>
-                </a:solidFill>
-                <a:latin typeface="Georgia" pitchFamily="34" charset="0"/>
-                <a:ea typeface="Georgia" pitchFamily="34" charset="-122"/>
-                <a:cs typeface="Georgia" pitchFamily="34" charset="-120"/>
-              </a:rPr>
-              <a:t>nad_holder</a:t>
-            </a:r>
-            <a:pPr indent="0" marL="0">
-              <a:buNone/>
-            </a:pPr>
-            <a:r>
-              <a:rPr lang="en-US" sz="1800" dirty="0">
-                <a:solidFill>
-                  <a:srgbClr val="1A1712"/>
-                </a:solidFill>
-                <a:latin typeface="Georgia" pitchFamily="34" charset="0"/>
-                <a:ea typeface="Georgia" pitchFamily="34" charset="-122"/>
-                <a:cs typeface="Georgia" pitchFamily="34" charset="-120"/>
-              </a:rPr>
-              <a:t>  ·  every message here is a transaction</a:t>
-            </a:r>
-            <a:endParaRPr lang="en-US" sz="1800" dirty="0"/>
-          </a:p>
-        </p:txBody>
-      </p:sp>
-      <p:sp>
-        <p:nvSpPr>
-          <p:cNvPr id="7" name="Text 5"/>
-          <p:cNvSpPr txBox="1"/>
-          <p:nvPr/>
-        </p:nvSpPr>
-        <p:spPr>
-          <a:xfrm>
-            <a:off x="640080" y="3063240"/>
-            <a:ext cx="5577840" cy="365760"/>
-          </a:xfrm>
-          <a:prstGeom prst="rect">
-            <a:avLst/>
-          </a:prstGeom>
-          <a:noFill/>
-          <a:ln/>
-        </p:spPr>
-        <p:txBody>
-          <a:bodyPr wrap="square" lIns="0" tIns="0" rIns="0" bIns="0" rtlCol="0" anchor="ctr"/>
-          <a:lstStyle/>
-          <a:p>
-            <a:pPr indent="0" marL="0">
-              <a:buNone/>
-            </a:pPr>
-            <a:r>
-              <a:rPr lang="en-US" sz="1200" b="1" dirty="0">
-                <a:solidFill>
-                  <a:srgbClr val="1C6B4A"/>
-                </a:solidFill>
-                <a:latin typeface="Courier New" pitchFamily="34" charset="0"/>
-                <a:ea typeface="Courier New" pitchFamily="34" charset="-122"/>
-                <a:cs typeface="Courier New" pitchFamily="34" charset="-120"/>
-              </a:rPr>
-              <a:t>0.05</a:t>
-            </a:r>
-            <a:endParaRPr lang="en-US" sz="1200" dirty="0"/>
-          </a:p>
-        </p:txBody>
-      </p:sp>
-      <p:sp>
-        <p:nvSpPr>
-          <p:cNvPr id="8" name="Text 6"/>
-          <p:cNvSpPr txBox="1"/>
-          <p:nvPr/>
-        </p:nvSpPr>
-        <p:spPr>
-          <a:xfrm>
-            <a:off x="640080" y="3657600"/>
-            <a:ext cx="5852160" cy="457200"/>
-          </a:xfrm>
-          <a:prstGeom prst="rect">
-            <a:avLst/>
-          </a:prstGeom>
-          <a:noFill/>
-          <a:ln/>
-        </p:spPr>
-        <p:txBody>
-          <a:bodyPr wrap="square" lIns="0" tIns="0" rIns="0" bIns="0" rtlCol="0" anchor="ctr"/>
-          <a:lstStyle/>
-          <a:p>
-            <a:pPr indent="0" marL="0">
-              <a:buNone/>
-            </a:pPr>
-            <a:r>
-              <a:rPr lang="en-US" sz="1800" b="1" dirty="0">
-                <a:solidFill>
-                  <a:srgbClr val="1D5A8A"/>
-                </a:solidFill>
-                <a:latin typeface="Georgia" pitchFamily="34" charset="0"/>
-                <a:ea typeface="Georgia" pitchFamily="34" charset="-122"/>
-                <a:cs typeface="Georgia" pitchFamily="34" charset="-120"/>
-              </a:rPr>
-              <a:t>blitz_fan</a:t>
-            </a:r>
-            <a:pPr indent="0" marL="0">
-              <a:buNone/>
-            </a:pPr>
-            <a:r>
-              <a:rPr lang="en-US" sz="1800" dirty="0">
-                <a:solidFill>
-                  <a:srgbClr val="1A1712"/>
-                </a:solidFill>
-                <a:latin typeface="Georgia" pitchFamily="34" charset="0"/>
-                <a:ea typeface="Georgia" pitchFamily="34" charset="-122"/>
-                <a:cs typeface="Georgia" pitchFamily="34" charset="-120"/>
-              </a:rPr>
-              <a:t>  ·  watch the badge → half a second</a:t>
-            </a:r>
-            <a:endParaRPr lang="en-US" sz="1800" dirty="0"/>
-          </a:p>
-        </p:txBody>
-      </p:sp>
-      <p:sp>
-        <p:nvSpPr>
-          <p:cNvPr id="9" name="Text 7"/>
-          <p:cNvSpPr txBox="1"/>
-          <p:nvPr/>
-        </p:nvSpPr>
-        <p:spPr>
-          <a:xfrm>
-            <a:off x="640080" y="4114800"/>
-            <a:ext cx="5577840" cy="365760"/>
-          </a:xfrm>
-          <a:prstGeom prst="rect">
-            <a:avLst/>
-          </a:prstGeom>
-          <a:noFill/>
-          <a:ln/>
-        </p:spPr>
-        <p:txBody>
-          <a:bodyPr wrap="square" lIns="0" tIns="0" rIns="0" bIns="0" rtlCol="0" anchor="ctr"/>
-          <a:lstStyle/>
-          <a:p>
-            <a:pPr indent="0" marL="0">
-              <a:buNone/>
-            </a:pPr>
-            <a:r>
-              <a:rPr lang="en-US" sz="1200" b="1" dirty="0">
-                <a:solidFill>
-                  <a:srgbClr val="1C6B4A"/>
-                </a:solidFill>
-                <a:latin typeface="Courier New" pitchFamily="34" charset="0"/>
-                <a:ea typeface="Courier New" pitchFamily="34" charset="-122"/>
-                <a:cs typeface="Courier New" pitchFamily="34" charset="-120"/>
-              </a:rPr>
-              <a:t>0.05 · 0.55s</a:t>
-            </a:r>
-            <a:endParaRPr lang="en-US" sz="1200" dirty="0"/>
-          </a:p>
-        </p:txBody>
-      </p:sp>
-      <p:sp>
-        <p:nvSpPr>
-          <p:cNvPr id="10" name="Text 8"/>
-          <p:cNvSpPr txBox="1"/>
-          <p:nvPr/>
-        </p:nvSpPr>
-        <p:spPr>
-          <a:xfrm>
-            <a:off x="6949440" y="1554480"/>
-            <a:ext cx="4663440" cy="548640"/>
-          </a:xfrm>
-          <a:prstGeom prst="rect">
-            <a:avLst/>
-          </a:prstGeom>
-          <a:noFill/>
-          <a:ln/>
-        </p:spPr>
-        <p:txBody>
-          <a:bodyPr wrap="square" lIns="0" tIns="0" rIns="0" bIns="0" rtlCol="0" anchor="ctr"/>
-          <a:lstStyle/>
-          <a:p>
-            <a:pPr indent="0" marL="0">
-              <a:buNone/>
-            </a:pPr>
-            <a:r>
-              <a:rPr lang="en-US" sz="1800" dirty="0">
-                <a:solidFill>
-                  <a:srgbClr val="1A1712"/>
-                </a:solidFill>
-                <a:latin typeface="Georgia" pitchFamily="34" charset="0"/>
-                <a:ea typeface="Georgia" pitchFamily="34" charset="-122"/>
-                <a:cs typeface="Georgia" pitchFamily="34" charset="-120"/>
-              </a:rPr>
-              <a:t>— real rooms, real MON moving today</a:t>
-            </a:r>
-            <a:endParaRPr lang="en-US" sz="1800" dirty="0"/>
-          </a:p>
-        </p:txBody>
-      </p:sp>
-      <p:sp>
-        <p:nvSpPr>
-          <p:cNvPr id="11" name="Text 9"/>
-          <p:cNvSpPr txBox="1"/>
-          <p:nvPr/>
-        </p:nvSpPr>
-        <p:spPr>
-          <a:xfrm>
-            <a:off x="6949440" y="2331720"/>
-            <a:ext cx="4663440" cy="548640"/>
-          </a:xfrm>
-          <a:prstGeom prst="rect">
-            <a:avLst/>
-          </a:prstGeom>
-          <a:noFill/>
-          <a:ln/>
-        </p:spPr>
-        <p:txBody>
-          <a:bodyPr wrap="square" lIns="0" tIns="0" rIns="0" bIns="0" rtlCol="0" anchor="ctr"/>
-          <a:lstStyle/>
-          <a:p>
-            <a:pPr indent="0" marL="0">
-              <a:buNone/>
-            </a:pPr>
-            <a:r>
-              <a:rPr lang="en-US" sz="1800" dirty="0">
-                <a:solidFill>
-                  <a:srgbClr val="1A1712"/>
-                </a:solidFill>
-                <a:latin typeface="Georgia" pitchFamily="34" charset="0"/>
-                <a:ea typeface="Georgia" pitchFamily="34" charset="-122"/>
-                <a:cs typeface="Georgia" pitchFamily="34" charset="-120"/>
-              </a:rPr>
-              <a:t>— latency printed on every message</a:t>
-            </a:r>
-            <a:endParaRPr lang="en-US" sz="1800" dirty="0"/>
-          </a:p>
-        </p:txBody>
-      </p:sp>
-      <p:sp>
-        <p:nvSpPr>
-          <p:cNvPr id="12" name="Text 10"/>
-          <p:cNvSpPr txBox="1"/>
-          <p:nvPr/>
-        </p:nvSpPr>
-        <p:spPr>
-          <a:xfrm>
-            <a:off x="6949440" y="3108960"/>
-            <a:ext cx="4663440" cy="548640"/>
-          </a:xfrm>
-          <a:prstGeom prst="rect">
-            <a:avLst/>
-          </a:prstGeom>
-          <a:noFill/>
-          <a:ln/>
-        </p:spPr>
-        <p:txBody>
-          <a:bodyPr wrap="square" lIns="0" tIns="0" rIns="0" bIns="0" rtlCol="0" anchor="ctr"/>
-          <a:lstStyle/>
-          <a:p>
-            <a:pPr indent="0" marL="0">
-              <a:buNone/>
-            </a:pPr>
-            <a:r>
-              <a:rPr lang="en-US" sz="1800" dirty="0">
-                <a:solidFill>
-                  <a:srgbClr val="1A1712"/>
-                </a:solidFill>
-                <a:latin typeface="Georgia" pitchFamily="34" charset="0"/>
-                <a:ea typeface="Georgia" pitchFamily="34" charset="-122"/>
-                <a:cs typeface="Georgia" pitchFamily="34" charset="-120"/>
-              </a:rPr>
-              <a:t>— a 67-line contract — verified</a:t>
-            </a:r>
-            <a:endParaRPr lang="en-US" sz="1800" dirty="0"/>
-          </a:p>
-        </p:txBody>
-      </p:sp>
-      <p:sp>
-        <p:nvSpPr>
-          <p:cNvPr id="13" name="Text 11"/>
-          <p:cNvSpPr txBox="1"/>
-          <p:nvPr/>
-        </p:nvSpPr>
-        <p:spPr>
-          <a:xfrm>
-            <a:off x="6949440" y="3886200"/>
-            <a:ext cx="4663440" cy="548640"/>
-          </a:xfrm>
-          <a:prstGeom prst="rect">
-            <a:avLst/>
-          </a:prstGeom>
-          <a:noFill/>
-          <a:ln/>
-        </p:spPr>
-        <p:txBody>
-          <a:bodyPr wrap="square" lIns="0" tIns="0" rIns="0" bIns="0" rtlCol="0" anchor="ctr"/>
-          <a:lstStyle/>
-          <a:p>
-            <a:pPr indent="0" marL="0">
-              <a:buNone/>
-            </a:pPr>
-            <a:r>
-              <a:rPr lang="en-US" sz="1800" dirty="0">
-                <a:solidFill>
-                  <a:srgbClr val="1A1712"/>
-                </a:solidFill>
-                <a:latin typeface="Georgia" pitchFamily="34" charset="0"/>
-                <a:ea typeface="Georgia" pitchFamily="34" charset="-122"/>
-                <a:cs typeface="Georgia" pitchFamily="34" charset="-120"/>
-              </a:rPr>
-              <a:t>— zero servers: the chain is the backend</a:t>
-            </a:r>
-            <a:endParaRPr lang="en-US" sz="1800" dirty="0"/>
-          </a:p>
-        </p:txBody>
-      </p:sp>
-      <p:sp>
-        <p:nvSpPr>
-          <p:cNvPr id="14" name="Text 12"/>
-          <p:cNvSpPr txBox="1"/>
-          <p:nvPr/>
-        </p:nvSpPr>
-        <p:spPr>
-          <a:xfrm>
-            <a:off x="6949440" y="4846320"/>
-            <a:ext cx="4663440" cy="457200"/>
-          </a:xfrm>
-          <a:prstGeom prst="rect">
-            <a:avLst/>
-          </a:prstGeom>
-          <a:noFill/>
-          <a:ln/>
-        </p:spPr>
-        <p:txBody>
-          <a:bodyPr wrap="square" lIns="0" tIns="0" rIns="0" bIns="0" rtlCol="0" anchor="ctr"/>
-          <a:lstStyle/>
-          <a:p>
-            <a:pPr indent="0" marL="0">
-              <a:buNone/>
-            </a:pPr>
-            <a:r>
-              <a:rPr lang="en-US" sz="1300" b="1" dirty="0">
-                <a:solidFill>
-                  <a:srgbClr val="BF3A1E"/>
-                </a:solidFill>
-                <a:latin typeface="Courier New" pitchFamily="34" charset="0"/>
-                <a:ea typeface="Courier New" pitchFamily="34" charset="-122"/>
-                <a:cs typeface="Courier New" pitchFamily="34" charset="-120"/>
-              </a:rPr>
-              <a:t>try it from your phone right now</a:t>
-            </a:r>
-            <a:endParaRPr lang="en-US" sz="1300" dirty="0"/>
-          </a:p>
-        </p:txBody>
-      </p:sp>
-    </p:spTree>
-  </p:cSld>
-  <p:clrMapOvr>
-    <a:masterClrMapping/>
-  </p:clrMapOvr>
-</p:sld>
-</file>
-
-<file path=ppt/slides/slide7.xml><?xml version="1.0" encoding="utf-8"?>
-<p:sld xmlns:a="http://schemas.openxmlformats.org/drawingml/2006/main" xmlns:r="http://schemas.openxmlformats.org/officeDocument/2006/relationships" xmlns:p="http://schemas.openxmlformats.org/presentationml/2006/main">
-  <p:cSld name="Slide 7">
-    <p:bg>
-      <p:bgPr>
-        <a:solidFill>
-          <a:srgbClr val="F4EFE6"/>
-        </a:solidFill>
-      </p:bgPr>
-    </p:bg>
-    <p:spTree>
-      <p:nvGrpSpPr>
-        <p:cNvPr id="1" name=""/>
-        <p:cNvGrpSpPr/>
-        <p:nvPr/>
-      </p:nvGrpSpPr>
-      <p:grpSpPr>
-        <a:xfrm>
-          <a:off x="0" y="0"/>
-          <a:ext cx="0" cy="0"/>
-          <a:chOff x="0" y="0"/>
-          <a:chExt cx="0" cy="0"/>
-        </a:xfrm>
-      </p:grpSpPr>
-      <p:sp>
-        <p:nvSpPr>
-          <p:cNvPr id="2" name="Text 0"/>
-          <p:cNvSpPr txBox="1"/>
-          <p:nvPr/>
-        </p:nvSpPr>
-        <p:spPr>
-          <a:xfrm>
-            <a:off x="640080" y="2103120"/>
-            <a:ext cx="10972800" cy="1188720"/>
-          </a:xfrm>
-          <a:prstGeom prst="rect">
-            <a:avLst/>
-          </a:prstGeom>
-          <a:noFill/>
-          <a:ln/>
-        </p:spPr>
-        <p:txBody>
-          <a:bodyPr wrap="square" lIns="0" tIns="0" rIns="0" bIns="0" rtlCol="0" anchor="ctr"/>
-          <a:lstStyle/>
-          <a:p>
-            <a:pPr algn="ctr" indent="0" marL="0">
-              <a:buNone/>
-            </a:pPr>
-            <a:r>
-              <a:rPr lang="en-US" sz="6400" dirty="0">
-                <a:solidFill>
-                  <a:srgbClr val="1A1712"/>
-                </a:solidFill>
-                <a:latin typeface="Alsina" pitchFamily="34" charset="0"/>
-                <a:ea typeface="Alsina" pitchFamily="34" charset="-122"/>
-                <a:cs typeface="Alsina" pitchFamily="34" charset="-120"/>
-              </a:rPr>
-              <a:t>Chat is a revenue stream now.</a:t>
-            </a:r>
-            <a:endParaRPr lang="en-US" sz="6400" dirty="0"/>
-          </a:p>
-        </p:txBody>
-      </p:sp>
-      <p:sp>
-        <p:nvSpPr>
-          <p:cNvPr id="3" name="Text 1"/>
-          <p:cNvSpPr txBox="1"/>
-          <p:nvPr/>
-        </p:nvSpPr>
-        <p:spPr>
-          <a:xfrm>
-            <a:off x="640080" y="3611880"/>
-            <a:ext cx="10972800" cy="640080"/>
-          </a:xfrm>
-          <a:prstGeom prst="rect">
-            <a:avLst/>
-          </a:prstGeom>
-          <a:noFill/>
-          <a:ln/>
-        </p:spPr>
-        <p:txBody>
-          <a:bodyPr wrap="square" lIns="0" tIns="0" rIns="0" bIns="0" rtlCol="0" anchor="ctr"/>
-          <a:lstStyle/>
-          <a:p>
-            <a:pPr algn="ctr" indent="0" marL="0">
-              <a:buNone/>
-            </a:pPr>
-            <a:r>
-              <a:rPr lang="en-US" sz="2800" b="1" dirty="0">
-                <a:solidFill>
-                  <a:srgbClr val="BF3A1E"/>
-                </a:solidFill>
-                <a:latin typeface="Courier New" pitchFamily="34" charset="0"/>
-                <a:ea typeface="Courier New" pitchFamily="34" charset="-122"/>
-                <a:cs typeface="Courier New" pitchFamily="34" charset="-120"/>
-              </a:rPr>
-              <a:t>monadchat-rvfc1.vercel.app</a:t>
-            </a:r>
-            <a:endParaRPr lang="en-US" sz="2800" dirty="0"/>
-          </a:p>
-        </p:txBody>
-      </p:sp>
-      <p:sp>
-        <p:nvSpPr>
-          <p:cNvPr id="4" name="Text 2"/>
-          <p:cNvSpPr txBox="1"/>
-          <p:nvPr/>
-        </p:nvSpPr>
-        <p:spPr>
-          <a:xfrm>
-            <a:off x="640080" y="4389120"/>
-            <a:ext cx="10972800" cy="457200"/>
-          </a:xfrm>
-          <a:prstGeom prst="rect">
-            <a:avLst/>
-          </a:prstGeom>
-          <a:noFill/>
-          <a:ln/>
-        </p:spPr>
-        <p:txBody>
-          <a:bodyPr wrap="square" lIns="0" tIns="0" rIns="0" bIns="0" rtlCol="0" anchor="ctr"/>
-          <a:lstStyle/>
-          <a:p>
-            <a:pPr algn="ctr" indent="0" marL="0">
-              <a:buNone/>
-            </a:pPr>
-            <a:r>
-              <a:rPr lang="en-US" sz="1700" i="1" dirty="0">
-                <a:solidFill>
-                  <a:srgbClr val="8A8274"/>
-                </a:solidFill>
-                <a:latin typeface="Georgia" pitchFamily="34" charset="0"/>
-                <a:ea typeface="Georgia" pitchFamily="34" charset="-122"/>
-                <a:cs typeface="Georgia" pitchFamily="34" charset="-120"/>
-              </a:rPr>
-              <a:t>open the demo · write a word · watch it land in half a second</a:t>
-            </a:r>
-            <a:endParaRPr lang="en-US" sz="1700" dirty="0"/>
-          </a:p>
-        </p:txBody>
-      </p:sp>
-      <p:sp>
-        <p:nvSpPr>
-          <p:cNvPr id="5" name="Text 3"/>
-          <p:cNvSpPr txBox="1"/>
-          <p:nvPr/>
-        </p:nvSpPr>
-        <p:spPr>
-          <a:xfrm>
-            <a:off x="640080" y="6035040"/>
-            <a:ext cx="5943600" cy="365760"/>
-          </a:xfrm>
-          <a:prstGeom prst="rect">
-            <a:avLst/>
-          </a:prstGeom>
-          <a:noFill/>
-          <a:ln/>
-        </p:spPr>
-        <p:txBody>
-          <a:bodyPr wrap="square" lIns="0" tIns="0" rIns="0" bIns="0" rtlCol="0" anchor="ctr"/>
-          <a:lstStyle/>
-          <a:p>
-            <a:pPr indent="0" marL="0">
-              <a:buNone/>
-            </a:pPr>
-            <a:r>
-              <a:rPr lang="en-US" sz="1100" dirty="0">
-                <a:solidFill>
-                  <a:srgbClr val="8A8274"/>
-                </a:solidFill>
-                <a:latin typeface="Courier New" pitchFamily="34" charset="0"/>
-                <a:ea typeface="Courier New" pitchFamily="34" charset="-122"/>
-                <a:cs typeface="Courier New" pitchFamily="34" charset="-120"/>
-              </a:rPr>
               <a:t>contract 0xba3c36b0…4be8 — verified</a:t>
             </a:r>
             <a:endParaRPr lang="en-US" sz="1100" dirty="0"/>
@@ -4227,11 +3135,11 @@
           <a:bodyPr wrap="square" lIns="0" tIns="0" rIns="0" bIns="0" rtlCol="0" anchor="ctr"/>
           <a:lstStyle/>
           <a:p>
-            <a:pPr algn="r" indent="0" marL="0">
-              <a:buNone/>
-            </a:pPr>
-            <a:r>
-              <a:rPr lang="en-US" sz="1100" spc="200" kern="0" dirty="0">
+            <a:pPr marL="0" indent="0" algn="r">
+              <a:buNone/>
+            </a:pPr>
+            <a:r>
+              <a:rPr lang="en-US" sz="1100" kern="0" spc="200" dirty="0">
                 <a:solidFill>
                   <a:srgbClr val="8A8274"/>
                 </a:solidFill>
@@ -4546,4 +3454,319 @@
     </a:ext>
   </a:extLst>
 </a:theme>
+</file>
+
+<file path=ppt/theme/theme2.xml><?xml version="1.0" encoding="utf-8"?>
+<a:theme xmlns:a="http://schemas.openxmlformats.org/drawingml/2006/main" name="Office Theme">
+  <a:themeElements>
+    <a:clrScheme name="Office">
+      <a:dk1>
+        <a:sysClr val="windowText" lastClr="000000"/>
+      </a:dk1>
+      <a:lt1>
+        <a:sysClr val="window" lastClr="FFFFFF"/>
+      </a:lt1>
+      <a:dk2>
+        <a:srgbClr val="0E2841"/>
+      </a:dk2>
+      <a:lt2>
+        <a:srgbClr val="E8E8E8"/>
+      </a:lt2>
+      <a:accent1>
+        <a:srgbClr val="156082"/>
+      </a:accent1>
+      <a:accent2>
+        <a:srgbClr val="E97132"/>
+      </a:accent2>
+      <a:accent3>
+        <a:srgbClr val="196B24"/>
+      </a:accent3>
+      <a:accent4>
+        <a:srgbClr val="0F9ED5"/>
+      </a:accent4>
+      <a:accent5>
+        <a:srgbClr val="A02B93"/>
+      </a:accent5>
+      <a:accent6>
+        <a:srgbClr val="4EA72E"/>
+      </a:accent6>
+      <a:hlink>
+        <a:srgbClr val="467886"/>
+      </a:hlink>
+      <a:folHlink>
+        <a:srgbClr val="96607D"/>
+      </a:folHlink>
+    </a:clrScheme>
+    <a:fontScheme name="Office">
+      <a:majorFont>
+        <a:latin typeface="Aptos Display" panose="02110004020202020204"/>
+        <a:ea typeface=""/>
+        <a:cs typeface=""/>
+        <a:font script="Jpan" typeface="游ゴシック Light"/>
+        <a:font script="Hang" typeface="맑은 고딕"/>
+        <a:font script="Hans" typeface="等线 Light"/>
+        <a:font script="Hant" typeface="新細明體"/>
+        <a:font script="Arab" typeface="Times New Roman"/>
+        <a:font script="Hebr" typeface="Times New Roman"/>
+        <a:font script="Thai" typeface="Angsana New"/>
+        <a:font script="Ethi" typeface="Nyala"/>
+        <a:font script="Beng" typeface="Vrinda"/>
+        <a:font script="Gujr" typeface="Shruti"/>
+        <a:font script="Khmr" typeface="MoolBoran"/>
+        <a:font script="Knda" typeface="Tunga"/>
+        <a:font script="Guru" typeface="Raavi"/>
+        <a:font script="Cans" typeface="Euphemia"/>
+        <a:font script="Cher" typeface="Plantagenet Cherokee"/>
+        <a:font script="Yiii" typeface="Microsoft Yi Baiti"/>
+        <a:font script="Tibt" typeface="Microsoft Himalaya"/>
+        <a:font script="Thaa" typeface="MV Boli"/>
+        <a:font script="Deva" typeface="Mangal"/>
+        <a:font script="Telu" typeface="Gautami"/>
+        <a:font script="Taml" typeface="Latha"/>
+        <a:font script="Syrc" typeface="Estrangelo Edessa"/>
+        <a:font script="Orya" typeface="Kalinga"/>
+        <a:font script="Mlym" typeface="Kartika"/>
+        <a:font script="Laoo" typeface="DokChampa"/>
+        <a:font script="Sinh" typeface="Iskoola Pota"/>
+        <a:font script="Mong" typeface="Mongolian Baiti"/>
+        <a:font script="Viet" typeface="Times New Roman"/>
+        <a:font script="Uigh" typeface="Microsoft Uighur"/>
+        <a:font script="Geor" typeface="Sylfaen"/>
+        <a:font script="Armn" typeface="Arial"/>
+        <a:font script="Bugi" typeface="Leelawadee UI"/>
+        <a:font script="Bopo" typeface="Microsoft JhengHei"/>
+        <a:font script="Java" typeface="Javanese Text"/>
+        <a:font script="Lisu" typeface="Segoe UI"/>
+        <a:font script="Mymr" typeface="Myanmar Text"/>
+        <a:font script="Nkoo" typeface="Ebrima"/>
+        <a:font script="Olck" typeface="Nirmala UI"/>
+        <a:font script="Osma" typeface="Ebrima"/>
+        <a:font script="Phag" typeface="Phagspa"/>
+        <a:font script="Syrn" typeface="Estrangelo Edessa"/>
+        <a:font script="Syrj" typeface="Estrangelo Edessa"/>
+        <a:font script="Syre" typeface="Estrangelo Edessa"/>
+        <a:font script="Sora" typeface="Nirmala UI"/>
+        <a:font script="Tale" typeface="Microsoft Tai Le"/>
+        <a:font script="Talu" typeface="Microsoft New Tai Lue"/>
+        <a:font script="Tfng" typeface="Ebrima"/>
+      </a:majorFont>
+      <a:minorFont>
+        <a:latin typeface="Aptos" panose="02110004020202020204"/>
+        <a:ea typeface=""/>
+        <a:cs typeface=""/>
+        <a:font script="Jpan" typeface="游ゴシック"/>
+        <a:font script="Hang" typeface="맑은 고딕"/>
+        <a:font script="Hans" typeface="等线"/>
+        <a:font script="Hant" typeface="新細明體"/>
+        <a:font script="Arab" typeface="Arial"/>
+        <a:font script="Hebr" typeface="Arial"/>
+        <a:font script="Thai" typeface="Cordia New"/>
+        <a:font script="Ethi" typeface="Nyala"/>
+        <a:font script="Beng" typeface="Vrinda"/>
+        <a:font script="Gujr" typeface="Shruti"/>
+        <a:font script="Khmr" typeface="DaunPenh"/>
+        <a:font script="Knda" typeface="Tunga"/>
+        <a:font script="Guru" typeface="Raavi"/>
+        <a:font script="Cans" typeface="Euphemia"/>
+        <a:font script="Cher" typeface="Plantagenet Cherokee"/>
+        <a:font script="Yiii" typeface="Microsoft Yi Baiti"/>
+        <a:font script="Tibt" typeface="Microsoft Himalaya"/>
+        <a:font script="Thaa" typeface="MV Boli"/>
+        <a:font script="Deva" typeface="Mangal"/>
+        <a:font script="Telu" typeface="Gautami"/>
+        <a:font script="Taml" typeface="Latha"/>
+        <a:font script="Syrc" typeface="Estrangelo Edessa"/>
+        <a:font script="Orya" typeface="Kalinga"/>
+        <a:font script="Mlym" typeface="Kartika"/>
+        <a:font script="Laoo" typeface="DokChampa"/>
+        <a:font script="Sinh" typeface="Iskoola Pota"/>
+        <a:font script="Mong" typeface="Mongolian Baiti"/>
+        <a:font script="Viet" typeface="Arial"/>
+        <a:font script="Uigh" typeface="Microsoft Uighur"/>
+        <a:font script="Geor" typeface="Sylfaen"/>
+        <a:font script="Armn" typeface="Arial"/>
+        <a:font script="Bugi" typeface="Leelawadee UI"/>
+        <a:font script="Bopo" typeface="Microsoft JhengHei"/>
+        <a:font script="Java" typeface="Javanese Text"/>
+        <a:font script="Lisu" typeface="Segoe UI"/>
+        <a:font script="Mymr" typeface="Myanmar Text"/>
+        <a:font script="Nkoo" typeface="Ebrima"/>
+        <a:font script="Olck" typeface="Nirmala UI"/>
+        <a:font script="Osma" typeface="Ebrima"/>
+        <a:font script="Phag" typeface="Phagspa"/>
+        <a:font script="Syrn" typeface="Estrangelo Edessa"/>
+        <a:font script="Syrj" typeface="Estrangelo Edessa"/>
+        <a:font script="Syre" typeface="Estrangelo Edessa"/>
+        <a:font script="Sora" typeface="Nirmala UI"/>
+        <a:font script="Tale" typeface="Microsoft Tai Le"/>
+        <a:font script="Talu" typeface="Microsoft New Tai Lue"/>
+        <a:font script="Tfng" typeface="Ebrima"/>
+      </a:minorFont>
+    </a:fontScheme>
+    <a:fmtScheme name="Office">
+      <a:fillStyleLst>
+        <a:solidFill>
+          <a:schemeClr val="phClr"/>
+        </a:solidFill>
+        <a:gradFill rotWithShape="1">
+          <a:gsLst>
+            <a:gs pos="0">
+              <a:schemeClr val="phClr">
+                <a:lumMod val="110000"/>
+                <a:satMod val="105000"/>
+                <a:tint val="67000"/>
+              </a:schemeClr>
+            </a:gs>
+            <a:gs pos="50000">
+              <a:schemeClr val="phClr">
+                <a:lumMod val="105000"/>
+                <a:satMod val="103000"/>
+                <a:tint val="73000"/>
+              </a:schemeClr>
+            </a:gs>
+            <a:gs pos="100000">
+              <a:schemeClr val="phClr">
+                <a:lumMod val="105000"/>
+                <a:satMod val="109000"/>
+                <a:tint val="81000"/>
+              </a:schemeClr>
+            </a:gs>
+          </a:gsLst>
+          <a:lin ang="5400000" scaled="0"/>
+        </a:gradFill>
+        <a:gradFill rotWithShape="1">
+          <a:gsLst>
+            <a:gs pos="0">
+              <a:schemeClr val="phClr">
+                <a:satMod val="103000"/>
+                <a:lumMod val="102000"/>
+                <a:tint val="94000"/>
+              </a:schemeClr>
+            </a:gs>
+            <a:gs pos="50000">
+              <a:schemeClr val="phClr">
+                <a:satMod val="110000"/>
+                <a:lumMod val="100000"/>
+                <a:shade val="100000"/>
+              </a:schemeClr>
+            </a:gs>
+            <a:gs pos="100000">
+              <a:schemeClr val="phClr">
+                <a:lumMod val="99000"/>
+                <a:satMod val="120000"/>
+                <a:shade val="78000"/>
+              </a:schemeClr>
+            </a:gs>
+          </a:gsLst>
+          <a:lin ang="5400000" scaled="0"/>
+        </a:gradFill>
+      </a:fillStyleLst>
+      <a:lnStyleLst>
+        <a:ln w="12700" cap="flat" cmpd="sng" algn="ctr">
+          <a:solidFill>
+            <a:schemeClr val="phClr"/>
+          </a:solidFill>
+          <a:prstDash val="solid"/>
+          <a:miter lim="800000"/>
+        </a:ln>
+        <a:ln w="19050" cap="flat" cmpd="sng" algn="ctr">
+          <a:solidFill>
+            <a:schemeClr val="phClr"/>
+          </a:solidFill>
+          <a:prstDash val="solid"/>
+          <a:miter lim="800000"/>
+        </a:ln>
+        <a:ln w="25400" cap="flat" cmpd="sng" algn="ctr">
+          <a:solidFill>
+            <a:schemeClr val="phClr"/>
+          </a:solidFill>
+          <a:prstDash val="solid"/>
+          <a:miter lim="800000"/>
+        </a:ln>
+      </a:lnStyleLst>
+      <a:effectStyleLst>
+        <a:effectStyle>
+          <a:effectLst/>
+        </a:effectStyle>
+        <a:effectStyle>
+          <a:effectLst/>
+        </a:effectStyle>
+        <a:effectStyle>
+          <a:effectLst>
+            <a:outerShdw blurRad="57150" dist="19050" dir="5400000" algn="ctr" rotWithShape="0">
+              <a:srgbClr val="000000">
+                <a:alpha val="63000"/>
+              </a:srgbClr>
+            </a:outerShdw>
+          </a:effectLst>
+        </a:effectStyle>
+      </a:effectStyleLst>
+      <a:bgFillStyleLst>
+        <a:solidFill>
+          <a:schemeClr val="phClr"/>
+        </a:solidFill>
+        <a:solidFill>
+          <a:schemeClr val="phClr">
+            <a:tint val="95000"/>
+            <a:satMod val="170000"/>
+          </a:schemeClr>
+        </a:solidFill>
+        <a:gradFill rotWithShape="1">
+          <a:gsLst>
+            <a:gs pos="0">
+              <a:schemeClr val="phClr">
+                <a:tint val="93000"/>
+                <a:satMod val="150000"/>
+                <a:shade val="98000"/>
+                <a:lumMod val="102000"/>
+              </a:schemeClr>
+            </a:gs>
+            <a:gs pos="50000">
+              <a:schemeClr val="phClr">
+                <a:tint val="98000"/>
+                <a:satMod val="130000"/>
+                <a:shade val="90000"/>
+                <a:lumMod val="103000"/>
+              </a:schemeClr>
+            </a:gs>
+            <a:gs pos="100000">
+              <a:schemeClr val="phClr">
+                <a:shade val="63000"/>
+                <a:satMod val="120000"/>
+              </a:schemeClr>
+            </a:gs>
+          </a:gsLst>
+          <a:lin ang="5400000" scaled="0"/>
+        </a:gradFill>
+      </a:bgFillStyleLst>
+    </a:fmtScheme>
+  </a:themeElements>
+  <a:objectDefaults>
+    <a:lnDef>
+      <a:spPr/>
+      <a:bodyPr/>
+      <a:lstStyle/>
+      <a:style>
+        <a:lnRef idx="2">
+          <a:schemeClr val="accent1"/>
+        </a:lnRef>
+        <a:fillRef idx="0">
+          <a:schemeClr val="accent1"/>
+        </a:fillRef>
+        <a:effectRef idx="1">
+          <a:schemeClr val="accent1"/>
+        </a:effectRef>
+        <a:fontRef idx="minor">
+          <a:schemeClr val="tx1"/>
+        </a:fontRef>
+      </a:style>
+    </a:lnDef>
+  </a:objectDefaults>
+  <a:extraClrSchemeLst/>
+  <a:extLst>
+    <a:ext uri="{05A4C25C-085E-4340-85A3-A5531E510DB2}">
+      <thm15:themeFamily xmlns:thm15="http://schemas.microsoft.com/office/thememl/2012/main" name="Office Theme" id="{2E142A2C-CD16-42D6-873A-C26D2A0506FA}" vid="{1BDDFF52-6CD6-40A5-AB3C-68EB2F1E4D0A}"/>
+    </a:ext>
+  </a:extLst>
+</a:theme>
 </file>